--- a/presentation/slides.pptx
+++ b/presentation/slides.pptx
@@ -9,10 +9,6 @@
     <p:sldId id="257" r:id="rId3"/>
     <p:sldId id="258" r:id="rId4"/>
     <p:sldId id="259" r:id="rId5"/>
-    <p:sldId id="260" r:id="rId6"/>
-    <p:sldId id="261" r:id="rId7"/>
-    <p:sldId id="262" r:id="rId8"/>
-    <p:sldId id="263" r:id="rId9"/>
   </p:sldIdLst>
   <p:notesMasterIdLst>
     <p:notesMasterId r:id="rId10"/>
@@ -815,358 +811,6 @@
 </p:notes>
 </file>
 
-<file path=ppt/notesSlides/notesSlide5.xml><?xml version="1.0" encoding="utf-8"?>
-<p:notes xmlns:p14="http://schemas.microsoft.com/office/powerpoint/2010/main" xmlns:a="http://schemas.openxmlformats.org/drawingml/2006/main" xmlns:r="http://schemas.openxmlformats.org/officeDocument/2006/relationships" xmlns:p="http://schemas.openxmlformats.org/presentationml/2006/main">
-  <p:cSld>
-    <p:spTree>
-      <p:nvGrpSpPr>
-        <p:cNvPr id="1" name=""/>
-        <p:cNvGrpSpPr/>
-        <p:nvPr/>
-      </p:nvGrpSpPr>
-      <p:grpSpPr>
-        <a:xfrm>
-          <a:off x="0" y="0"/>
-          <a:ext cx="0" cy="0"/>
-          <a:chOff x="0" y="0"/>
-          <a:chExt cx="0" cy="0"/>
-        </a:xfrm>
-      </p:grpSpPr>
-      <p:sp>
-        <p:nvSpPr>
-          <p:cNvPr id="2" name="Slide Image Placeholder 1"/>
-          <p:cNvSpPr>
-            <a:spLocks noGrp="1" noRot="1" noChangeAspect="1"/>
-          </p:cNvSpPr>
-          <p:nvPr>
-            <p:ph type="sldImg"/>
-          </p:nvPr>
-        </p:nvSpPr>
-        <p:spPr/>
-      </p:sp>
-      <p:sp>
-        <p:nvSpPr>
-          <p:cNvPr id="3" name="Notes Placeholder 2"/>
-          <p:cNvSpPr>
-            <a:spLocks noGrp="1"/>
-          </p:cNvSpPr>
-          <p:nvPr>
-            <p:ph type="body" idx="1"/>
-          </p:nvPr>
-        </p:nvSpPr>
-        <p:spPr/>
-        <p:txBody>
-          <a:bodyPr/>
-          <a:lstStyle/>
-          <a:p>
-            <a:r>
-              <a:rPr lang="en-US" dirty="0"/>
-              <a:t>Starting state: 5 vaccine shipments in transit LA to Chicago to NYC, 5 idle reefer trucks. Click LA Port Strike; Impact Engine finds 3 affected shipments in under a second. SHIP-001 scores 87 critical, SHIP-003 72 high, SHIP-005 61 watch. Action Center recommends rerouting SHIP-001 via Denver with truck T-002. Approve and Execute creates an AuditEvent. Then ask the AI chat which shipments are most at risk and why.</a:t>
-            </a:r>
-            <a:endParaRPr lang="en-US" dirty="0"/>
-          </a:p>
-        </p:txBody>
-      </p:sp>
-      <p:sp>
-        <p:nvSpPr>
-          <p:cNvPr id="4" name="Slide Number Placeholder 3"/>
-          <p:cNvSpPr>
-            <a:spLocks noGrp="1"/>
-          </p:cNvSpPr>
-          <p:nvPr>
-            <p:ph type="sldNum" sz="quarter" idx="10"/>
-          </p:nvPr>
-        </p:nvSpPr>
-        <p:spPr/>
-        <p:txBody>
-          <a:bodyPr/>
-          <a:lstStyle/>
-          <a:p>
-            <a:fld id="{F7021451-1387-4CA6-816F-3879F97B5CBC}" type="slidenum">
-              <a:rPr lang="en-US"/>
-              <a:t>5</a:t>
-            </a:fld>
-            <a:endParaRPr lang="en-US"/>
-          </a:p>
-        </p:txBody>
-      </p:sp>
-    </p:spTree>
-    <p:extLst>
-      <p:ext uri="{BB962C8B-B14F-4D97-AF65-F5344CB8AC3E}">
-        <p14:creationId xmlns:p14="http://schemas.microsoft.com/office/powerpoint/2010/main" val="1024086991"/>
-      </p:ext>
-    </p:extLst>
-  </p:cSld>
-  <p:clrMapOvr>
-    <a:masterClrMapping/>
-  </p:clrMapOvr>
-</p:notes>
-</file>
-
-<file path=ppt/notesSlides/notesSlide6.xml><?xml version="1.0" encoding="utf-8"?>
-<p:notes xmlns:p14="http://schemas.microsoft.com/office/powerpoint/2010/main" xmlns:a="http://schemas.openxmlformats.org/drawingml/2006/main" xmlns:r="http://schemas.openxmlformats.org/officeDocument/2006/relationships" xmlns:p="http://schemas.openxmlformats.org/presentationml/2006/main">
-  <p:cSld>
-    <p:spTree>
-      <p:nvGrpSpPr>
-        <p:cNvPr id="1" name=""/>
-        <p:cNvGrpSpPr/>
-        <p:nvPr/>
-      </p:nvGrpSpPr>
-      <p:grpSpPr>
-        <a:xfrm>
-          <a:off x="0" y="0"/>
-          <a:ext cx="0" cy="0"/>
-          <a:chOff x="0" y="0"/>
-          <a:chExt cx="0" cy="0"/>
-        </a:xfrm>
-      </p:grpSpPr>
-      <p:sp>
-        <p:nvSpPr>
-          <p:cNvPr id="2" name="Slide Image Placeholder 1"/>
-          <p:cNvSpPr>
-            <a:spLocks noGrp="1" noRot="1" noChangeAspect="1"/>
-          </p:cNvSpPr>
-          <p:nvPr>
-            <p:ph type="sldImg"/>
-          </p:nvPr>
-        </p:nvSpPr>
-        <p:spPr/>
-      </p:sp>
-      <p:sp>
-        <p:nvSpPr>
-          <p:cNvPr id="3" name="Notes Placeholder 2"/>
-          <p:cNvSpPr>
-            <a:spLocks noGrp="1"/>
-          </p:cNvSpPr>
-          <p:nvPr>
-            <p:ph type="body" idx="1"/>
-          </p:nvPr>
-        </p:nvSpPr>
-        <p:spPr/>
-        <p:txBody>
-          <a:bodyPr/>
-          <a:lstStyle/>
-          <a:p>
-            <a:r>
-              <a:rPr lang="en-US" dirty="0"/>
-              <a:t>watsonx.ai with Llama 4 Maverick powers three call types: GDP excursion classification, rerouting strategy generation, and the Operations Copilot. The custom IBM Bob MCP server exposes six tools so Bob queries real risk scores rather than inventing numbers. IBM Bob was also our coding agent throughout development.</a:t>
-            </a:r>
-            <a:endParaRPr lang="en-US" dirty="0"/>
-          </a:p>
-        </p:txBody>
-      </p:sp>
-      <p:sp>
-        <p:nvSpPr>
-          <p:cNvPr id="4" name="Slide Number Placeholder 3"/>
-          <p:cNvSpPr>
-            <a:spLocks noGrp="1"/>
-          </p:cNvSpPr>
-          <p:nvPr>
-            <p:ph type="sldNum" sz="quarter" idx="10"/>
-          </p:nvPr>
-        </p:nvSpPr>
-        <p:spPr/>
-        <p:txBody>
-          <a:bodyPr/>
-          <a:lstStyle/>
-          <a:p>
-            <a:fld id="{F7021451-1387-4CA6-816F-3879F97B5CBC}" type="slidenum">
-              <a:rPr lang="en-US"/>
-              <a:t>6</a:t>
-            </a:fld>
-            <a:endParaRPr lang="en-US"/>
-          </a:p>
-        </p:txBody>
-      </p:sp>
-    </p:spTree>
-    <p:extLst>
-      <p:ext uri="{BB962C8B-B14F-4D97-AF65-F5344CB8AC3E}">
-        <p14:creationId xmlns:p14="http://schemas.microsoft.com/office/powerpoint/2010/main" val="1024086991"/>
-      </p:ext>
-    </p:extLst>
-  </p:cSld>
-  <p:clrMapOvr>
-    <a:masterClrMapping/>
-  </p:clrMapOvr>
-</p:notes>
-</file>
-
-<file path=ppt/notesSlides/notesSlide7.xml><?xml version="1.0" encoding="utf-8"?>
-<p:notes xmlns:p14="http://schemas.microsoft.com/office/powerpoint/2010/main" xmlns:a="http://schemas.openxmlformats.org/drawingml/2006/main" xmlns:r="http://schemas.openxmlformats.org/officeDocument/2006/relationships" xmlns:p="http://schemas.openxmlformats.org/presentationml/2006/main">
-  <p:cSld>
-    <p:spTree>
-      <p:nvGrpSpPr>
-        <p:cNvPr id="1" name=""/>
-        <p:cNvGrpSpPr/>
-        <p:nvPr/>
-      </p:nvGrpSpPr>
-      <p:grpSpPr>
-        <a:xfrm>
-          <a:off x="0" y="0"/>
-          <a:ext cx="0" cy="0"/>
-          <a:chOff x="0" y="0"/>
-          <a:chExt cx="0" cy="0"/>
-        </a:xfrm>
-      </p:grpSpPr>
-      <p:sp>
-        <p:nvSpPr>
-          <p:cNvPr id="2" name="Slide Image Placeholder 1"/>
-          <p:cNvSpPr>
-            <a:spLocks noGrp="1" noRot="1" noChangeAspect="1"/>
-          </p:cNvSpPr>
-          <p:nvPr>
-            <p:ph type="sldImg"/>
-          </p:nvPr>
-        </p:nvSpPr>
-        <p:spPr/>
-      </p:sp>
-      <p:sp>
-        <p:nvSpPr>
-          <p:cNvPr id="3" name="Notes Placeholder 2"/>
-          <p:cNvSpPr>
-            <a:spLocks noGrp="1"/>
-          </p:cNvSpPr>
-          <p:nvPr>
-            <p:ph type="body" idx="1"/>
-          </p:nvPr>
-        </p:nvSpPr>
-        <p:spPr/>
-        <p:txBody>
-          <a:bodyPr/>
-          <a:lstStyle/>
-          <a:p>
-            <a:r>
-              <a:rPr lang="en-US" dirty="0"/>
-              <a:t>Disruption triage goes from 2–4 hours of manual work to under 5 seconds automated. Excursions are detected in real time before delivery, GDP classification is instant, fleet redeployment is a one-click approval, and every action lands in an immutable audit trail.</a:t>
-            </a:r>
-            <a:endParaRPr lang="en-US" dirty="0"/>
-          </a:p>
-        </p:txBody>
-      </p:sp>
-      <p:sp>
-        <p:nvSpPr>
-          <p:cNvPr id="4" name="Slide Number Placeholder 3"/>
-          <p:cNvSpPr>
-            <a:spLocks noGrp="1"/>
-          </p:cNvSpPr>
-          <p:nvPr>
-            <p:ph type="sldNum" sz="quarter" idx="10"/>
-          </p:nvPr>
-        </p:nvSpPr>
-        <p:spPr/>
-        <p:txBody>
-          <a:bodyPr/>
-          <a:lstStyle/>
-          <a:p>
-            <a:fld id="{F7021451-1387-4CA6-816F-3879F97B5CBC}" type="slidenum">
-              <a:rPr lang="en-US"/>
-              <a:t>7</a:t>
-            </a:fld>
-            <a:endParaRPr lang="en-US"/>
-          </a:p>
-        </p:txBody>
-      </p:sp>
-    </p:spTree>
-    <p:extLst>
-      <p:ext uri="{BB962C8B-B14F-4D97-AF65-F5344CB8AC3E}">
-        <p14:creationId xmlns:p14="http://schemas.microsoft.com/office/powerpoint/2010/main" val="1024086991"/>
-      </p:ext>
-    </p:extLst>
-  </p:cSld>
-  <p:clrMapOvr>
-    <a:masterClrMapping/>
-  </p:clrMapOvr>
-</p:notes>
-</file>
-
-<file path=ppt/notesSlides/notesSlide8.xml><?xml version="1.0" encoding="utf-8"?>
-<p:notes xmlns:p14="http://schemas.microsoft.com/office/powerpoint/2010/main" xmlns:a="http://schemas.openxmlformats.org/drawingml/2006/main" xmlns:r="http://schemas.openxmlformats.org/officeDocument/2006/relationships" xmlns:p="http://schemas.openxmlformats.org/presentationml/2006/main">
-  <p:cSld>
-    <p:spTree>
-      <p:nvGrpSpPr>
-        <p:cNvPr id="1" name=""/>
-        <p:cNvGrpSpPr/>
-        <p:nvPr/>
-      </p:nvGrpSpPr>
-      <p:grpSpPr>
-        <a:xfrm>
-          <a:off x="0" y="0"/>
-          <a:ext cx="0" cy="0"/>
-          <a:chOff x="0" y="0"/>
-          <a:chExt cx="0" cy="0"/>
-        </a:xfrm>
-      </p:grpSpPr>
-      <p:sp>
-        <p:nvSpPr>
-          <p:cNvPr id="2" name="Slide Image Placeholder 1"/>
-          <p:cNvSpPr>
-            <a:spLocks noGrp="1" noRot="1" noChangeAspect="1"/>
-          </p:cNvSpPr>
-          <p:nvPr>
-            <p:ph type="sldImg"/>
-          </p:nvPr>
-        </p:nvSpPr>
-        <p:spPr/>
-      </p:sp>
-      <p:sp>
-        <p:nvSpPr>
-          <p:cNvPr id="3" name="Notes Placeholder 2"/>
-          <p:cNvSpPr>
-            <a:spLocks noGrp="1"/>
-          </p:cNvSpPr>
-          <p:nvPr>
-            <p:ph type="body" idx="1"/>
-          </p:nvPr>
-        </p:nvSpPr>
-        <p:spPr/>
-        <p:txBody>
-          <a:bodyPr/>
-          <a:lstStyle/>
-          <a:p>
-            <a:r>
-              <a:rPr lang="en-US" dirty="0"/>
-              <a:t>Team Error Fellows, led by Priyank. What we are most proud of is the strict separation of deterministic computation from generative AI. Next steps: live disruption feeds, a real TMS routing engine, IBM Cloud deployment with MongoDB Atlas and Redis, and multi-tenant MCP tools. Thank you.</a:t>
-            </a:r>
-            <a:endParaRPr lang="en-US" dirty="0"/>
-          </a:p>
-        </p:txBody>
-      </p:sp>
-      <p:sp>
-        <p:nvSpPr>
-          <p:cNvPr id="4" name="Slide Number Placeholder 3"/>
-          <p:cNvSpPr>
-            <a:spLocks noGrp="1"/>
-          </p:cNvSpPr>
-          <p:nvPr>
-            <p:ph type="sldNum" sz="quarter" idx="10"/>
-          </p:nvPr>
-        </p:nvSpPr>
-        <p:spPr/>
-        <p:txBody>
-          <a:bodyPr/>
-          <a:lstStyle/>
-          <a:p>
-            <a:fld id="{F7021451-1387-4CA6-816F-3879F97B5CBC}" type="slidenum">
-              <a:rPr lang="en-US"/>
-              <a:t>8</a:t>
-            </a:fld>
-            <a:endParaRPr lang="en-US"/>
-          </a:p>
-        </p:txBody>
-      </p:sp>
-    </p:spTree>
-    <p:extLst>
-      <p:ext uri="{BB962C8B-B14F-4D97-AF65-F5344CB8AC3E}">
-        <p14:creationId xmlns:p14="http://schemas.microsoft.com/office/powerpoint/2010/main" val="1024086991"/>
-      </p:ext>
-    </p:extLst>
-  </p:cSld>
-  <p:clrMapOvr>
-    <a:masterClrMapping/>
-  </p:clrMapOvr>
-</p:notes>
-</file>
-
 <file path=ppt/slideLayouts/slideLayout1.xml><?xml version="1.0" encoding="utf-8"?>
 <p:sldLayout xmlns:a="http://schemas.openxmlformats.org/drawingml/2006/main" xmlns:r="http://schemas.openxmlformats.org/officeDocument/2006/relationships" xmlns:p="http://schemas.openxmlformats.org/presentationml/2006/main" preserve="1">
   <p:cSld name="DEFAULT">
@@ -1570,24 +1214,7 @@
                 <a:ea typeface="Arial" pitchFamily="34" charset="-122"/>
                 <a:cs typeface="Arial" pitchFamily="34" charset="-120"/>
               </a:rPr>
-              <a:t>SupplyChain</a:t>
-            </a:r>
-            <a:endParaRPr lang="en-US" sz="4400" dirty="0"/>
-          </a:p>
-          <a:p>
-            <a:pPr marL="0" indent="0">
-              <a:buNone/>
-            </a:pPr>
-            <a:r>
-              <a:rPr lang="en-US" sz="4400" b="1" dirty="0">
-                <a:solidFill>
-                  <a:srgbClr val="F1F5F9"/>
-                </a:solidFill>
-                <a:latin typeface="Arial" pitchFamily="34" charset="0"/>
-                <a:ea typeface="Arial" pitchFamily="34" charset="-122"/>
-                <a:cs typeface="Arial" pitchFamily="34" charset="-120"/>
-              </a:rPr>
-              <a:t>AI Copilot</a:t>
+              <a:t>LIFECLOCK</a:t>
             </a:r>
             <a:endParaRPr lang="en-US" sz="4400" dirty="0"/>
           </a:p>
@@ -1626,7 +1253,7 @@
                 <a:ea typeface="Calibri" pitchFamily="34" charset="-122"/>
                 <a:cs typeface="Calibri" pitchFamily="34" charset="-120"/>
               </a:rPr>
-              <a:t>Supply Chain Disruption Assistant &amp; Fleet Utilisation Optimizer</a:t>
+              <a:t>Cold-chain control tower, operated by IBM Bob</a:t>
             </a:r>
             <a:endParaRPr lang="en-US" sz="1600" dirty="0"/>
           </a:p>
@@ -2328,7 +1955,7 @@
                 <a:ea typeface="Arial" pitchFamily="34" charset="-122"/>
                 <a:cs typeface="Arial" pitchFamily="34" charset="-120"/>
               </a:rPr>
-              <a:t>Two crises hitting at the same time</a:t>
+              <a:t>A breach is found at the door, not in transit</a:t>
             </a:r>
             <a:endParaRPr lang="en-US" sz="2800" dirty="0"/>
           </a:p>
@@ -2367,7 +1994,7 @@
                 <a:ea typeface="Calibri" pitchFamily="34" charset="-122"/>
                 <a:cs typeface="Calibri" pitchFamily="34" charset="-120"/>
               </a:rPr>
-              <a:t>2 / 8</a:t>
+              <a:t>2 / 4</a:t>
             </a:r>
             <a:endParaRPr lang="en-US" sz="900" dirty="0"/>
           </a:p>
@@ -2482,7 +2109,7 @@
                 <a:ea typeface="Calibri" pitchFamily="34" charset="-122"/>
                 <a:cs typeface="Calibri" pitchFamily="34" charset="-120"/>
               </a:rPr>
-              <a:t>Disruption blindness</a:t>
+              <a:t>Disruptions cascade faster than people can triage</a:t>
             </a:r>
             <a:endParaRPr lang="en-US" sz="1700" dirty="0"/>
           </a:p>
@@ -2521,7 +2148,7 @@
                 <a:ea typeface="Calibri" pitchFamily="34" charset="-122"/>
                 <a:cs typeface="Calibri" pitchFamily="34" charset="-120"/>
               </a:rPr>
-              <a:t>A port strike, blizzard or hurricane hits and the team opens a spreadsheet. Manual triage takes 2–4 hours while reefer trucks sit idle and deadlines pass silently.</a:t>
+              <a:t>A port strike, blizzard or chokepoint closure hits hundreds of shipments at once. Which ones are actually affected, and which have already passed the zone? Today that answer is a spreadsheet and several hours.</a:t>
             </a:r>
             <a:endParaRPr lang="en-US" sz="1250" dirty="0"/>
           </a:p>
@@ -2636,7 +2263,7 @@
                 <a:ea typeface="Calibri" pitchFamily="34" charset="-122"/>
                 <a:cs typeface="Calibri" pitchFamily="34" charset="-120"/>
               </a:rPr>
-              <a:t>Cold-chain failure found too late</a:t>
+              <a:t>Cold-chain damage is discovered too late to act</a:t>
             </a:r>
             <a:endParaRPr lang="en-US" sz="1700" dirty="0"/>
           </a:p>
@@ -2675,7 +2302,7 @@
                 <a:ea typeface="Calibri" pitchFamily="34" charset="-122"/>
                 <a:cs typeface="Calibri" pitchFamily="34" charset="-120"/>
               </a:rPr>
-              <a:t>100 active shipments produce 14,400–28,800 IoT readings a day. Nobody reviews them live, so excursions surface at the dock, when nothing can be done.</a:t>
+              <a:t>Sensors log thousands of readings a day. Nobody reads them live, so a temperature excursion surfaces at delivery — after the cargo is already lost and the only question left is who pays.</a:t>
             </a:r>
             <a:endParaRPr lang="en-US" sz="1250" dirty="0"/>
           </a:p>
@@ -2753,7 +2380,7 @@
                 <a:ea typeface="Calibri" pitchFamily="34" charset="-122"/>
                 <a:cs typeface="Calibri" pitchFamily="34" charset="-120"/>
               </a:rPr>
-              <a:t>cargo loss per rejected vaccine shipment</a:t>
+              <a:t>a single spoiled vaccine consignment</a:t>
             </a:r>
             <a:endParaRPr lang="en-US" sz="1150" dirty="0"/>
           </a:p>
@@ -2831,7 +2458,7 @@
                 <a:ea typeface="Calibri" pitchFamily="34" charset="-122"/>
                 <a:cs typeface="Calibri" pitchFamily="34" charset="-120"/>
               </a:rPr>
-              <a:t>impact of one major port event (LA/Long Beach 2021)</a:t>
+              <a:t>cost of one major port event (LA/Long Beach, 2021)</a:t>
             </a:r>
             <a:endParaRPr lang="en-US" sz="1150" dirty="0"/>
           </a:p>
@@ -2909,7 +2536,7 @@
                 <a:ea typeface="Calibri" pitchFamily="34" charset="-122"/>
                 <a:cs typeface="Calibri" pitchFamily="34" charset="-120"/>
               </a:rPr>
-              <a:t>quality-manager time per manual GDP excursion report</a:t>
+              <a:t>to assemble one GDP deviation report by hand</a:t>
             </a:r>
             <a:endParaRPr lang="en-US" sz="1150" dirty="0"/>
           </a:p>
@@ -3019,7 +2646,7 @@
                 <a:ea typeface="Arial" pitchFamily="34" charset="-122"/>
                 <a:cs typeface="Arial" pitchFamily="34" charset="-120"/>
               </a:rPr>
-              <a:t>A real-time supply chain control tower</a:t>
+              <a:t>Every shipment has two deadlines. We compute both.</a:t>
             </a:r>
             <a:endParaRPr lang="en-US" sz="2800" dirty="0"/>
           </a:p>
@@ -3058,7 +2685,7 @@
                 <a:ea typeface="Calibri" pitchFamily="34" charset="-122"/>
                 <a:cs typeface="Calibri" pitchFamily="34" charset="-120"/>
               </a:rPr>
-              <a:t>3 / 8</a:t>
+              <a:t>3 / 4</a:t>
             </a:r>
             <a:endParaRPr lang="en-US" sz="900" dirty="0"/>
           </a:p>
@@ -3097,7 +2724,7 @@
                 <a:ea typeface="Calibri" pitchFamily="34" charset="-122"/>
                 <a:cs typeface="Calibri" pitchFamily="34" charset="-120"/>
               </a:rPr>
-              <a:t>Detect  →  Assess  →  Optimise  →  Act</a:t>
+              <a:t>Schedule clock  ·  Stability clock  →  whichever is smaller decides</a:t>
             </a:r>
             <a:endParaRPr lang="en-US" sz="1500" dirty="0"/>
           </a:p>
@@ -3212,7 +2839,7 @@
                 <a:ea typeface="Calibri" pitchFamily="34" charset="-122"/>
                 <a:cs typeface="Calibri" pitchFamily="34" charset="-120"/>
               </a:rPr>
-              <a:t>1. Detect</a:t>
+              <a:t>1. Two clocks</a:t>
             </a:r>
             <a:endParaRPr lang="en-US" sz="1400" dirty="0"/>
           </a:p>
@@ -3251,7 +2878,7 @@
                 <a:ea typeface="Calibri" pitchFamily="34" charset="-122"/>
                 <a:cs typeface="Calibri" pitchFamily="34" charset="-120"/>
               </a:rPr>
-              <a:t>Geospatial engine finds every shipment exposed to a disruption</a:t>
+              <a:t>Hours until late, and hours until the cargo is unusable</a:t>
             </a:r>
             <a:endParaRPr lang="en-US" sz="1150" dirty="0"/>
           </a:p>
@@ -3390,7 +3017,7 @@
                 <a:ea typeface="Calibri" pitchFamily="34" charset="-122"/>
                 <a:cs typeface="Calibri" pitchFamily="34" charset="-120"/>
               </a:rPr>
-              <a:t>2. Score</a:t>
+              <a:t>2. Predict</a:t>
             </a:r>
             <a:endParaRPr lang="en-US" sz="1400" dirty="0"/>
           </a:p>
@@ -3429,7 +3056,7 @@
                 <a:ea typeface="Calibri" pitchFamily="34" charset="-122"/>
                 <a:cs typeface="Calibri" pitchFamily="34" charset="-120"/>
               </a:rPr>
-              <a:t>6-factor deterministic risk engine ranks each one 0–100</a:t>
+              <a:t>Warns of a breach while the cargo is still in range</a:t>
             </a:r>
             <a:endParaRPr lang="en-US" sz="1150" dirty="0"/>
           </a:p>
@@ -3568,7 +3195,7 @@
                 <a:ea typeface="Calibri" pitchFamily="34" charset="-122"/>
                 <a:cs typeface="Calibri" pitchFamily="34" charset="-120"/>
               </a:rPr>
-              <a:t>3. Optimise</a:t>
+              <a:t>3. Grade</a:t>
             </a:r>
             <a:endParaRPr lang="en-US" sz="1400" dirty="0"/>
           </a:p>
@@ -3607,7 +3234,7 @@
                 <a:ea typeface="Calibri" pitchFamily="34" charset="-122"/>
                 <a:cs typeface="Calibri" pitchFamily="34" charset="-120"/>
               </a:rPr>
-              <a:t>Ranked reroutes plus matching of idle reefer trucks</a:t>
+              <a:t>Severity by rule matrix, MKT and versioned profiles</a:t>
             </a:r>
             <a:endParaRPr lang="en-US" sz="1150" dirty="0"/>
           </a:p>
@@ -3746,7 +3373,7 @@
                 <a:ea typeface="Calibri" pitchFamily="34" charset="-122"/>
                 <a:cs typeface="Calibri" pitchFamily="34" charset="-120"/>
               </a:rPr>
-              <a:t>4. Act</a:t>
+              <a:t>4. Decide</a:t>
             </a:r>
             <a:endParaRPr lang="en-US" sz="1400" dirty="0"/>
           </a:p>
@@ -3785,7 +3412,7 @@
                 <a:ea typeface="Calibri" pitchFamily="34" charset="-122"/>
                 <a:cs typeface="Calibri" pitchFamily="34" charset="-120"/>
               </a:rPr>
-              <a:t>Human approves; every action writes an immutable audit event</a:t>
+              <a:t>Routes that outlast the cargo are rejected, with the shortfall</a:t>
             </a:r>
             <a:endParaRPr lang="en-US" sz="1150" dirty="0"/>
           </a:p>
@@ -3924,7 +3551,7 @@
                 <a:ea typeface="Calibri" pitchFamily="34" charset="-122"/>
                 <a:cs typeface="Calibri" pitchFamily="34" charset="-120"/>
               </a:rPr>
-              <a:t>5. Monitor</a:t>
+              <a:t>5. Commit</a:t>
             </a:r>
             <a:endParaRPr lang="en-US" sz="1400" dirty="0"/>
           </a:p>
@@ -3963,7 +3590,7 @@
                 <a:ea typeface="Calibri" pitchFamily="34" charset="-122"/>
                 <a:cs typeface="Calibri" pitchFamily="34" charset="-120"/>
               </a:rPr>
-              <a:t>IoT telemetry watched 24/7; watsonx.ai classifies excursions before delivery</a:t>
+              <a:t>A human signs; Bob is refused, and the refusal is recorded</a:t>
             </a:r>
             <a:endParaRPr lang="en-US" sz="1150" dirty="0"/>
           </a:p>
@@ -4002,7 +3629,7 @@
                 <a:ea typeface="Calibri" pitchFamily="34" charset="-122"/>
                 <a:cs typeface="Calibri" pitchFamily="34" charset="-120"/>
               </a:rPr>
-              <a:t>Deterministic engines calculate  ·  watsonx.ai explains  ·  the operator decides</a:t>
+              <a:t>Engines decide  ·  watsonx explains  ·  only a human commits</a:t>
             </a:r>
             <a:endParaRPr lang="en-US" sz="1200" dirty="0"/>
           </a:p>
@@ -4112,7 +3739,7 @@
                 <a:ea typeface="Arial" pitchFamily="34" charset="-122"/>
                 <a:cs typeface="Arial" pitchFamily="34" charset="-120"/>
               </a:rPr>
-              <a:t>Deterministic engines + AI overlay</a:t>
+              <a:t>Pure engines, an agent that proposes, a human who commits</a:t>
             </a:r>
             <a:endParaRPr lang="en-US" sz="2800" dirty="0"/>
           </a:p>
@@ -4151,7 +3778,7 @@
                 <a:ea typeface="Calibri" pitchFamily="34" charset="-122"/>
                 <a:cs typeface="Calibri" pitchFamily="34" charset="-120"/>
               </a:rPr>
-              <a:t>4 / 8</a:t>
+              <a:t>4 / 4</a:t>
             </a:r>
             <a:endParaRPr lang="en-US" sz="900" dirty="0"/>
           </a:p>
@@ -4217,7 +3844,7 @@
                 <a:ea typeface="Calibri" pitchFamily="34" charset="-122"/>
                 <a:cs typeface="Calibri" pitchFamily="34" charset="-120"/>
               </a:rPr>
-              <a:t>IoT Sensor Stream (5s)</a:t>
+              <a:t>Simulated world (motion + telemetry)</a:t>
             </a:r>
             <a:endParaRPr lang="en-US" sz="1050" dirty="0"/>
           </a:p>
@@ -4283,7 +3910,7 @@
                 <a:ea typeface="Calibri" pitchFamily="34" charset="-122"/>
                 <a:cs typeface="Calibri" pitchFamily="34" charset="-120"/>
               </a:rPr>
-              <a:t>Cold Chain Engine</a:t>
+              <a:t>Sensor sanity → Regulatory engine</a:t>
             </a:r>
             <a:endParaRPr lang="en-US" sz="1050" dirty="0"/>
           </a:p>
@@ -4349,7 +3976,7 @@
                 <a:ea typeface="Calibri" pitchFamily="34" charset="-122"/>
                 <a:cs typeface="Calibri" pitchFamily="34" charset="-120"/>
               </a:rPr>
-              <a:t>watsonx.ai GDP Classification</a:t>
+              <a:t>watsonx (Granite-ready) explains only</a:t>
             </a:r>
             <a:endParaRPr lang="en-US" sz="1050" dirty="0"/>
           </a:p>
@@ -4463,7 +4090,7 @@
                 <a:ea typeface="Calibri" pitchFamily="34" charset="-122"/>
                 <a:cs typeface="Calibri" pitchFamily="34" charset="-120"/>
               </a:rPr>
-              <a:t>Disruption Event</a:t>
+              <a:t>Disruption / headline</a:t>
             </a:r>
             <a:endParaRPr lang="en-US" sz="1050" dirty="0"/>
           </a:p>
@@ -4553,7 +4180,7 @@
                 <a:ea typeface="Calibri" pitchFamily="34" charset="-122"/>
                 <a:cs typeface="Calibri" pitchFamily="34" charset="-120"/>
               </a:rPr>
-              <a:t>Impact Engine</a:t>
+              <a:t>Remaining-path impact</a:t>
             </a:r>
             <a:endParaRPr lang="en-US" sz="1050" dirty="0"/>
           </a:p>
@@ -4643,7 +4270,7 @@
                 <a:ea typeface="Calibri" pitchFamily="34" charset="-122"/>
                 <a:cs typeface="Calibri" pitchFamily="34" charset="-120"/>
               </a:rPr>
-              <a:t>Risk Engine</a:t>
+              <a:t>Viability clock</a:t>
             </a:r>
             <a:endParaRPr lang="en-US" sz="1050" dirty="0"/>
           </a:p>
@@ -4733,7 +4360,7 @@
                 <a:ea typeface="Calibri" pitchFamily="34" charset="-122"/>
                 <a:cs typeface="Calibri" pitchFamily="34" charset="-120"/>
               </a:rPr>
-              <a:t>Route Optimizer</a:t>
+              <a:t>Graph router + landed cost</a:t>
             </a:r>
             <a:endParaRPr lang="en-US" sz="1050" dirty="0"/>
           </a:p>
@@ -4823,7 +4450,7 @@
                 <a:ea typeface="Calibri" pitchFamily="34" charset="-122"/>
                 <a:cs typeface="Calibri" pitchFamily="34" charset="-120"/>
               </a:rPr>
-              <a:t>Fleet Matcher</a:t>
+              <a:t>Fleet matcher (0–100)</a:t>
             </a:r>
             <a:endParaRPr lang="en-US" sz="1050" dirty="0"/>
           </a:p>
@@ -4889,7 +4516,7 @@
                 <a:ea typeface="Calibri" pitchFamily="34" charset="-122"/>
                 <a:cs typeface="Calibri" pitchFamily="34" charset="-120"/>
               </a:rPr>
-              <a:t>Operator Chat</a:t>
+              <a:t>IBM Bob</a:t>
             </a:r>
             <a:endParaRPr lang="en-US" sz="1050" dirty="0"/>
           </a:p>
@@ -4955,7 +4582,7 @@
                 <a:ea typeface="Calibri" pitchFamily="34" charset="-122"/>
                 <a:cs typeface="Calibri" pitchFamily="34" charset="-120"/>
               </a:rPr>
-              <a:t>watsonx.ai Copilot (live context)</a:t>
+              <a:t>MCP over HTTP · 12 tools · commits refused</a:t>
             </a:r>
             <a:endParaRPr lang="en-US" sz="1050" dirty="0"/>
           </a:p>
@@ -5045,7 +4672,7 @@
                 <a:ea typeface="Calibri" pitchFamily="34" charset="-122"/>
                 <a:cs typeface="Calibri" pitchFamily="34" charset="-120"/>
               </a:rPr>
-              <a:t>AI Action Center</a:t>
+              <a:t>Hash-chained audit</a:t>
             </a:r>
             <a:endParaRPr lang="en-US" sz="1050" dirty="0"/>
           </a:p>
@@ -5135,7 +4762,7 @@
                 <a:ea typeface="Calibri" pitchFamily="34" charset="-122"/>
                 <a:cs typeface="Calibri" pitchFamily="34" charset="-120"/>
               </a:rPr>
-              <a:t>AI explains; deterministic engines calculate the facts.</a:t>
+              <a:t>Engines are pure functions with an injected clock — 165 tests, no I/O, no wall-clock reads.</a:t>
             </a:r>
             <a:endParaRPr lang="en-US" sz="1600" dirty="0"/>
           </a:p>
@@ -5174,7 +4801,7 @@
                 <a:ea typeface="Calibri" pitchFamily="34" charset="-122"/>
                 <a:cs typeface="Calibri" pitchFamily="34" charset="-120"/>
               </a:rPr>
-              <a:t>No hallucination risk for operational numbers.</a:t>
+              <a:t>The model never sets a severity, a clock value or a disposition.</a:t>
             </a:r>
             <a:endParaRPr lang="en-US" sz="1200" dirty="0"/>
           </a:p>
@@ -5411,4517 +5038,9 @@
                 <a:ea typeface="Calibri" pitchFamily="34" charset="-122"/>
                 <a:cs typeface="Calibri" pitchFamily="34" charset="-120"/>
               </a:rPr>
-              <a:t>Next.js 16 · React 19 · Express 5 · Socket.IO · MongoDB 7 · @ibm-cloud/watsonx-ai</a:t>
+              <a:t>Next.js 16 · React 19 · Express 5 · Socket.IO · MongoDB 7 · @modelcontextprotocol/sdk · watsonx.ai</a:t>
             </a:r>
             <a:endParaRPr lang="en-US" sz="950" dirty="0"/>
-          </a:p>
-        </p:txBody>
-      </p:sp>
-    </p:spTree>
-  </p:cSld>
-  <p:clrMapOvr>
-    <a:masterClrMapping/>
-  </p:clrMapOvr>
-</p:sld>
-</file>
-
-<file path=ppt/slides/slide5.xml><?xml version="1.0" encoding="utf-8"?>
-<p:sld xmlns:a="http://schemas.openxmlformats.org/drawingml/2006/main" xmlns:r="http://schemas.openxmlformats.org/officeDocument/2006/relationships" xmlns:p="http://schemas.openxmlformats.org/presentationml/2006/main">
-  <p:cSld name="Slide 5">
-    <p:bg>
-      <p:bgPr>
-        <a:solidFill>
-          <a:srgbClr val="0B1426"/>
-        </a:solidFill>
-      </p:bgPr>
-    </p:bg>
-    <p:spTree>
-      <p:nvGrpSpPr>
-        <p:cNvPr id="1" name=""/>
-        <p:cNvGrpSpPr/>
-        <p:nvPr/>
-      </p:nvGrpSpPr>
-      <p:grpSpPr>
-        <a:xfrm>
-          <a:off x="0" y="0"/>
-          <a:ext cx="0" cy="0"/>
-          <a:chOff x="0" y="0"/>
-          <a:chExt cx="0" cy="0"/>
-        </a:xfrm>
-      </p:grpSpPr>
-      <p:sp>
-        <p:nvSpPr>
-          <p:cNvPr id="2" name="Text 0"/>
-          <p:cNvSpPr txBox="1"/>
-          <p:nvPr/>
-        </p:nvSpPr>
-        <p:spPr>
-          <a:xfrm>
-            <a:off x="457200" y="320040"/>
-            <a:ext cx="8229600" cy="228600"/>
-          </a:xfrm>
-          <a:prstGeom prst="rect">
-            <a:avLst/>
-          </a:prstGeom>
-          <a:noFill/>
-          <a:ln/>
-        </p:spPr>
-        <p:txBody>
-          <a:bodyPr wrap="square" lIns="0" tIns="0" rIns="0" bIns="0" rtlCol="0" anchor="t"/>
-          <a:lstStyle/>
-          <a:p>
-            <a:pPr marL="0" indent="0">
-              <a:buNone/>
-            </a:pPr>
-            <a:r>
-              <a:rPr lang="en-US" sz="1100" b="1" kern="0" spc="200" dirty="0">
-                <a:solidFill>
-                  <a:srgbClr val="22D3EE"/>
-                </a:solidFill>
-                <a:latin typeface="Calibri" pitchFamily="34" charset="0"/>
-                <a:ea typeface="Calibri" pitchFamily="34" charset="-122"/>
-                <a:cs typeface="Calibri" pitchFamily="34" charset="-120"/>
-              </a:rPr>
-              <a:t>05  ·  LIVE DEMO WALKTHROUGH</a:t>
-            </a:r>
-            <a:endParaRPr lang="en-US" sz="1100" dirty="0"/>
-          </a:p>
-        </p:txBody>
-      </p:sp>
-      <p:sp>
-        <p:nvSpPr>
-          <p:cNvPr id="3" name="Text 1"/>
-          <p:cNvSpPr txBox="1"/>
-          <p:nvPr/>
-        </p:nvSpPr>
-        <p:spPr>
-          <a:xfrm>
-            <a:off x="457200" y="566928"/>
-            <a:ext cx="8229600" cy="548640"/>
-          </a:xfrm>
-          <a:prstGeom prst="rect">
-            <a:avLst/>
-          </a:prstGeom>
-          <a:noFill/>
-          <a:ln/>
-        </p:spPr>
-        <p:txBody>
-          <a:bodyPr wrap="square" lIns="0" tIns="0" rIns="0" bIns="0" rtlCol="0" anchor="t"/>
-          <a:lstStyle/>
-          <a:p>
-            <a:pPr marL="0" indent="0">
-              <a:buNone/>
-            </a:pPr>
-            <a:r>
-              <a:rPr lang="en-US" sz="2800" b="1" dirty="0">
-                <a:solidFill>
-                  <a:srgbClr val="F1F5F9"/>
-                </a:solidFill>
-                <a:latin typeface="Arial" pitchFamily="34" charset="0"/>
-                <a:ea typeface="Arial" pitchFamily="34" charset="-122"/>
-                <a:cs typeface="Arial" pitchFamily="34" charset="-120"/>
-              </a:rPr>
-              <a:t>LA Port Strike scenario</a:t>
-            </a:r>
-            <a:endParaRPr lang="en-US" sz="2800" dirty="0"/>
-          </a:p>
-        </p:txBody>
-      </p:sp>
-      <p:sp>
-        <p:nvSpPr>
-          <p:cNvPr id="4" name="Text 2"/>
-          <p:cNvSpPr txBox="1"/>
-          <p:nvPr/>
-        </p:nvSpPr>
-        <p:spPr>
-          <a:xfrm>
-            <a:off x="7772400" y="4773168"/>
-            <a:ext cx="914400" cy="182880"/>
-          </a:xfrm>
-          <a:prstGeom prst="rect">
-            <a:avLst/>
-          </a:prstGeom>
-          <a:noFill/>
-          <a:ln/>
-        </p:spPr>
-        <p:txBody>
-          <a:bodyPr wrap="square" lIns="0" tIns="0" rIns="0" bIns="0" rtlCol="0" anchor="t"/>
-          <a:lstStyle/>
-          <a:p>
-            <a:pPr marL="0" indent="0" algn="r">
-              <a:buNone/>
-            </a:pPr>
-            <a:r>
-              <a:rPr lang="en-US" sz="900" dirty="0">
-                <a:solidFill>
-                  <a:srgbClr val="94A3B8"/>
-                </a:solidFill>
-                <a:latin typeface="Calibri" pitchFamily="34" charset="0"/>
-                <a:ea typeface="Calibri" pitchFamily="34" charset="-122"/>
-                <a:cs typeface="Calibri" pitchFamily="34" charset="-120"/>
-              </a:rPr>
-              <a:t>5 / 8</a:t>
-            </a:r>
-            <a:endParaRPr lang="en-US" sz="900" dirty="0"/>
-          </a:p>
-        </p:txBody>
-      </p:sp>
-      <p:sp>
-        <p:nvSpPr>
-          <p:cNvPr id="5" name="Shape 3"/>
-          <p:cNvSpPr/>
-          <p:nvPr/>
-        </p:nvSpPr>
-        <p:spPr>
-          <a:xfrm>
-            <a:off x="457200" y="1280160"/>
-            <a:ext cx="329184" cy="329184"/>
-          </a:xfrm>
-          <a:prstGeom prst="ellipse">
-            <a:avLst/>
-          </a:prstGeom>
-          <a:solidFill>
-            <a:srgbClr val="0E3A4A"/>
-          </a:solidFill>
-          <a:ln w="12700">
-            <a:solidFill>
-              <a:srgbClr val="0E3A4A"/>
-            </a:solidFill>
-            <a:prstDash val="solid"/>
-          </a:ln>
-        </p:spPr>
-      </p:sp>
-      <p:sp>
-        <p:nvSpPr>
-          <p:cNvPr id="6" name="Text 4"/>
-          <p:cNvSpPr txBox="1"/>
-          <p:nvPr/>
-        </p:nvSpPr>
-        <p:spPr>
-          <a:xfrm>
-            <a:off x="457200" y="1280160"/>
-            <a:ext cx="329184" cy="329184"/>
-          </a:xfrm>
-          <a:prstGeom prst="rect">
-            <a:avLst/>
-          </a:prstGeom>
-          <a:noFill/>
-          <a:ln/>
-        </p:spPr>
-        <p:txBody>
-          <a:bodyPr wrap="square" lIns="0" tIns="0" rIns="0" bIns="0" rtlCol="0" anchor="ctr"/>
-          <a:lstStyle/>
-          <a:p>
-            <a:pPr marL="0" indent="0" algn="ctr">
-              <a:buNone/>
-            </a:pPr>
-            <a:r>
-              <a:rPr lang="en-US" sz="1200" b="1" dirty="0">
-                <a:solidFill>
-                  <a:srgbClr val="22D3EE"/>
-                </a:solidFill>
-                <a:latin typeface="Calibri" pitchFamily="34" charset="0"/>
-                <a:ea typeface="Calibri" pitchFamily="34" charset="-122"/>
-                <a:cs typeface="Calibri" pitchFamily="34" charset="-120"/>
-              </a:rPr>
-              <a:t>1</a:t>
-            </a:r>
-            <a:endParaRPr lang="en-US" sz="1200" dirty="0"/>
-          </a:p>
-        </p:txBody>
-      </p:sp>
-      <p:sp>
-        <p:nvSpPr>
-          <p:cNvPr id="7" name="Text 5"/>
-          <p:cNvSpPr txBox="1"/>
-          <p:nvPr/>
-        </p:nvSpPr>
-        <p:spPr>
-          <a:xfrm>
-            <a:off x="960120" y="1280160"/>
-            <a:ext cx="4480560" cy="329184"/>
-          </a:xfrm>
-          <a:prstGeom prst="rect">
-            <a:avLst/>
-          </a:prstGeom>
-          <a:noFill/>
-          <a:ln/>
-        </p:spPr>
-        <p:txBody>
-          <a:bodyPr wrap="square" lIns="0" tIns="0" rIns="0" bIns="0" rtlCol="0" anchor="ctr"/>
-          <a:lstStyle/>
-          <a:p>
-            <a:pPr marL="0" indent="0">
-              <a:buNone/>
-            </a:pPr>
-            <a:r>
-              <a:rPr lang="en-US" sz="1300" dirty="0">
-                <a:solidFill>
-                  <a:srgbClr val="F1F5F9"/>
-                </a:solidFill>
-                <a:latin typeface="Calibri" pitchFamily="34" charset="0"/>
-                <a:ea typeface="Calibri" pitchFamily="34" charset="-122"/>
-                <a:cs typeface="Calibri" pitchFamily="34" charset="-120"/>
-              </a:rPr>
-              <a:t>Operator clicks “LA Port Strike” on the dashboard</a:t>
-            </a:r>
-            <a:endParaRPr lang="en-US" sz="1300" dirty="0"/>
-          </a:p>
-        </p:txBody>
-      </p:sp>
-      <p:sp>
-        <p:nvSpPr>
-          <p:cNvPr id="8" name="Shape 6"/>
-          <p:cNvSpPr/>
-          <p:nvPr/>
-        </p:nvSpPr>
-        <p:spPr>
-          <a:xfrm>
-            <a:off x="457200" y="1764792"/>
-            <a:ext cx="329184" cy="329184"/>
-          </a:xfrm>
-          <a:prstGeom prst="ellipse">
-            <a:avLst/>
-          </a:prstGeom>
-          <a:solidFill>
-            <a:srgbClr val="0E3A4A"/>
-          </a:solidFill>
-          <a:ln w="12700">
-            <a:solidFill>
-              <a:srgbClr val="0E3A4A"/>
-            </a:solidFill>
-            <a:prstDash val="solid"/>
-          </a:ln>
-        </p:spPr>
-      </p:sp>
-      <p:sp>
-        <p:nvSpPr>
-          <p:cNvPr id="9" name="Text 7"/>
-          <p:cNvSpPr txBox="1"/>
-          <p:nvPr/>
-        </p:nvSpPr>
-        <p:spPr>
-          <a:xfrm>
-            <a:off x="457200" y="1764792"/>
-            <a:ext cx="329184" cy="329184"/>
-          </a:xfrm>
-          <a:prstGeom prst="rect">
-            <a:avLst/>
-          </a:prstGeom>
-          <a:noFill/>
-          <a:ln/>
-        </p:spPr>
-        <p:txBody>
-          <a:bodyPr wrap="square" lIns="0" tIns="0" rIns="0" bIns="0" rtlCol="0" anchor="ctr"/>
-          <a:lstStyle/>
-          <a:p>
-            <a:pPr marL="0" indent="0" algn="ctr">
-              <a:buNone/>
-            </a:pPr>
-            <a:r>
-              <a:rPr lang="en-US" sz="1200" b="1" dirty="0">
-                <a:solidFill>
-                  <a:srgbClr val="22D3EE"/>
-                </a:solidFill>
-                <a:latin typeface="Calibri" pitchFamily="34" charset="0"/>
-                <a:ea typeface="Calibri" pitchFamily="34" charset="-122"/>
-                <a:cs typeface="Calibri" pitchFamily="34" charset="-120"/>
-              </a:rPr>
-              <a:t>2</a:t>
-            </a:r>
-            <a:endParaRPr lang="en-US" sz="1200" dirty="0"/>
-          </a:p>
-        </p:txBody>
-      </p:sp>
-      <p:sp>
-        <p:nvSpPr>
-          <p:cNvPr id="10" name="Text 8"/>
-          <p:cNvSpPr txBox="1"/>
-          <p:nvPr/>
-        </p:nvSpPr>
-        <p:spPr>
-          <a:xfrm>
-            <a:off x="960120" y="1764792"/>
-            <a:ext cx="4480560" cy="329184"/>
-          </a:xfrm>
-          <a:prstGeom prst="rect">
-            <a:avLst/>
-          </a:prstGeom>
-          <a:noFill/>
-          <a:ln/>
-        </p:spPr>
-        <p:txBody>
-          <a:bodyPr wrap="square" lIns="0" tIns="0" rIns="0" bIns="0" rtlCol="0" anchor="ctr"/>
-          <a:lstStyle/>
-          <a:p>
-            <a:pPr marL="0" indent="0">
-              <a:buNone/>
-            </a:pPr>
-            <a:r>
-              <a:rPr lang="en-US" sz="1300" dirty="0">
-                <a:solidFill>
-                  <a:srgbClr val="F1F5F9"/>
-                </a:solidFill>
-                <a:latin typeface="Calibri" pitchFamily="34" charset="0"/>
-                <a:ea typeface="Calibri" pitchFamily="34" charset="-122"/>
-                <a:cs typeface="Calibri" pitchFamily="34" charset="-120"/>
-              </a:rPr>
-              <a:t>Impact Engine maps 3 affected vaccine shipments in &lt; 1 second</a:t>
-            </a:r>
-            <a:endParaRPr lang="en-US" sz="1300" dirty="0"/>
-          </a:p>
-        </p:txBody>
-      </p:sp>
-      <p:sp>
-        <p:nvSpPr>
-          <p:cNvPr id="11" name="Shape 9"/>
-          <p:cNvSpPr/>
-          <p:nvPr/>
-        </p:nvSpPr>
-        <p:spPr>
-          <a:xfrm>
-            <a:off x="457200" y="2249424"/>
-            <a:ext cx="329184" cy="329184"/>
-          </a:xfrm>
-          <a:prstGeom prst="ellipse">
-            <a:avLst/>
-          </a:prstGeom>
-          <a:solidFill>
-            <a:srgbClr val="0E3A4A"/>
-          </a:solidFill>
-          <a:ln w="12700">
-            <a:solidFill>
-              <a:srgbClr val="0E3A4A"/>
-            </a:solidFill>
-            <a:prstDash val="solid"/>
-          </a:ln>
-        </p:spPr>
-      </p:sp>
-      <p:sp>
-        <p:nvSpPr>
-          <p:cNvPr id="12" name="Text 10"/>
-          <p:cNvSpPr txBox="1"/>
-          <p:nvPr/>
-        </p:nvSpPr>
-        <p:spPr>
-          <a:xfrm>
-            <a:off x="457200" y="2249424"/>
-            <a:ext cx="329184" cy="329184"/>
-          </a:xfrm>
-          <a:prstGeom prst="rect">
-            <a:avLst/>
-          </a:prstGeom>
-          <a:noFill/>
-          <a:ln/>
-        </p:spPr>
-        <p:txBody>
-          <a:bodyPr wrap="square" lIns="0" tIns="0" rIns="0" bIns="0" rtlCol="0" anchor="ctr"/>
-          <a:lstStyle/>
-          <a:p>
-            <a:pPr marL="0" indent="0" algn="ctr">
-              <a:buNone/>
-            </a:pPr>
-            <a:r>
-              <a:rPr lang="en-US" sz="1200" b="1" dirty="0">
-                <a:solidFill>
-                  <a:srgbClr val="22D3EE"/>
-                </a:solidFill>
-                <a:latin typeface="Calibri" pitchFamily="34" charset="0"/>
-                <a:ea typeface="Calibri" pitchFamily="34" charset="-122"/>
-                <a:cs typeface="Calibri" pitchFamily="34" charset="-120"/>
-              </a:rPr>
-              <a:t>3</a:t>
-            </a:r>
-            <a:endParaRPr lang="en-US" sz="1200" dirty="0"/>
-          </a:p>
-        </p:txBody>
-      </p:sp>
-      <p:sp>
-        <p:nvSpPr>
-          <p:cNvPr id="13" name="Text 11"/>
-          <p:cNvSpPr txBox="1"/>
-          <p:nvPr/>
-        </p:nvSpPr>
-        <p:spPr>
-          <a:xfrm>
-            <a:off x="960120" y="2249424"/>
-            <a:ext cx="4480560" cy="329184"/>
-          </a:xfrm>
-          <a:prstGeom prst="rect">
-            <a:avLst/>
-          </a:prstGeom>
-          <a:noFill/>
-          <a:ln/>
-        </p:spPr>
-        <p:txBody>
-          <a:bodyPr wrap="square" lIns="0" tIns="0" rIns="0" bIns="0" rtlCol="0" anchor="ctr"/>
-          <a:lstStyle/>
-          <a:p>
-            <a:pPr marL="0" indent="0">
-              <a:buNone/>
-            </a:pPr>
-            <a:r>
-              <a:rPr lang="en-US" sz="1300" dirty="0">
-                <a:solidFill>
-                  <a:srgbClr val="F1F5F9"/>
-                </a:solidFill>
-                <a:latin typeface="Calibri" pitchFamily="34" charset="0"/>
-                <a:ea typeface="Calibri" pitchFamily="34" charset="-122"/>
-                <a:cs typeface="Calibri" pitchFamily="34" charset="-120"/>
-              </a:rPr>
-              <a:t>Risk Engine scores each shipment on 6 factors</a:t>
-            </a:r>
-            <a:endParaRPr lang="en-US" sz="1300" dirty="0"/>
-          </a:p>
-        </p:txBody>
-      </p:sp>
-      <p:sp>
-        <p:nvSpPr>
-          <p:cNvPr id="14" name="Shape 12"/>
-          <p:cNvSpPr/>
-          <p:nvPr/>
-        </p:nvSpPr>
-        <p:spPr>
-          <a:xfrm>
-            <a:off x="457200" y="2734056"/>
-            <a:ext cx="329184" cy="329184"/>
-          </a:xfrm>
-          <a:prstGeom prst="ellipse">
-            <a:avLst/>
-          </a:prstGeom>
-          <a:solidFill>
-            <a:srgbClr val="0E3A4A"/>
-          </a:solidFill>
-          <a:ln w="12700">
-            <a:solidFill>
-              <a:srgbClr val="0E3A4A"/>
-            </a:solidFill>
-            <a:prstDash val="solid"/>
-          </a:ln>
-        </p:spPr>
-      </p:sp>
-      <p:sp>
-        <p:nvSpPr>
-          <p:cNvPr id="15" name="Text 13"/>
-          <p:cNvSpPr txBox="1"/>
-          <p:nvPr/>
-        </p:nvSpPr>
-        <p:spPr>
-          <a:xfrm>
-            <a:off x="457200" y="2734056"/>
-            <a:ext cx="329184" cy="329184"/>
-          </a:xfrm>
-          <a:prstGeom prst="rect">
-            <a:avLst/>
-          </a:prstGeom>
-          <a:noFill/>
-          <a:ln/>
-        </p:spPr>
-        <p:txBody>
-          <a:bodyPr wrap="square" lIns="0" tIns="0" rIns="0" bIns="0" rtlCol="0" anchor="ctr"/>
-          <a:lstStyle/>
-          <a:p>
-            <a:pPr marL="0" indent="0" algn="ctr">
-              <a:buNone/>
-            </a:pPr>
-            <a:r>
-              <a:rPr lang="en-US" sz="1200" b="1" dirty="0">
-                <a:solidFill>
-                  <a:srgbClr val="22D3EE"/>
-                </a:solidFill>
-                <a:latin typeface="Calibri" pitchFamily="34" charset="0"/>
-                <a:ea typeface="Calibri" pitchFamily="34" charset="-122"/>
-                <a:cs typeface="Calibri" pitchFamily="34" charset="-120"/>
-              </a:rPr>
-              <a:t>4</a:t>
-            </a:r>
-            <a:endParaRPr lang="en-US" sz="1200" dirty="0"/>
-          </a:p>
-        </p:txBody>
-      </p:sp>
-      <p:sp>
-        <p:nvSpPr>
-          <p:cNvPr id="16" name="Text 14"/>
-          <p:cNvSpPr txBox="1"/>
-          <p:nvPr/>
-        </p:nvSpPr>
-        <p:spPr>
-          <a:xfrm>
-            <a:off x="960120" y="2734056"/>
-            <a:ext cx="4480560" cy="329184"/>
-          </a:xfrm>
-          <a:prstGeom prst="rect">
-            <a:avLst/>
-          </a:prstGeom>
-          <a:noFill/>
-          <a:ln/>
-        </p:spPr>
-        <p:txBody>
-          <a:bodyPr wrap="square" lIns="0" tIns="0" rIns="0" bIns="0" rtlCol="0" anchor="ctr"/>
-          <a:lstStyle/>
-          <a:p>
-            <a:pPr marL="0" indent="0">
-              <a:buNone/>
-            </a:pPr>
-            <a:r>
-              <a:rPr lang="en-US" sz="1300" dirty="0">
-                <a:solidFill>
-                  <a:srgbClr val="F1F5F9"/>
-                </a:solidFill>
-                <a:latin typeface="Calibri" pitchFamily="34" charset="0"/>
-                <a:ea typeface="Calibri" pitchFamily="34" charset="-122"/>
-                <a:cs typeface="Calibri" pitchFamily="34" charset="-120"/>
-              </a:rPr>
-              <a:t>Route Optimizer + Fleet Matcher generate ranked recommendations</a:t>
-            </a:r>
-            <a:endParaRPr lang="en-US" sz="1300" dirty="0"/>
-          </a:p>
-        </p:txBody>
-      </p:sp>
-      <p:sp>
-        <p:nvSpPr>
-          <p:cNvPr id="17" name="Shape 15"/>
-          <p:cNvSpPr/>
-          <p:nvPr/>
-        </p:nvSpPr>
-        <p:spPr>
-          <a:xfrm>
-            <a:off x="457200" y="3218688"/>
-            <a:ext cx="329184" cy="329184"/>
-          </a:xfrm>
-          <a:prstGeom prst="ellipse">
-            <a:avLst/>
-          </a:prstGeom>
-          <a:solidFill>
-            <a:srgbClr val="0E3A4A"/>
-          </a:solidFill>
-          <a:ln w="12700">
-            <a:solidFill>
-              <a:srgbClr val="0E3A4A"/>
-            </a:solidFill>
-            <a:prstDash val="solid"/>
-          </a:ln>
-        </p:spPr>
-      </p:sp>
-      <p:sp>
-        <p:nvSpPr>
-          <p:cNvPr id="18" name="Text 16"/>
-          <p:cNvSpPr txBox="1"/>
-          <p:nvPr/>
-        </p:nvSpPr>
-        <p:spPr>
-          <a:xfrm>
-            <a:off x="457200" y="3218688"/>
-            <a:ext cx="329184" cy="329184"/>
-          </a:xfrm>
-          <a:prstGeom prst="rect">
-            <a:avLst/>
-          </a:prstGeom>
-          <a:noFill/>
-          <a:ln/>
-        </p:spPr>
-        <p:txBody>
-          <a:bodyPr wrap="square" lIns="0" tIns="0" rIns="0" bIns="0" rtlCol="0" anchor="ctr"/>
-          <a:lstStyle/>
-          <a:p>
-            <a:pPr marL="0" indent="0" algn="ctr">
-              <a:buNone/>
-            </a:pPr>
-            <a:r>
-              <a:rPr lang="en-US" sz="1200" b="1" dirty="0">
-                <a:solidFill>
-                  <a:srgbClr val="22D3EE"/>
-                </a:solidFill>
-                <a:latin typeface="Calibri" pitchFamily="34" charset="0"/>
-                <a:ea typeface="Calibri" pitchFamily="34" charset="-122"/>
-                <a:cs typeface="Calibri" pitchFamily="34" charset="-120"/>
-              </a:rPr>
-              <a:t>5</a:t>
-            </a:r>
-            <a:endParaRPr lang="en-US" sz="1200" dirty="0"/>
-          </a:p>
-        </p:txBody>
-      </p:sp>
-      <p:sp>
-        <p:nvSpPr>
-          <p:cNvPr id="19" name="Text 17"/>
-          <p:cNvSpPr txBox="1"/>
-          <p:nvPr/>
-        </p:nvSpPr>
-        <p:spPr>
-          <a:xfrm>
-            <a:off x="960120" y="3218688"/>
-            <a:ext cx="4480560" cy="329184"/>
-          </a:xfrm>
-          <a:prstGeom prst="rect">
-            <a:avLst/>
-          </a:prstGeom>
-          <a:noFill/>
-          <a:ln/>
-        </p:spPr>
-        <p:txBody>
-          <a:bodyPr wrap="square" lIns="0" tIns="0" rIns="0" bIns="0" rtlCol="0" anchor="ctr"/>
-          <a:lstStyle/>
-          <a:p>
-            <a:pPr marL="0" indent="0">
-              <a:buNone/>
-            </a:pPr>
-            <a:r>
-              <a:rPr lang="en-US" sz="1300" dirty="0">
-                <a:solidFill>
-                  <a:srgbClr val="F1F5F9"/>
-                </a:solidFill>
-                <a:latin typeface="Calibri" pitchFamily="34" charset="0"/>
-                <a:ea typeface="Calibri" pitchFamily="34" charset="-122"/>
-                <a:cs typeface="Calibri" pitchFamily="34" charset="-120"/>
-              </a:rPr>
-              <a:t>watsonx.ai writes the rationale in natural language</a:t>
-            </a:r>
-            <a:endParaRPr lang="en-US" sz="1300" dirty="0"/>
-          </a:p>
-        </p:txBody>
-      </p:sp>
-      <p:sp>
-        <p:nvSpPr>
-          <p:cNvPr id="20" name="Shape 18"/>
-          <p:cNvSpPr/>
-          <p:nvPr/>
-        </p:nvSpPr>
-        <p:spPr>
-          <a:xfrm>
-            <a:off x="457200" y="3703320"/>
-            <a:ext cx="329184" cy="329184"/>
-          </a:xfrm>
-          <a:prstGeom prst="ellipse">
-            <a:avLst/>
-          </a:prstGeom>
-          <a:solidFill>
-            <a:srgbClr val="0E3A4A"/>
-          </a:solidFill>
-          <a:ln w="12700">
-            <a:solidFill>
-              <a:srgbClr val="0E3A4A"/>
-            </a:solidFill>
-            <a:prstDash val="solid"/>
-          </a:ln>
-        </p:spPr>
-      </p:sp>
-      <p:sp>
-        <p:nvSpPr>
-          <p:cNvPr id="21" name="Text 19"/>
-          <p:cNvSpPr txBox="1"/>
-          <p:nvPr/>
-        </p:nvSpPr>
-        <p:spPr>
-          <a:xfrm>
-            <a:off x="457200" y="3703320"/>
-            <a:ext cx="329184" cy="329184"/>
-          </a:xfrm>
-          <a:prstGeom prst="rect">
-            <a:avLst/>
-          </a:prstGeom>
-          <a:noFill/>
-          <a:ln/>
-        </p:spPr>
-        <p:txBody>
-          <a:bodyPr wrap="square" lIns="0" tIns="0" rIns="0" bIns="0" rtlCol="0" anchor="ctr"/>
-          <a:lstStyle/>
-          <a:p>
-            <a:pPr marL="0" indent="0" algn="ctr">
-              <a:buNone/>
-            </a:pPr>
-            <a:r>
-              <a:rPr lang="en-US" sz="1200" b="1" dirty="0">
-                <a:solidFill>
-                  <a:srgbClr val="22D3EE"/>
-                </a:solidFill>
-                <a:latin typeface="Calibri" pitchFamily="34" charset="0"/>
-                <a:ea typeface="Calibri" pitchFamily="34" charset="-122"/>
-                <a:cs typeface="Calibri" pitchFamily="34" charset="-120"/>
-              </a:rPr>
-              <a:t>6</a:t>
-            </a:r>
-            <a:endParaRPr lang="en-US" sz="1200" dirty="0"/>
-          </a:p>
-        </p:txBody>
-      </p:sp>
-      <p:sp>
-        <p:nvSpPr>
-          <p:cNvPr id="22" name="Text 20"/>
-          <p:cNvSpPr txBox="1"/>
-          <p:nvPr/>
-        </p:nvSpPr>
-        <p:spPr>
-          <a:xfrm>
-            <a:off x="960120" y="3703320"/>
-            <a:ext cx="4480560" cy="329184"/>
-          </a:xfrm>
-          <a:prstGeom prst="rect">
-            <a:avLst/>
-          </a:prstGeom>
-          <a:noFill/>
-          <a:ln/>
-        </p:spPr>
-        <p:txBody>
-          <a:bodyPr wrap="square" lIns="0" tIns="0" rIns="0" bIns="0" rtlCol="0" anchor="ctr"/>
-          <a:lstStyle/>
-          <a:p>
-            <a:pPr marL="0" indent="0">
-              <a:buNone/>
-            </a:pPr>
-            <a:r>
-              <a:rPr lang="en-US" sz="1300" dirty="0">
-                <a:solidFill>
-                  <a:srgbClr val="F1F5F9"/>
-                </a:solidFill>
-                <a:latin typeface="Calibri" pitchFamily="34" charset="0"/>
-                <a:ea typeface="Calibri" pitchFamily="34" charset="-122"/>
-                <a:cs typeface="Calibri" pitchFamily="34" charset="-120"/>
-              </a:rPr>
-              <a:t>Operator clicks “Approve &amp; Execute” → AuditEvent created</a:t>
-            </a:r>
-            <a:endParaRPr lang="en-US" sz="1300" dirty="0"/>
-          </a:p>
-        </p:txBody>
-      </p:sp>
-      <p:sp>
-        <p:nvSpPr>
-          <p:cNvPr id="23" name="Shape 21"/>
-          <p:cNvSpPr/>
-          <p:nvPr/>
-        </p:nvSpPr>
-        <p:spPr>
-          <a:xfrm>
-            <a:off x="457200" y="4187952"/>
-            <a:ext cx="329184" cy="329184"/>
-          </a:xfrm>
-          <a:prstGeom prst="ellipse">
-            <a:avLst/>
-          </a:prstGeom>
-          <a:solidFill>
-            <a:srgbClr val="0E3A4A"/>
-          </a:solidFill>
-          <a:ln w="12700">
-            <a:solidFill>
-              <a:srgbClr val="0E3A4A"/>
-            </a:solidFill>
-            <a:prstDash val="solid"/>
-          </a:ln>
-        </p:spPr>
-      </p:sp>
-      <p:sp>
-        <p:nvSpPr>
-          <p:cNvPr id="24" name="Text 22"/>
-          <p:cNvSpPr txBox="1"/>
-          <p:nvPr/>
-        </p:nvSpPr>
-        <p:spPr>
-          <a:xfrm>
-            <a:off x="457200" y="4187952"/>
-            <a:ext cx="329184" cy="329184"/>
-          </a:xfrm>
-          <a:prstGeom prst="rect">
-            <a:avLst/>
-          </a:prstGeom>
-          <a:noFill/>
-          <a:ln/>
-        </p:spPr>
-        <p:txBody>
-          <a:bodyPr wrap="square" lIns="0" tIns="0" rIns="0" bIns="0" rtlCol="0" anchor="ctr"/>
-          <a:lstStyle/>
-          <a:p>
-            <a:pPr marL="0" indent="0" algn="ctr">
-              <a:buNone/>
-            </a:pPr>
-            <a:r>
-              <a:rPr lang="en-US" sz="1200" b="1" dirty="0">
-                <a:solidFill>
-                  <a:srgbClr val="22D3EE"/>
-                </a:solidFill>
-                <a:latin typeface="Calibri" pitchFamily="34" charset="0"/>
-                <a:ea typeface="Calibri" pitchFamily="34" charset="-122"/>
-                <a:cs typeface="Calibri" pitchFamily="34" charset="-120"/>
-              </a:rPr>
-              <a:t>7</a:t>
-            </a:r>
-            <a:endParaRPr lang="en-US" sz="1200" dirty="0"/>
-          </a:p>
-        </p:txBody>
-      </p:sp>
-      <p:sp>
-        <p:nvSpPr>
-          <p:cNvPr id="25" name="Text 23"/>
-          <p:cNvSpPr txBox="1"/>
-          <p:nvPr/>
-        </p:nvSpPr>
-        <p:spPr>
-          <a:xfrm>
-            <a:off x="960120" y="4187952"/>
-            <a:ext cx="4480560" cy="329184"/>
-          </a:xfrm>
-          <a:prstGeom prst="rect">
-            <a:avLst/>
-          </a:prstGeom>
-          <a:noFill/>
-          <a:ln/>
-        </p:spPr>
-        <p:txBody>
-          <a:bodyPr wrap="square" lIns="0" tIns="0" rIns="0" bIns="0" rtlCol="0" anchor="ctr"/>
-          <a:lstStyle/>
-          <a:p>
-            <a:pPr marL="0" indent="0">
-              <a:buNone/>
-            </a:pPr>
-            <a:r>
-              <a:rPr lang="en-US" sz="1300" dirty="0">
-                <a:solidFill>
-                  <a:srgbClr val="F1F5F9"/>
-                </a:solidFill>
-                <a:latin typeface="Calibri" pitchFamily="34" charset="0"/>
-                <a:ea typeface="Calibri" pitchFamily="34" charset="-122"/>
-                <a:cs typeface="Calibri" pitchFamily="34" charset="-120"/>
-              </a:rPr>
-              <a:t>AI Chat: “Which shipments are most at risk and why?”</a:t>
-            </a:r>
-            <a:endParaRPr lang="en-US" sz="1300" dirty="0"/>
-          </a:p>
-        </p:txBody>
-      </p:sp>
-      <p:sp>
-        <p:nvSpPr>
-          <p:cNvPr id="26" name="Shape 24"/>
-          <p:cNvSpPr/>
-          <p:nvPr/>
-        </p:nvSpPr>
-        <p:spPr>
-          <a:xfrm>
-            <a:off x="5669280" y="1280160"/>
-            <a:ext cx="3017520" cy="3246120"/>
-          </a:xfrm>
-          <a:prstGeom prst="roundRect">
-            <a:avLst>
-              <a:gd name="adj" fmla="val 2424"/>
-            </a:avLst>
-          </a:prstGeom>
-          <a:solidFill>
-            <a:srgbClr val="14213D"/>
-          </a:solidFill>
-          <a:ln w="12700">
-            <a:solidFill>
-              <a:srgbClr val="14213D"/>
-            </a:solidFill>
-            <a:prstDash val="solid"/>
-          </a:ln>
-        </p:spPr>
-      </p:sp>
-      <p:sp>
-        <p:nvSpPr>
-          <p:cNvPr id="27" name="Text 25"/>
-          <p:cNvSpPr txBox="1"/>
-          <p:nvPr/>
-        </p:nvSpPr>
-        <p:spPr>
-          <a:xfrm>
-            <a:off x="5897880" y="1417320"/>
-            <a:ext cx="2651760" cy="274320"/>
-          </a:xfrm>
-          <a:prstGeom prst="rect">
-            <a:avLst/>
-          </a:prstGeom>
-          <a:noFill/>
-          <a:ln/>
-        </p:spPr>
-        <p:txBody>
-          <a:bodyPr wrap="square" lIns="0" tIns="0" rIns="0" bIns="0" rtlCol="0" anchor="t"/>
-          <a:lstStyle/>
-          <a:p>
-            <a:pPr marL="0" indent="0">
-              <a:buNone/>
-            </a:pPr>
-            <a:r>
-              <a:rPr lang="en-US" sz="1300" b="1" dirty="0">
-                <a:solidFill>
-                  <a:srgbClr val="F1F5F9"/>
-                </a:solidFill>
-                <a:latin typeface="Calibri" pitchFamily="34" charset="0"/>
-                <a:ea typeface="Calibri" pitchFamily="34" charset="-122"/>
-                <a:cs typeface="Calibri" pitchFamily="34" charset="-120"/>
-              </a:rPr>
-              <a:t>Risk scores after the strike</a:t>
-            </a:r>
-            <a:endParaRPr lang="en-US" sz="1300" dirty="0"/>
-          </a:p>
-        </p:txBody>
-      </p:sp>
-      <p:sp>
-        <p:nvSpPr>
-          <p:cNvPr id="28" name="Text 26"/>
-          <p:cNvSpPr txBox="1"/>
-          <p:nvPr/>
-        </p:nvSpPr>
-        <p:spPr>
-          <a:xfrm>
-            <a:off x="5897880" y="1828800"/>
-            <a:ext cx="1280160" cy="274320"/>
-          </a:xfrm>
-          <a:prstGeom prst="rect">
-            <a:avLst/>
-          </a:prstGeom>
-          <a:noFill/>
-          <a:ln/>
-        </p:spPr>
-        <p:txBody>
-          <a:bodyPr wrap="square" lIns="0" tIns="0" rIns="0" bIns="0" rtlCol="0" anchor="ctr"/>
-          <a:lstStyle/>
-          <a:p>
-            <a:pPr marL="0" indent="0">
-              <a:buNone/>
-            </a:pPr>
-            <a:r>
-              <a:rPr lang="en-US" sz="1200" dirty="0">
-                <a:solidFill>
-                  <a:srgbClr val="CBD5E1"/>
-                </a:solidFill>
-                <a:latin typeface="Calibri" pitchFamily="34" charset="0"/>
-                <a:ea typeface="Calibri" pitchFamily="34" charset="-122"/>
-                <a:cs typeface="Calibri" pitchFamily="34" charset="-120"/>
-              </a:rPr>
-              <a:t>SHIP-001</a:t>
-            </a:r>
-            <a:endParaRPr lang="en-US" sz="1200" dirty="0"/>
-          </a:p>
-        </p:txBody>
-      </p:sp>
-      <p:sp>
-        <p:nvSpPr>
-          <p:cNvPr id="29" name="Text 27"/>
-          <p:cNvSpPr txBox="1"/>
-          <p:nvPr/>
-        </p:nvSpPr>
-        <p:spPr>
-          <a:xfrm>
-            <a:off x="5897880" y="2075688"/>
-            <a:ext cx="1280160" cy="201168"/>
-          </a:xfrm>
-          <a:prstGeom prst="rect">
-            <a:avLst/>
-          </a:prstGeom>
-          <a:noFill/>
-          <a:ln/>
-        </p:spPr>
-        <p:txBody>
-          <a:bodyPr wrap="square" lIns="0" tIns="0" rIns="0" bIns="0" rtlCol="0" anchor="t"/>
-          <a:lstStyle/>
-          <a:p>
-            <a:pPr marL="0" indent="0">
-              <a:buNone/>
-            </a:pPr>
-            <a:r>
-              <a:rPr lang="en-US" sz="950" b="1" kern="0" spc="100" dirty="0">
-                <a:solidFill>
-                  <a:srgbClr val="F43F5E"/>
-                </a:solidFill>
-                <a:latin typeface="Calibri" pitchFamily="34" charset="0"/>
-                <a:ea typeface="Calibri" pitchFamily="34" charset="-122"/>
-                <a:cs typeface="Calibri" pitchFamily="34" charset="-120"/>
-              </a:rPr>
-              <a:t>CRITICAL</a:t>
-            </a:r>
-            <a:endParaRPr lang="en-US" sz="950" dirty="0"/>
-          </a:p>
-        </p:txBody>
-      </p:sp>
-      <p:sp>
-        <p:nvSpPr>
-          <p:cNvPr id="30" name="Text 28"/>
-          <p:cNvSpPr txBox="1"/>
-          <p:nvPr/>
-        </p:nvSpPr>
-        <p:spPr>
-          <a:xfrm>
-            <a:off x="7132320" y="1783080"/>
-            <a:ext cx="1371600" cy="411480"/>
-          </a:xfrm>
-          <a:prstGeom prst="rect">
-            <a:avLst/>
-          </a:prstGeom>
-          <a:noFill/>
-          <a:ln/>
-        </p:spPr>
-        <p:txBody>
-          <a:bodyPr wrap="square" lIns="0" tIns="0" rIns="0" bIns="0" rtlCol="0" anchor="ctr"/>
-          <a:lstStyle/>
-          <a:p>
-            <a:pPr marL="0" indent="0" algn="r">
-              <a:buNone/>
-            </a:pPr>
-            <a:r>
-              <a:rPr lang="en-US" sz="2200" b="1" dirty="0">
-                <a:solidFill>
-                  <a:srgbClr val="F43F5E"/>
-                </a:solidFill>
-                <a:latin typeface="Arial" pitchFamily="34" charset="0"/>
-                <a:ea typeface="Arial" pitchFamily="34" charset="-122"/>
-                <a:cs typeface="Arial" pitchFamily="34" charset="-120"/>
-              </a:rPr>
-              <a:t>87</a:t>
-            </a:r>
-            <a:pPr marL="0" indent="0" algn="r">
-              <a:buNone/>
-            </a:pPr>
-            <a:r>
-              <a:rPr lang="en-US" sz="1000" dirty="0">
-                <a:solidFill>
-                  <a:srgbClr val="94A3B8"/>
-                </a:solidFill>
-                <a:latin typeface="Arial" pitchFamily="34" charset="0"/>
-                <a:ea typeface="Arial" pitchFamily="34" charset="-122"/>
-                <a:cs typeface="Arial" pitchFamily="34" charset="-120"/>
-              </a:rPr>
-              <a:t> /100</a:t>
-            </a:r>
-            <a:endParaRPr lang="en-US" sz="2200" dirty="0"/>
-          </a:p>
-        </p:txBody>
-      </p:sp>
-      <p:sp>
-        <p:nvSpPr>
-          <p:cNvPr id="31" name="Shape 29"/>
-          <p:cNvSpPr/>
-          <p:nvPr/>
-        </p:nvSpPr>
-        <p:spPr>
-          <a:xfrm>
-            <a:off x="5897880" y="2304288"/>
-            <a:ext cx="2606040" cy="64008"/>
-          </a:xfrm>
-          <a:prstGeom prst="roundRect">
-            <a:avLst>
-              <a:gd name="adj" fmla="val 42857"/>
-            </a:avLst>
-          </a:prstGeom>
-          <a:solidFill>
-            <a:srgbClr val="334155"/>
-          </a:solidFill>
-          <a:ln w="12700">
-            <a:solidFill>
-              <a:srgbClr val="334155"/>
-            </a:solidFill>
-            <a:prstDash val="solid"/>
-          </a:ln>
-        </p:spPr>
-      </p:sp>
-      <p:sp>
-        <p:nvSpPr>
-          <p:cNvPr id="32" name="Shape 30"/>
-          <p:cNvSpPr/>
-          <p:nvPr/>
-        </p:nvSpPr>
-        <p:spPr>
-          <a:xfrm>
-            <a:off x="5897880" y="2304288"/>
-            <a:ext cx="2267255" cy="64008"/>
-          </a:xfrm>
-          <a:prstGeom prst="roundRect">
-            <a:avLst>
-              <a:gd name="adj" fmla="val 42857"/>
-            </a:avLst>
-          </a:prstGeom>
-          <a:solidFill>
-            <a:srgbClr val="F43F5E"/>
-          </a:solidFill>
-          <a:ln w="12700">
-            <a:solidFill>
-              <a:srgbClr val="F43F5E"/>
-            </a:solidFill>
-            <a:prstDash val="solid"/>
-          </a:ln>
-        </p:spPr>
-      </p:sp>
-      <p:sp>
-        <p:nvSpPr>
-          <p:cNvPr id="33" name="Text 31"/>
-          <p:cNvSpPr txBox="1"/>
-          <p:nvPr/>
-        </p:nvSpPr>
-        <p:spPr>
-          <a:xfrm>
-            <a:off x="5897880" y="2487168"/>
-            <a:ext cx="1280160" cy="274320"/>
-          </a:xfrm>
-          <a:prstGeom prst="rect">
-            <a:avLst/>
-          </a:prstGeom>
-          <a:noFill/>
-          <a:ln/>
-        </p:spPr>
-        <p:txBody>
-          <a:bodyPr wrap="square" lIns="0" tIns="0" rIns="0" bIns="0" rtlCol="0" anchor="ctr"/>
-          <a:lstStyle/>
-          <a:p>
-            <a:pPr marL="0" indent="0">
-              <a:buNone/>
-            </a:pPr>
-            <a:r>
-              <a:rPr lang="en-US" sz="1200" dirty="0">
-                <a:solidFill>
-                  <a:srgbClr val="CBD5E1"/>
-                </a:solidFill>
-                <a:latin typeface="Calibri" pitchFamily="34" charset="0"/>
-                <a:ea typeface="Calibri" pitchFamily="34" charset="-122"/>
-                <a:cs typeface="Calibri" pitchFamily="34" charset="-120"/>
-              </a:rPr>
-              <a:t>SHIP-003</a:t>
-            </a:r>
-            <a:endParaRPr lang="en-US" sz="1200" dirty="0"/>
-          </a:p>
-        </p:txBody>
-      </p:sp>
-      <p:sp>
-        <p:nvSpPr>
-          <p:cNvPr id="34" name="Text 32"/>
-          <p:cNvSpPr txBox="1"/>
-          <p:nvPr/>
-        </p:nvSpPr>
-        <p:spPr>
-          <a:xfrm>
-            <a:off x="5897880" y="2734056"/>
-            <a:ext cx="1280160" cy="201168"/>
-          </a:xfrm>
-          <a:prstGeom prst="rect">
-            <a:avLst/>
-          </a:prstGeom>
-          <a:noFill/>
-          <a:ln/>
-        </p:spPr>
-        <p:txBody>
-          <a:bodyPr wrap="square" lIns="0" tIns="0" rIns="0" bIns="0" rtlCol="0" anchor="t"/>
-          <a:lstStyle/>
-          <a:p>
-            <a:pPr marL="0" indent="0">
-              <a:buNone/>
-            </a:pPr>
-            <a:r>
-              <a:rPr lang="en-US" sz="950" b="1" kern="0" spc="100" dirty="0">
-                <a:solidFill>
-                  <a:srgbClr val="F59E0B"/>
-                </a:solidFill>
-                <a:latin typeface="Calibri" pitchFamily="34" charset="0"/>
-                <a:ea typeface="Calibri" pitchFamily="34" charset="-122"/>
-                <a:cs typeface="Calibri" pitchFamily="34" charset="-120"/>
-              </a:rPr>
-              <a:t>HIGH</a:t>
-            </a:r>
-            <a:endParaRPr lang="en-US" sz="950" dirty="0"/>
-          </a:p>
-        </p:txBody>
-      </p:sp>
-      <p:sp>
-        <p:nvSpPr>
-          <p:cNvPr id="35" name="Text 33"/>
-          <p:cNvSpPr txBox="1"/>
-          <p:nvPr/>
-        </p:nvSpPr>
-        <p:spPr>
-          <a:xfrm>
-            <a:off x="7132320" y="2441448"/>
-            <a:ext cx="1371600" cy="411480"/>
-          </a:xfrm>
-          <a:prstGeom prst="rect">
-            <a:avLst/>
-          </a:prstGeom>
-          <a:noFill/>
-          <a:ln/>
-        </p:spPr>
-        <p:txBody>
-          <a:bodyPr wrap="square" lIns="0" tIns="0" rIns="0" bIns="0" rtlCol="0" anchor="ctr"/>
-          <a:lstStyle/>
-          <a:p>
-            <a:pPr marL="0" indent="0" algn="r">
-              <a:buNone/>
-            </a:pPr>
-            <a:r>
-              <a:rPr lang="en-US" sz="2200" b="1" dirty="0">
-                <a:solidFill>
-                  <a:srgbClr val="F59E0B"/>
-                </a:solidFill>
-                <a:latin typeface="Arial" pitchFamily="34" charset="0"/>
-                <a:ea typeface="Arial" pitchFamily="34" charset="-122"/>
-                <a:cs typeface="Arial" pitchFamily="34" charset="-120"/>
-              </a:rPr>
-              <a:t>72</a:t>
-            </a:r>
-            <a:pPr marL="0" indent="0" algn="r">
-              <a:buNone/>
-            </a:pPr>
-            <a:r>
-              <a:rPr lang="en-US" sz="1000" dirty="0">
-                <a:solidFill>
-                  <a:srgbClr val="94A3B8"/>
-                </a:solidFill>
-                <a:latin typeface="Arial" pitchFamily="34" charset="0"/>
-                <a:ea typeface="Arial" pitchFamily="34" charset="-122"/>
-                <a:cs typeface="Arial" pitchFamily="34" charset="-120"/>
-              </a:rPr>
-              <a:t> /100</a:t>
-            </a:r>
-            <a:endParaRPr lang="en-US" sz="2200" dirty="0"/>
-          </a:p>
-        </p:txBody>
-      </p:sp>
-      <p:sp>
-        <p:nvSpPr>
-          <p:cNvPr id="36" name="Shape 34"/>
-          <p:cNvSpPr/>
-          <p:nvPr/>
-        </p:nvSpPr>
-        <p:spPr>
-          <a:xfrm>
-            <a:off x="5897880" y="2962656"/>
-            <a:ext cx="2606040" cy="64008"/>
-          </a:xfrm>
-          <a:prstGeom prst="roundRect">
-            <a:avLst>
-              <a:gd name="adj" fmla="val 42857"/>
-            </a:avLst>
-          </a:prstGeom>
-          <a:solidFill>
-            <a:srgbClr val="334155"/>
-          </a:solidFill>
-          <a:ln w="12700">
-            <a:solidFill>
-              <a:srgbClr val="334155"/>
-            </a:solidFill>
-            <a:prstDash val="solid"/>
-          </a:ln>
-        </p:spPr>
-      </p:sp>
-      <p:sp>
-        <p:nvSpPr>
-          <p:cNvPr id="37" name="Shape 35"/>
-          <p:cNvSpPr/>
-          <p:nvPr/>
-        </p:nvSpPr>
-        <p:spPr>
-          <a:xfrm>
-            <a:off x="5897880" y="2962656"/>
-            <a:ext cx="1876349" cy="64008"/>
-          </a:xfrm>
-          <a:prstGeom prst="roundRect">
-            <a:avLst>
-              <a:gd name="adj" fmla="val 42857"/>
-            </a:avLst>
-          </a:prstGeom>
-          <a:solidFill>
-            <a:srgbClr val="F59E0B"/>
-          </a:solidFill>
-          <a:ln w="12700">
-            <a:solidFill>
-              <a:srgbClr val="F59E0B"/>
-            </a:solidFill>
-            <a:prstDash val="solid"/>
-          </a:ln>
-        </p:spPr>
-      </p:sp>
-      <p:sp>
-        <p:nvSpPr>
-          <p:cNvPr id="38" name="Text 36"/>
-          <p:cNvSpPr txBox="1"/>
-          <p:nvPr/>
-        </p:nvSpPr>
-        <p:spPr>
-          <a:xfrm>
-            <a:off x="5897880" y="3145536"/>
-            <a:ext cx="1280160" cy="274320"/>
-          </a:xfrm>
-          <a:prstGeom prst="rect">
-            <a:avLst/>
-          </a:prstGeom>
-          <a:noFill/>
-          <a:ln/>
-        </p:spPr>
-        <p:txBody>
-          <a:bodyPr wrap="square" lIns="0" tIns="0" rIns="0" bIns="0" rtlCol="0" anchor="ctr"/>
-          <a:lstStyle/>
-          <a:p>
-            <a:pPr marL="0" indent="0">
-              <a:buNone/>
-            </a:pPr>
-            <a:r>
-              <a:rPr lang="en-US" sz="1200" dirty="0">
-                <a:solidFill>
-                  <a:srgbClr val="CBD5E1"/>
-                </a:solidFill>
-                <a:latin typeface="Calibri" pitchFamily="34" charset="0"/>
-                <a:ea typeface="Calibri" pitchFamily="34" charset="-122"/>
-                <a:cs typeface="Calibri" pitchFamily="34" charset="-120"/>
-              </a:rPr>
-              <a:t>SHIP-005</a:t>
-            </a:r>
-            <a:endParaRPr lang="en-US" sz="1200" dirty="0"/>
-          </a:p>
-        </p:txBody>
-      </p:sp>
-      <p:sp>
-        <p:nvSpPr>
-          <p:cNvPr id="39" name="Text 37"/>
-          <p:cNvSpPr txBox="1"/>
-          <p:nvPr/>
-        </p:nvSpPr>
-        <p:spPr>
-          <a:xfrm>
-            <a:off x="5897880" y="3392424"/>
-            <a:ext cx="1280160" cy="201168"/>
-          </a:xfrm>
-          <a:prstGeom prst="rect">
-            <a:avLst/>
-          </a:prstGeom>
-          <a:noFill/>
-          <a:ln/>
-        </p:spPr>
-        <p:txBody>
-          <a:bodyPr wrap="square" lIns="0" tIns="0" rIns="0" bIns="0" rtlCol="0" anchor="t"/>
-          <a:lstStyle/>
-          <a:p>
-            <a:pPr marL="0" indent="0">
-              <a:buNone/>
-            </a:pPr>
-            <a:r>
-              <a:rPr lang="en-US" sz="950" b="1" kern="0" spc="100" dirty="0">
-                <a:solidFill>
-                  <a:srgbClr val="EAB308"/>
-                </a:solidFill>
-                <a:latin typeface="Calibri" pitchFamily="34" charset="0"/>
-                <a:ea typeface="Calibri" pitchFamily="34" charset="-122"/>
-                <a:cs typeface="Calibri" pitchFamily="34" charset="-120"/>
-              </a:rPr>
-              <a:t>WATCH</a:t>
-            </a:r>
-            <a:endParaRPr lang="en-US" sz="950" dirty="0"/>
-          </a:p>
-        </p:txBody>
-      </p:sp>
-      <p:sp>
-        <p:nvSpPr>
-          <p:cNvPr id="40" name="Text 38"/>
-          <p:cNvSpPr txBox="1"/>
-          <p:nvPr/>
-        </p:nvSpPr>
-        <p:spPr>
-          <a:xfrm>
-            <a:off x="7132320" y="3099816"/>
-            <a:ext cx="1371600" cy="411480"/>
-          </a:xfrm>
-          <a:prstGeom prst="rect">
-            <a:avLst/>
-          </a:prstGeom>
-          <a:noFill/>
-          <a:ln/>
-        </p:spPr>
-        <p:txBody>
-          <a:bodyPr wrap="square" lIns="0" tIns="0" rIns="0" bIns="0" rtlCol="0" anchor="ctr"/>
-          <a:lstStyle/>
-          <a:p>
-            <a:pPr marL="0" indent="0" algn="r">
-              <a:buNone/>
-            </a:pPr>
-            <a:r>
-              <a:rPr lang="en-US" sz="2200" b="1" dirty="0">
-                <a:solidFill>
-                  <a:srgbClr val="EAB308"/>
-                </a:solidFill>
-                <a:latin typeface="Arial" pitchFamily="34" charset="0"/>
-                <a:ea typeface="Arial" pitchFamily="34" charset="-122"/>
-                <a:cs typeface="Arial" pitchFamily="34" charset="-120"/>
-              </a:rPr>
-              <a:t>61</a:t>
-            </a:r>
-            <a:pPr marL="0" indent="0" algn="r">
-              <a:buNone/>
-            </a:pPr>
-            <a:r>
-              <a:rPr lang="en-US" sz="1000" dirty="0">
-                <a:solidFill>
-                  <a:srgbClr val="94A3B8"/>
-                </a:solidFill>
-                <a:latin typeface="Arial" pitchFamily="34" charset="0"/>
-                <a:ea typeface="Arial" pitchFamily="34" charset="-122"/>
-                <a:cs typeface="Arial" pitchFamily="34" charset="-120"/>
-              </a:rPr>
-              <a:t> /100</a:t>
-            </a:r>
-            <a:endParaRPr lang="en-US" sz="2200" dirty="0"/>
-          </a:p>
-        </p:txBody>
-      </p:sp>
-      <p:sp>
-        <p:nvSpPr>
-          <p:cNvPr id="41" name="Shape 39"/>
-          <p:cNvSpPr/>
-          <p:nvPr/>
-        </p:nvSpPr>
-        <p:spPr>
-          <a:xfrm>
-            <a:off x="5897880" y="3621024"/>
-            <a:ext cx="2606040" cy="64008"/>
-          </a:xfrm>
-          <a:prstGeom prst="roundRect">
-            <a:avLst>
-              <a:gd name="adj" fmla="val 42857"/>
-            </a:avLst>
-          </a:prstGeom>
-          <a:solidFill>
-            <a:srgbClr val="334155"/>
-          </a:solidFill>
-          <a:ln w="12700">
-            <a:solidFill>
-              <a:srgbClr val="334155"/>
-            </a:solidFill>
-            <a:prstDash val="solid"/>
-          </a:ln>
-        </p:spPr>
-      </p:sp>
-      <p:sp>
-        <p:nvSpPr>
-          <p:cNvPr id="42" name="Shape 40"/>
-          <p:cNvSpPr/>
-          <p:nvPr/>
-        </p:nvSpPr>
-        <p:spPr>
-          <a:xfrm>
-            <a:off x="5897880" y="3621024"/>
-            <a:ext cx="1589684" cy="64008"/>
-          </a:xfrm>
-          <a:prstGeom prst="roundRect">
-            <a:avLst>
-              <a:gd name="adj" fmla="val 42857"/>
-            </a:avLst>
-          </a:prstGeom>
-          <a:solidFill>
-            <a:srgbClr val="EAB308"/>
-          </a:solidFill>
-          <a:ln w="12700">
-            <a:solidFill>
-              <a:srgbClr val="EAB308"/>
-            </a:solidFill>
-            <a:prstDash val="solid"/>
-          </a:ln>
-        </p:spPr>
-      </p:sp>
-      <p:sp>
-        <p:nvSpPr>
-          <p:cNvPr id="43" name="Text 41"/>
-          <p:cNvSpPr txBox="1"/>
-          <p:nvPr/>
-        </p:nvSpPr>
-        <p:spPr>
-          <a:xfrm>
-            <a:off x="5897880" y="3886200"/>
-            <a:ext cx="2606040" cy="502920"/>
-          </a:xfrm>
-          <a:prstGeom prst="rect">
-            <a:avLst/>
-          </a:prstGeom>
-          <a:noFill/>
-          <a:ln/>
-        </p:spPr>
-        <p:txBody>
-          <a:bodyPr wrap="square" lIns="0" tIns="0" rIns="0" bIns="0" rtlCol="0" anchor="t"/>
-          <a:lstStyle/>
-          <a:p>
-            <a:pPr marL="0" indent="0">
-              <a:buNone/>
-            </a:pPr>
-            <a:r>
-              <a:rPr lang="en-US" sz="1050" i="1" dirty="0">
-                <a:solidFill>
-                  <a:srgbClr val="22D3EE"/>
-                </a:solidFill>
-                <a:latin typeface="Calibri" pitchFamily="34" charset="0"/>
-                <a:ea typeface="Calibri" pitchFamily="34" charset="-122"/>
-                <a:cs typeface="Calibri" pitchFamily="34" charset="-120"/>
-              </a:rPr>
-              <a:t>Recommendation: reroute SHIP-001 via Denver hub, assign truck T-002</a:t>
-            </a:r>
-            <a:endParaRPr lang="en-US" sz="1050" dirty="0"/>
-          </a:p>
-        </p:txBody>
-      </p:sp>
-    </p:spTree>
-  </p:cSld>
-  <p:clrMapOvr>
-    <a:masterClrMapping/>
-  </p:clrMapOvr>
-</p:sld>
-</file>
-
-<file path=ppt/slides/slide6.xml><?xml version="1.0" encoding="utf-8"?>
-<p:sld xmlns:a="http://schemas.openxmlformats.org/drawingml/2006/main" xmlns:r="http://schemas.openxmlformats.org/officeDocument/2006/relationships" xmlns:p="http://schemas.openxmlformats.org/presentationml/2006/main">
-  <p:cSld name="Slide 6">
-    <p:bg>
-      <p:bgPr>
-        <a:solidFill>
-          <a:srgbClr val="0B1426"/>
-        </a:solidFill>
-      </p:bgPr>
-    </p:bg>
-    <p:spTree>
-      <p:nvGrpSpPr>
-        <p:cNvPr id="1" name=""/>
-        <p:cNvGrpSpPr/>
-        <p:nvPr/>
-      </p:nvGrpSpPr>
-      <p:grpSpPr>
-        <a:xfrm>
-          <a:off x="0" y="0"/>
-          <a:ext cx="0" cy="0"/>
-          <a:chOff x="0" y="0"/>
-          <a:chExt cx="0" cy="0"/>
-        </a:xfrm>
-      </p:grpSpPr>
-      <p:sp>
-        <p:nvSpPr>
-          <p:cNvPr id="2" name="Text 0"/>
-          <p:cNvSpPr txBox="1"/>
-          <p:nvPr/>
-        </p:nvSpPr>
-        <p:spPr>
-          <a:xfrm>
-            <a:off x="457200" y="320040"/>
-            <a:ext cx="8229600" cy="228600"/>
-          </a:xfrm>
-          <a:prstGeom prst="rect">
-            <a:avLst/>
-          </a:prstGeom>
-          <a:noFill/>
-          <a:ln/>
-        </p:spPr>
-        <p:txBody>
-          <a:bodyPr wrap="square" lIns="0" tIns="0" rIns="0" bIns="0" rtlCol="0" anchor="t"/>
-          <a:lstStyle/>
-          <a:p>
-            <a:pPr marL="0" indent="0">
-              <a:buNone/>
-            </a:pPr>
-            <a:r>
-              <a:rPr lang="en-US" sz="1100" b="1" kern="0" spc="200" dirty="0">
-                <a:solidFill>
-                  <a:srgbClr val="22D3EE"/>
-                </a:solidFill>
-                <a:latin typeface="Calibri" pitchFamily="34" charset="0"/>
-                <a:ea typeface="Calibri" pitchFamily="34" charset="-122"/>
-                <a:cs typeface="Calibri" pitchFamily="34" charset="-120"/>
-              </a:rPr>
-              <a:t>06  ·  IBM TECHNOLOGY INTEGRATION</a:t>
-            </a:r>
-            <a:endParaRPr lang="en-US" sz="1100" dirty="0"/>
-          </a:p>
-        </p:txBody>
-      </p:sp>
-      <p:sp>
-        <p:nvSpPr>
-          <p:cNvPr id="3" name="Text 1"/>
-          <p:cNvSpPr txBox="1"/>
-          <p:nvPr/>
-        </p:nvSpPr>
-        <p:spPr>
-          <a:xfrm>
-            <a:off x="457200" y="566928"/>
-            <a:ext cx="8229600" cy="548640"/>
-          </a:xfrm>
-          <a:prstGeom prst="rect">
-            <a:avLst/>
-          </a:prstGeom>
-          <a:noFill/>
-          <a:ln/>
-        </p:spPr>
-        <p:txBody>
-          <a:bodyPr wrap="square" lIns="0" tIns="0" rIns="0" bIns="0" rtlCol="0" anchor="t"/>
-          <a:lstStyle/>
-          <a:p>
-            <a:pPr marL="0" indent="0">
-              <a:buNone/>
-            </a:pPr>
-            <a:r>
-              <a:rPr lang="en-US" sz="2800" b="1" dirty="0">
-                <a:solidFill>
-                  <a:srgbClr val="F1F5F9"/>
-                </a:solidFill>
-                <a:latin typeface="Arial" pitchFamily="34" charset="0"/>
-                <a:ea typeface="Arial" pitchFamily="34" charset="-122"/>
-                <a:cs typeface="Arial" pitchFamily="34" charset="-120"/>
-              </a:rPr>
-              <a:t>Load-bearing, not decorative</a:t>
-            </a:r>
-            <a:endParaRPr lang="en-US" sz="2800" dirty="0"/>
-          </a:p>
-        </p:txBody>
-      </p:sp>
-      <p:sp>
-        <p:nvSpPr>
-          <p:cNvPr id="4" name="Text 2"/>
-          <p:cNvSpPr txBox="1"/>
-          <p:nvPr/>
-        </p:nvSpPr>
-        <p:spPr>
-          <a:xfrm>
-            <a:off x="7772400" y="4773168"/>
-            <a:ext cx="914400" cy="182880"/>
-          </a:xfrm>
-          <a:prstGeom prst="rect">
-            <a:avLst/>
-          </a:prstGeom>
-          <a:noFill/>
-          <a:ln/>
-        </p:spPr>
-        <p:txBody>
-          <a:bodyPr wrap="square" lIns="0" tIns="0" rIns="0" bIns="0" rtlCol="0" anchor="t"/>
-          <a:lstStyle/>
-          <a:p>
-            <a:pPr marL="0" indent="0" algn="r">
-              <a:buNone/>
-            </a:pPr>
-            <a:r>
-              <a:rPr lang="en-US" sz="900" dirty="0">
-                <a:solidFill>
-                  <a:srgbClr val="94A3B8"/>
-                </a:solidFill>
-                <a:latin typeface="Calibri" pitchFamily="34" charset="0"/>
-                <a:ea typeface="Calibri" pitchFamily="34" charset="-122"/>
-                <a:cs typeface="Calibri" pitchFamily="34" charset="-120"/>
-              </a:rPr>
-              <a:t>6 / 8</a:t>
-            </a:r>
-            <a:endParaRPr lang="en-US" sz="900" dirty="0"/>
-          </a:p>
-        </p:txBody>
-      </p:sp>
-      <p:sp>
-        <p:nvSpPr>
-          <p:cNvPr id="5" name="Shape 3"/>
-          <p:cNvSpPr/>
-          <p:nvPr/>
-        </p:nvSpPr>
-        <p:spPr>
-          <a:xfrm>
-            <a:off x="457200" y="1280160"/>
-            <a:ext cx="2560320" cy="2880360"/>
-          </a:xfrm>
-          <a:prstGeom prst="roundRect">
-            <a:avLst>
-              <a:gd name="adj" fmla="val 2857"/>
-            </a:avLst>
-          </a:prstGeom>
-          <a:solidFill>
-            <a:srgbClr val="14213D"/>
-          </a:solidFill>
-          <a:ln w="12700">
-            <a:solidFill>
-              <a:srgbClr val="14213D"/>
-            </a:solidFill>
-            <a:prstDash val="solid"/>
-          </a:ln>
-        </p:spPr>
-      </p:sp>
-      <p:sp>
-        <p:nvSpPr>
-          <p:cNvPr id="6" name="Shape 4"/>
-          <p:cNvSpPr/>
-          <p:nvPr/>
-        </p:nvSpPr>
-        <p:spPr>
-          <a:xfrm>
-            <a:off x="685800" y="1508760"/>
-            <a:ext cx="502920" cy="502920"/>
-          </a:xfrm>
-          <a:prstGeom prst="ellipse">
-            <a:avLst/>
-          </a:prstGeom>
-          <a:solidFill>
-            <a:srgbClr val="2A2560"/>
-          </a:solidFill>
-          <a:ln w="12700">
-            <a:solidFill>
-              <a:srgbClr val="2A2560"/>
-            </a:solidFill>
-            <a:prstDash val="solid"/>
-          </a:ln>
-        </p:spPr>
-      </p:sp>
-      <p:pic>
-        <p:nvPicPr>
-          <p:cNvPr id="7" name="Image 0" descr="preencoded.png"/>
-          <p:cNvPicPr>
-            <a:picLocks noChangeAspect="1"/>
-          </p:cNvPicPr>
-          <p:nvPr/>
-        </p:nvPicPr>
-        <p:blipFill>
-          <a:blip r:embed="rId1"/>
-          <a:stretch>
-            <a:fillRect/>
-          </a:stretch>
-        </p:blipFill>
-        <p:spPr>
-          <a:xfrm>
-            <a:off x="811530" y="1634490"/>
-            <a:ext cx="251460" cy="251460"/>
-          </a:xfrm>
-          <a:prstGeom prst="rect">
-            <a:avLst/>
-          </a:prstGeom>
-        </p:spPr>
-      </p:pic>
-      <p:sp>
-        <p:nvSpPr>
-          <p:cNvPr id="8" name="Text 5"/>
-          <p:cNvSpPr txBox="1"/>
-          <p:nvPr/>
-        </p:nvSpPr>
-        <p:spPr>
-          <a:xfrm>
-            <a:off x="685800" y="2148840"/>
-            <a:ext cx="2194560" cy="320040"/>
-          </a:xfrm>
-          <a:prstGeom prst="rect">
-            <a:avLst/>
-          </a:prstGeom>
-          <a:noFill/>
-          <a:ln/>
-        </p:spPr>
-        <p:txBody>
-          <a:bodyPr wrap="square" lIns="0" tIns="0" rIns="0" bIns="0" rtlCol="0" anchor="t"/>
-          <a:lstStyle/>
-          <a:p>
-            <a:pPr marL="0" indent="0">
-              <a:buNone/>
-            </a:pPr>
-            <a:r>
-              <a:rPr lang="en-US" sz="1600" b="1" dirty="0">
-                <a:solidFill>
-                  <a:srgbClr val="F1F5F9"/>
-                </a:solidFill>
-                <a:latin typeface="Calibri" pitchFamily="34" charset="0"/>
-                <a:ea typeface="Calibri" pitchFamily="34" charset="-122"/>
-                <a:cs typeface="Calibri" pitchFamily="34" charset="-120"/>
-              </a:rPr>
-              <a:t>watsonx.ai</a:t>
-            </a:r>
-            <a:endParaRPr lang="en-US" sz="1600" dirty="0"/>
-          </a:p>
-        </p:txBody>
-      </p:sp>
-      <p:sp>
-        <p:nvSpPr>
-          <p:cNvPr id="9" name="Text 6"/>
-          <p:cNvSpPr txBox="1"/>
-          <p:nvPr/>
-        </p:nvSpPr>
-        <p:spPr>
-          <a:xfrm>
-            <a:off x="685800" y="2468880"/>
-            <a:ext cx="2194560" cy="228600"/>
-          </a:xfrm>
-          <a:prstGeom prst="rect">
-            <a:avLst/>
-          </a:prstGeom>
-          <a:noFill/>
-          <a:ln/>
-        </p:spPr>
-        <p:txBody>
-          <a:bodyPr wrap="square" lIns="0" tIns="0" rIns="0" bIns="0" rtlCol="0" anchor="t"/>
-          <a:lstStyle/>
-          <a:p>
-            <a:pPr marL="0" indent="0">
-              <a:buNone/>
-            </a:pPr>
-            <a:r>
-              <a:rPr lang="en-US" sz="1100" dirty="0">
-                <a:solidFill>
-                  <a:srgbClr val="A78BFA"/>
-                </a:solidFill>
-                <a:latin typeface="Calibri" pitchFamily="34" charset="0"/>
-                <a:ea typeface="Calibri" pitchFamily="34" charset="-122"/>
-                <a:cs typeface="Calibri" pitchFamily="34" charset="-120"/>
-              </a:rPr>
-              <a:t>Llama 4 Maverick · 3 call types</a:t>
-            </a:r>
-            <a:endParaRPr lang="en-US" sz="1100" dirty="0"/>
-          </a:p>
-        </p:txBody>
-      </p:sp>
-      <p:sp>
-        <p:nvSpPr>
-          <p:cNvPr id="10" name="Text 7"/>
-          <p:cNvSpPr txBox="1"/>
-          <p:nvPr/>
-        </p:nvSpPr>
-        <p:spPr>
-          <a:xfrm>
-            <a:off x="685800" y="2834640"/>
-            <a:ext cx="2194560" cy="1234440"/>
-          </a:xfrm>
-          <a:prstGeom prst="rect">
-            <a:avLst/>
-          </a:prstGeom>
-          <a:noFill/>
-          <a:ln/>
-        </p:spPr>
-        <p:txBody>
-          <a:bodyPr wrap="square" lIns="0" tIns="0" rIns="0" bIns="0" rtlCol="0" anchor="t"/>
-          <a:lstStyle/>
-          <a:p>
-            <a:pPr marL="152400" indent="-152400">
-              <a:spcAft>
-                <a:spcPts val="500"/>
-              </a:spcAft>
-              <a:buSzPct val="100000"/>
-              <a:buChar char="•"/>
-            </a:pPr>
-            <a:r>
-              <a:rPr lang="en-US" sz="1150" dirty="0">
-                <a:solidFill>
-                  <a:srgbClr val="CBD5E1"/>
-                </a:solidFill>
-                <a:latin typeface="Calibri" pitchFamily="34" charset="0"/>
-                <a:ea typeface="Calibri" pitchFamily="34" charset="-122"/>
-                <a:cs typeface="Calibri" pitchFamily="34" charset="-120"/>
-              </a:rPr>
-              <a:t>GDP excursion severity classification</a:t>
-            </a:r>
-            <a:endParaRPr lang="en-US" sz="1150" dirty="0"/>
-          </a:p>
-          <a:p>
-            <a:pPr marL="152400" indent="-152400">
-              <a:spcAft>
-                <a:spcPts val="500"/>
-              </a:spcAft>
-              <a:buSzPct val="100000"/>
-              <a:buChar char="•"/>
-            </a:pPr>
-            <a:r>
-              <a:rPr lang="en-US" sz="1150" dirty="0">
-                <a:solidFill>
-                  <a:srgbClr val="CBD5E1"/>
-                </a:solidFill>
-                <a:latin typeface="Calibri" pitchFamily="34" charset="0"/>
-                <a:ea typeface="Calibri" pitchFamily="34" charset="-122"/>
-                <a:cs typeface="Calibri" pitchFamily="34" charset="-120"/>
-              </a:rPr>
-              <a:t>Rerouting strategy generation</a:t>
-            </a:r>
-            <a:endParaRPr lang="en-US" sz="1150" dirty="0"/>
-          </a:p>
-          <a:p>
-            <a:pPr marL="152400" indent="-152400">
-              <a:spcAft>
-                <a:spcPts val="500"/>
-              </a:spcAft>
-              <a:buSzPct val="100000"/>
-              <a:buChar char="•"/>
-            </a:pPr>
-            <a:r>
-              <a:rPr lang="en-US" sz="1150" dirty="0">
-                <a:solidFill>
-                  <a:srgbClr val="CBD5E1"/>
-                </a:solidFill>
-                <a:latin typeface="Calibri" pitchFamily="34" charset="0"/>
-                <a:ea typeface="Calibri" pitchFamily="34" charset="-122"/>
-                <a:cs typeface="Calibri" pitchFamily="34" charset="-120"/>
-              </a:rPr>
-              <a:t>Operations Copilot Q&amp;A with live system context</a:t>
-            </a:r>
-            <a:endParaRPr lang="en-US" sz="1150" dirty="0"/>
-          </a:p>
-        </p:txBody>
-      </p:sp>
-      <p:sp>
-        <p:nvSpPr>
-          <p:cNvPr id="11" name="Shape 8"/>
-          <p:cNvSpPr/>
-          <p:nvPr/>
-        </p:nvSpPr>
-        <p:spPr>
-          <a:xfrm>
-            <a:off x="3291840" y="1280160"/>
-            <a:ext cx="2560320" cy="2880360"/>
-          </a:xfrm>
-          <a:prstGeom prst="roundRect">
-            <a:avLst>
-              <a:gd name="adj" fmla="val 2857"/>
-            </a:avLst>
-          </a:prstGeom>
-          <a:solidFill>
-            <a:srgbClr val="14213D"/>
-          </a:solidFill>
-          <a:ln w="12700">
-            <a:solidFill>
-              <a:srgbClr val="14213D"/>
-            </a:solidFill>
-            <a:prstDash val="solid"/>
-          </a:ln>
-        </p:spPr>
-      </p:sp>
-      <p:sp>
-        <p:nvSpPr>
-          <p:cNvPr id="12" name="Shape 9"/>
-          <p:cNvSpPr/>
-          <p:nvPr/>
-        </p:nvSpPr>
-        <p:spPr>
-          <a:xfrm>
-            <a:off x="3520440" y="1508760"/>
-            <a:ext cx="502920" cy="502920"/>
-          </a:xfrm>
-          <a:prstGeom prst="ellipse">
-            <a:avLst/>
-          </a:prstGeom>
-          <a:solidFill>
-            <a:srgbClr val="2A2560"/>
-          </a:solidFill>
-          <a:ln w="12700">
-            <a:solidFill>
-              <a:srgbClr val="2A2560"/>
-            </a:solidFill>
-            <a:prstDash val="solid"/>
-          </a:ln>
-        </p:spPr>
-      </p:sp>
-      <p:pic>
-        <p:nvPicPr>
-          <p:cNvPr id="13" name="Image 1" descr="preencoded.png"/>
-          <p:cNvPicPr>
-            <a:picLocks noChangeAspect="1"/>
-          </p:cNvPicPr>
-          <p:nvPr/>
-        </p:nvPicPr>
-        <p:blipFill>
-          <a:blip r:embed="rId2"/>
-          <a:stretch>
-            <a:fillRect/>
-          </a:stretch>
-        </p:blipFill>
-        <p:spPr>
-          <a:xfrm>
-            <a:off x="3646170" y="1634490"/>
-            <a:ext cx="251460" cy="251460"/>
-          </a:xfrm>
-          <a:prstGeom prst="rect">
-            <a:avLst/>
-          </a:prstGeom>
-        </p:spPr>
-      </p:pic>
-      <p:sp>
-        <p:nvSpPr>
-          <p:cNvPr id="14" name="Text 10"/>
-          <p:cNvSpPr txBox="1"/>
-          <p:nvPr/>
-        </p:nvSpPr>
-        <p:spPr>
-          <a:xfrm>
-            <a:off x="3520440" y="2148840"/>
-            <a:ext cx="2194560" cy="320040"/>
-          </a:xfrm>
-          <a:prstGeom prst="rect">
-            <a:avLst/>
-          </a:prstGeom>
-          <a:noFill/>
-          <a:ln/>
-        </p:spPr>
-        <p:txBody>
-          <a:bodyPr wrap="square" lIns="0" tIns="0" rIns="0" bIns="0" rtlCol="0" anchor="t"/>
-          <a:lstStyle/>
-          <a:p>
-            <a:pPr marL="0" indent="0">
-              <a:buNone/>
-            </a:pPr>
-            <a:r>
-              <a:rPr lang="en-US" sz="1600" b="1" dirty="0">
-                <a:solidFill>
-                  <a:srgbClr val="F1F5F9"/>
-                </a:solidFill>
-                <a:latin typeface="Calibri" pitchFamily="34" charset="0"/>
-                <a:ea typeface="Calibri" pitchFamily="34" charset="-122"/>
-                <a:cs typeface="Calibri" pitchFamily="34" charset="-120"/>
-              </a:rPr>
-              <a:t>IBM Bob MCP Server</a:t>
-            </a:r>
-            <a:endParaRPr lang="en-US" sz="1600" dirty="0"/>
-          </a:p>
-        </p:txBody>
-      </p:sp>
-      <p:sp>
-        <p:nvSpPr>
-          <p:cNvPr id="15" name="Text 11"/>
-          <p:cNvSpPr txBox="1"/>
-          <p:nvPr/>
-        </p:nvSpPr>
-        <p:spPr>
-          <a:xfrm>
-            <a:off x="3520440" y="2468880"/>
-            <a:ext cx="2194560" cy="228600"/>
-          </a:xfrm>
-          <a:prstGeom prst="rect">
-            <a:avLst/>
-          </a:prstGeom>
-          <a:noFill/>
-          <a:ln/>
-        </p:spPr>
-        <p:txBody>
-          <a:bodyPr wrap="square" lIns="0" tIns="0" rIns="0" bIns="0" rtlCol="0" anchor="t"/>
-          <a:lstStyle/>
-          <a:p>
-            <a:pPr marL="0" indent="0">
-              <a:buNone/>
-            </a:pPr>
-            <a:r>
-              <a:rPr lang="en-US" sz="1100" dirty="0">
-                <a:solidFill>
-                  <a:srgbClr val="A78BFA"/>
-                </a:solidFill>
-                <a:latin typeface="Calibri" pitchFamily="34" charset="0"/>
-                <a:ea typeface="Calibri" pitchFamily="34" charset="-122"/>
-                <a:cs typeface="Calibri" pitchFamily="34" charset="-120"/>
-              </a:rPr>
-              <a:t>Custom 6-tool server</a:t>
-            </a:r>
-            <a:endParaRPr lang="en-US" sz="1100" dirty="0"/>
-          </a:p>
-        </p:txBody>
-      </p:sp>
-      <p:sp>
-        <p:nvSpPr>
-          <p:cNvPr id="16" name="Text 12"/>
-          <p:cNvSpPr txBox="1"/>
-          <p:nvPr/>
-        </p:nvSpPr>
-        <p:spPr>
-          <a:xfrm>
-            <a:off x="3520440" y="2834640"/>
-            <a:ext cx="2194560" cy="1234440"/>
-          </a:xfrm>
-          <a:prstGeom prst="rect">
-            <a:avLst/>
-          </a:prstGeom>
-          <a:noFill/>
-          <a:ln/>
-        </p:spPr>
-        <p:txBody>
-          <a:bodyPr wrap="square" lIns="0" tIns="0" rIns="0" bIns="0" rtlCol="0" anchor="t"/>
-          <a:lstStyle/>
-          <a:p>
-            <a:pPr marL="152400" indent="-152400">
-              <a:spcAft>
-                <a:spcPts val="500"/>
-              </a:spcAft>
-              <a:buSzPct val="100000"/>
-              <a:buChar char="•"/>
-            </a:pPr>
-            <a:r>
-              <a:rPr lang="en-US" sz="1150" dirty="0">
-                <a:solidFill>
-                  <a:srgbClr val="CBD5E1"/>
-                </a:solidFill>
-                <a:latin typeface="Calibri" pitchFamily="34" charset="0"/>
-                <a:ea typeface="Calibri" pitchFamily="34" charset="-122"/>
-                <a:cs typeface="Calibri" pitchFamily="34" charset="-120"/>
-              </a:rPr>
-              <a:t>Connects Bob directly to live operational data</a:t>
-            </a:r>
-            <a:endParaRPr lang="en-US" sz="1150" dirty="0"/>
-          </a:p>
-          <a:p>
-            <a:pPr marL="152400" indent="-152400">
-              <a:spcAft>
-                <a:spcPts val="500"/>
-              </a:spcAft>
-              <a:buSzPct val="100000"/>
-              <a:buChar char="•"/>
-            </a:pPr>
-            <a:r>
-              <a:rPr lang="en-US" sz="1150" dirty="0">
-                <a:solidFill>
-                  <a:srgbClr val="CBD5E1"/>
-                </a:solidFill>
-                <a:latin typeface="Calibri" pitchFamily="34" charset="0"/>
-                <a:ea typeface="Calibri" pitchFamily="34" charset="-122"/>
-                <a:cs typeface="Calibri" pitchFamily="34" charset="-120"/>
-              </a:rPr>
-              <a:t>get_shipment_risk returns the real 6-factor breakdown</a:t>
-            </a:r>
-            <a:endParaRPr lang="en-US" sz="1150" dirty="0"/>
-          </a:p>
-          <a:p>
-            <a:pPr marL="152400" indent="-152400">
-              <a:spcAft>
-                <a:spcPts val="500"/>
-              </a:spcAft>
-              <a:buSzPct val="100000"/>
-              <a:buChar char="•"/>
-            </a:pPr>
-            <a:r>
-              <a:rPr lang="en-US" sz="1150" dirty="0">
-                <a:solidFill>
-                  <a:srgbClr val="CBD5E1"/>
-                </a:solidFill>
-                <a:latin typeface="Calibri" pitchFamily="34" charset="0"/>
-                <a:ea typeface="Calibri" pitchFamily="34" charset="-122"/>
-                <a:cs typeface="Calibri" pitchFamily="34" charset="-120"/>
-              </a:rPr>
-              <a:t>Bob queries real scores, never fabricates numbers</a:t>
-            </a:r>
-            <a:endParaRPr lang="en-US" sz="1150" dirty="0"/>
-          </a:p>
-        </p:txBody>
-      </p:sp>
-      <p:sp>
-        <p:nvSpPr>
-          <p:cNvPr id="17" name="Shape 13"/>
-          <p:cNvSpPr/>
-          <p:nvPr/>
-        </p:nvSpPr>
-        <p:spPr>
-          <a:xfrm>
-            <a:off x="6126480" y="1280160"/>
-            <a:ext cx="2560320" cy="2880360"/>
-          </a:xfrm>
-          <a:prstGeom prst="roundRect">
-            <a:avLst>
-              <a:gd name="adj" fmla="val 2857"/>
-            </a:avLst>
-          </a:prstGeom>
-          <a:solidFill>
-            <a:srgbClr val="14213D"/>
-          </a:solidFill>
-          <a:ln w="12700">
-            <a:solidFill>
-              <a:srgbClr val="14213D"/>
-            </a:solidFill>
-            <a:prstDash val="solid"/>
-          </a:ln>
-        </p:spPr>
-      </p:sp>
-      <p:sp>
-        <p:nvSpPr>
-          <p:cNvPr id="18" name="Shape 14"/>
-          <p:cNvSpPr/>
-          <p:nvPr/>
-        </p:nvSpPr>
-        <p:spPr>
-          <a:xfrm>
-            <a:off x="6355080" y="1508760"/>
-            <a:ext cx="502920" cy="502920"/>
-          </a:xfrm>
-          <a:prstGeom prst="ellipse">
-            <a:avLst/>
-          </a:prstGeom>
-          <a:solidFill>
-            <a:srgbClr val="2A2560"/>
-          </a:solidFill>
-          <a:ln w="12700">
-            <a:solidFill>
-              <a:srgbClr val="2A2560"/>
-            </a:solidFill>
-            <a:prstDash val="solid"/>
-          </a:ln>
-        </p:spPr>
-      </p:sp>
-      <p:pic>
-        <p:nvPicPr>
-          <p:cNvPr id="19" name="Image 2" descr="preencoded.png"/>
-          <p:cNvPicPr>
-            <a:picLocks noChangeAspect="1"/>
-          </p:cNvPicPr>
-          <p:nvPr/>
-        </p:nvPicPr>
-        <p:blipFill>
-          <a:blip r:embed="rId3"/>
-          <a:stretch>
-            <a:fillRect/>
-          </a:stretch>
-        </p:blipFill>
-        <p:spPr>
-          <a:xfrm>
-            <a:off x="6480810" y="1634490"/>
-            <a:ext cx="251460" cy="251460"/>
-          </a:xfrm>
-          <a:prstGeom prst="rect">
-            <a:avLst/>
-          </a:prstGeom>
-        </p:spPr>
-      </p:pic>
-      <p:sp>
-        <p:nvSpPr>
-          <p:cNvPr id="20" name="Text 15"/>
-          <p:cNvSpPr txBox="1"/>
-          <p:nvPr/>
-        </p:nvSpPr>
-        <p:spPr>
-          <a:xfrm>
-            <a:off x="6355080" y="2148840"/>
-            <a:ext cx="2194560" cy="320040"/>
-          </a:xfrm>
-          <a:prstGeom prst="rect">
-            <a:avLst/>
-          </a:prstGeom>
-          <a:noFill/>
-          <a:ln/>
-        </p:spPr>
-        <p:txBody>
-          <a:bodyPr wrap="square" lIns="0" tIns="0" rIns="0" bIns="0" rtlCol="0" anchor="t"/>
-          <a:lstStyle/>
-          <a:p>
-            <a:pPr marL="0" indent="0">
-              <a:buNone/>
-            </a:pPr>
-            <a:r>
-              <a:rPr lang="en-US" sz="1600" b="1" dirty="0">
-                <a:solidFill>
-                  <a:srgbClr val="F1F5F9"/>
-                </a:solidFill>
-                <a:latin typeface="Calibri" pitchFamily="34" charset="0"/>
-                <a:ea typeface="Calibri" pitchFamily="34" charset="-122"/>
-                <a:cs typeface="Calibri" pitchFamily="34" charset="-120"/>
-              </a:rPr>
-              <a:t>IBM Bob</a:t>
-            </a:r>
-            <a:endParaRPr lang="en-US" sz="1600" dirty="0"/>
-          </a:p>
-        </p:txBody>
-      </p:sp>
-      <p:sp>
-        <p:nvSpPr>
-          <p:cNvPr id="21" name="Text 16"/>
-          <p:cNvSpPr txBox="1"/>
-          <p:nvPr/>
-        </p:nvSpPr>
-        <p:spPr>
-          <a:xfrm>
-            <a:off x="6355080" y="2468880"/>
-            <a:ext cx="2194560" cy="228600"/>
-          </a:xfrm>
-          <a:prstGeom prst="rect">
-            <a:avLst/>
-          </a:prstGeom>
-          <a:noFill/>
-          <a:ln/>
-        </p:spPr>
-        <p:txBody>
-          <a:bodyPr wrap="square" lIns="0" tIns="0" rIns="0" bIns="0" rtlCol="0" anchor="t"/>
-          <a:lstStyle/>
-          <a:p>
-            <a:pPr marL="0" indent="0">
-              <a:buNone/>
-            </a:pPr>
-            <a:r>
-              <a:rPr lang="en-US" sz="1100" dirty="0">
-                <a:solidFill>
-                  <a:srgbClr val="A78BFA"/>
-                </a:solidFill>
-                <a:latin typeface="Calibri" pitchFamily="34" charset="0"/>
-                <a:ea typeface="Calibri" pitchFamily="34" charset="-122"/>
-                <a:cs typeface="Calibri" pitchFamily="34" charset="-120"/>
-              </a:rPr>
-              <a:t>AI coding agent</a:t>
-            </a:r>
-            <a:endParaRPr lang="en-US" sz="1100" dirty="0"/>
-          </a:p>
-        </p:txBody>
-      </p:sp>
-      <p:sp>
-        <p:nvSpPr>
-          <p:cNvPr id="22" name="Text 17"/>
-          <p:cNvSpPr txBox="1"/>
-          <p:nvPr/>
-        </p:nvSpPr>
-        <p:spPr>
-          <a:xfrm>
-            <a:off x="6355080" y="2834640"/>
-            <a:ext cx="2194560" cy="1234440"/>
-          </a:xfrm>
-          <a:prstGeom prst="rect">
-            <a:avLst/>
-          </a:prstGeom>
-          <a:noFill/>
-          <a:ln/>
-        </p:spPr>
-        <p:txBody>
-          <a:bodyPr wrap="square" lIns="0" tIns="0" rIns="0" bIns="0" rtlCol="0" anchor="t"/>
-          <a:lstStyle/>
-          <a:p>
-            <a:pPr marL="152400" indent="-152400">
-              <a:spcAft>
-                <a:spcPts val="500"/>
-              </a:spcAft>
-              <a:buSzPct val="100000"/>
-              <a:buChar char="•"/>
-            </a:pPr>
-            <a:r>
-              <a:rPr lang="en-US" sz="1150" dirty="0">
-                <a:solidFill>
-                  <a:srgbClr val="CBD5E1"/>
-                </a:solidFill>
-                <a:latin typeface="Calibri" pitchFamily="34" charset="0"/>
-                <a:ea typeface="Calibri" pitchFamily="34" charset="-122"/>
-                <a:cs typeface="Calibri" pitchFamily="34" charset="-120"/>
-              </a:rPr>
-              <a:t>Codebase exploration &amp; architecture review</a:t>
-            </a:r>
-            <a:endParaRPr lang="en-US" sz="1150" dirty="0"/>
-          </a:p>
-          <a:p>
-            <a:pPr marL="152400" indent="-152400">
-              <a:spcAft>
-                <a:spcPts val="500"/>
-              </a:spcAft>
-              <a:buSzPct val="100000"/>
-              <a:buChar char="•"/>
-            </a:pPr>
-            <a:r>
-              <a:rPr lang="en-US" sz="1150" dirty="0">
-                <a:solidFill>
-                  <a:srgbClr val="CBD5E1"/>
-                </a:solidFill>
-                <a:latin typeface="Calibri" pitchFamily="34" charset="0"/>
-                <a:ea typeface="Calibri" pitchFamily="34" charset="-122"/>
-                <a:cs typeface="Calibri" pitchFamily="34" charset="-120"/>
-              </a:rPr>
-              <a:t>Feature implementation across all 5 engines</a:t>
-            </a:r>
-            <a:endParaRPr lang="en-US" sz="1150" dirty="0"/>
-          </a:p>
-          <a:p>
-            <a:pPr marL="152400" indent="-152400">
-              <a:spcAft>
-                <a:spcPts val="500"/>
-              </a:spcAft>
-              <a:buSzPct val="100000"/>
-              <a:buChar char="•"/>
-            </a:pPr>
-            <a:r>
-              <a:rPr lang="en-US" sz="1150" dirty="0">
-                <a:solidFill>
-                  <a:srgbClr val="CBD5E1"/>
-                </a:solidFill>
-                <a:latin typeface="Calibri" pitchFamily="34" charset="0"/>
-                <a:ea typeface="Calibri" pitchFamily="34" charset="-122"/>
-                <a:cs typeface="Calibri" pitchFamily="34" charset="-120"/>
-              </a:rPr>
-              <a:t>Documentation and validation</a:t>
-            </a:r>
-            <a:endParaRPr lang="en-US" sz="1150" dirty="0"/>
-          </a:p>
-        </p:txBody>
-      </p:sp>
-      <p:sp>
-        <p:nvSpPr>
-          <p:cNvPr id="23" name="Text 18"/>
-          <p:cNvSpPr txBox="1"/>
-          <p:nvPr/>
-        </p:nvSpPr>
-        <p:spPr>
-          <a:xfrm>
-            <a:off x="457200" y="4315968"/>
-            <a:ext cx="7132320" cy="411480"/>
-          </a:xfrm>
-          <a:prstGeom prst="rect">
-            <a:avLst/>
-          </a:prstGeom>
-          <a:noFill/>
-          <a:ln/>
-        </p:spPr>
-        <p:txBody>
-          <a:bodyPr wrap="square" lIns="0" tIns="0" rIns="0" bIns="0" rtlCol="0" anchor="t"/>
-          <a:lstStyle/>
-          <a:p>
-            <a:pPr marL="0" indent="0">
-              <a:buNone/>
-            </a:pPr>
-            <a:r>
-              <a:rPr lang="en-US" sz="900" dirty="0">
-                <a:solidFill>
-                  <a:srgbClr val="94A3B8"/>
-                </a:solidFill>
-                <a:latin typeface="Courier New" pitchFamily="34" charset="0"/>
-                <a:ea typeface="Courier New" pitchFamily="34" charset="-122"/>
-                <a:cs typeface="Courier New" pitchFamily="34" charset="-120"/>
-              </a:rPr>
-              <a:t>MCP tools:  get_active_disruptions · get_affected_shipments · get_shipment_risk</a:t>
-            </a:r>
-            <a:endParaRPr lang="en-US" sz="900" dirty="0"/>
-          </a:p>
-          <a:p>
-            <a:pPr marL="0" indent="0">
-              <a:buNone/>
-            </a:pPr>
-            <a:r>
-              <a:rPr lang="en-US" sz="900" dirty="0">
-                <a:solidFill>
-                  <a:srgbClr val="94A3B8"/>
-                </a:solidFill>
-                <a:latin typeface="Courier New" pitchFamily="34" charset="0"/>
-                <a:ea typeface="Courier New" pitchFamily="34" charset="-122"/>
-                <a:cs typeface="Courier New" pitchFamily="34" charset="-120"/>
-              </a:rPr>
-              <a:t>            get_cold_chain_status · get_idle_fleet_assets · get_action_center</a:t>
-            </a:r>
-            <a:endParaRPr lang="en-US" sz="900" dirty="0"/>
-          </a:p>
-        </p:txBody>
-      </p:sp>
-    </p:spTree>
-  </p:cSld>
-  <p:clrMapOvr>
-    <a:masterClrMapping/>
-  </p:clrMapOvr>
-</p:sld>
-</file>
-
-<file path=ppt/slides/slide7.xml><?xml version="1.0" encoding="utf-8"?>
-<p:sld xmlns:p14="http://schemas.microsoft.com/office/powerpoint/2010/main" xmlns:a="http://schemas.openxmlformats.org/drawingml/2006/main" xmlns:r="http://schemas.openxmlformats.org/officeDocument/2006/relationships" xmlns:p="http://schemas.openxmlformats.org/presentationml/2006/main">
-  <p:cSld name="Slide 7">
-    <p:bg>
-      <p:bgPr>
-        <a:solidFill>
-          <a:srgbClr val="0B1426"/>
-        </a:solidFill>
-      </p:bgPr>
-    </p:bg>
-    <p:spTree>
-      <p:nvGrpSpPr>
-        <p:cNvPr id="1" name=""/>
-        <p:cNvGrpSpPr/>
-        <p:nvPr/>
-      </p:nvGrpSpPr>
-      <p:grpSpPr>
-        <a:xfrm>
-          <a:off x="0" y="0"/>
-          <a:ext cx="0" cy="0"/>
-          <a:chOff x="0" y="0"/>
-          <a:chExt cx="0" cy="0"/>
-        </a:xfrm>
-      </p:grpSpPr>
-      <p:sp>
-        <p:nvSpPr>
-          <p:cNvPr id="2" name="Text 0"/>
-          <p:cNvSpPr txBox="1"/>
-          <p:nvPr/>
-        </p:nvSpPr>
-        <p:spPr>
-          <a:xfrm>
-            <a:off x="457200" y="320040"/>
-            <a:ext cx="8229600" cy="228600"/>
-          </a:xfrm>
-          <a:prstGeom prst="rect">
-            <a:avLst/>
-          </a:prstGeom>
-          <a:noFill/>
-          <a:ln/>
-        </p:spPr>
-        <p:txBody>
-          <a:bodyPr wrap="square" lIns="0" tIns="0" rIns="0" bIns="0" rtlCol="0" anchor="t"/>
-          <a:lstStyle/>
-          <a:p>
-            <a:pPr marL="0" indent="0">
-              <a:buNone/>
-            </a:pPr>
-            <a:r>
-              <a:rPr lang="en-US" sz="1100" b="1" kern="0" spc="200" dirty="0">
-                <a:solidFill>
-                  <a:srgbClr val="22D3EE"/>
-                </a:solidFill>
-                <a:latin typeface="Calibri" pitchFamily="34" charset="0"/>
-                <a:ea typeface="Calibri" pitchFamily="34" charset="-122"/>
-                <a:cs typeface="Calibri" pitchFamily="34" charset="-120"/>
-              </a:rPr>
-              <a:t>07  ·  BUSINESS IMPACT</a:t>
-            </a:r>
-            <a:endParaRPr lang="en-US" sz="1100" dirty="0"/>
-          </a:p>
-        </p:txBody>
-      </p:sp>
-      <p:sp>
-        <p:nvSpPr>
-          <p:cNvPr id="3" name="Text 1"/>
-          <p:cNvSpPr txBox="1"/>
-          <p:nvPr/>
-        </p:nvSpPr>
-        <p:spPr>
-          <a:xfrm>
-            <a:off x="457200" y="566928"/>
-            <a:ext cx="8229600" cy="548640"/>
-          </a:xfrm>
-          <a:prstGeom prst="rect">
-            <a:avLst/>
-          </a:prstGeom>
-          <a:noFill/>
-          <a:ln/>
-        </p:spPr>
-        <p:txBody>
-          <a:bodyPr wrap="square" lIns="0" tIns="0" rIns="0" bIns="0" rtlCol="0" anchor="t"/>
-          <a:lstStyle/>
-          <a:p>
-            <a:pPr marL="0" indent="0">
-              <a:buNone/>
-            </a:pPr>
-            <a:r>
-              <a:rPr lang="en-US" sz="2800" b="1" dirty="0">
-                <a:solidFill>
-                  <a:srgbClr val="F1F5F9"/>
-                </a:solidFill>
-                <a:latin typeface="Arial" pitchFamily="34" charset="0"/>
-                <a:ea typeface="Arial" pitchFamily="34" charset="-122"/>
-                <a:cs typeface="Arial" pitchFamily="34" charset="-120"/>
-              </a:rPr>
-              <a:t>What this changes</a:t>
-            </a:r>
-            <a:endParaRPr lang="en-US" sz="2800" dirty="0"/>
-          </a:p>
-        </p:txBody>
-      </p:sp>
-      <p:sp>
-        <p:nvSpPr>
-          <p:cNvPr id="4" name="Text 2"/>
-          <p:cNvSpPr txBox="1"/>
-          <p:nvPr/>
-        </p:nvSpPr>
-        <p:spPr>
-          <a:xfrm>
-            <a:off x="7772400" y="4773168"/>
-            <a:ext cx="914400" cy="182880"/>
-          </a:xfrm>
-          <a:prstGeom prst="rect">
-            <a:avLst/>
-          </a:prstGeom>
-          <a:noFill/>
-          <a:ln/>
-        </p:spPr>
-        <p:txBody>
-          <a:bodyPr wrap="square" lIns="0" tIns="0" rIns="0" bIns="0" rtlCol="0" anchor="t"/>
-          <a:lstStyle/>
-          <a:p>
-            <a:pPr marL="0" indent="0" algn="r">
-              <a:buNone/>
-            </a:pPr>
-            <a:r>
-              <a:rPr lang="en-US" sz="900" dirty="0">
-                <a:solidFill>
-                  <a:srgbClr val="94A3B8"/>
-                </a:solidFill>
-                <a:latin typeface="Calibri" pitchFamily="34" charset="0"/>
-                <a:ea typeface="Calibri" pitchFamily="34" charset="-122"/>
-                <a:cs typeface="Calibri" pitchFamily="34" charset="-120"/>
-              </a:rPr>
-              <a:t>7 / 8</a:t>
-            </a:r>
-            <a:endParaRPr lang="en-US" sz="900" dirty="0"/>
-          </a:p>
-        </p:txBody>
-      </p:sp>
-      <p:sp>
-        <p:nvSpPr>
-          <p:cNvPr id="5" name="Shape 3"/>
-          <p:cNvSpPr/>
-          <p:nvPr/>
-        </p:nvSpPr>
-        <p:spPr>
-          <a:xfrm>
-            <a:off x="457200" y="1280160"/>
-            <a:ext cx="2743200" cy="3246120"/>
-          </a:xfrm>
-          <a:prstGeom prst="roundRect">
-            <a:avLst>
-              <a:gd name="adj" fmla="val 2667"/>
-            </a:avLst>
-          </a:prstGeom>
-          <a:solidFill>
-            <a:srgbClr val="14213D"/>
-          </a:solidFill>
-          <a:ln w="12700">
-            <a:solidFill>
-              <a:srgbClr val="14213D"/>
-            </a:solidFill>
-            <a:prstDash val="solid"/>
-          </a:ln>
-        </p:spPr>
-      </p:sp>
-      <p:sp>
-        <p:nvSpPr>
-          <p:cNvPr id="6" name="Shape 4"/>
-          <p:cNvSpPr/>
-          <p:nvPr/>
-        </p:nvSpPr>
-        <p:spPr>
-          <a:xfrm>
-            <a:off x="685800" y="1508760"/>
-            <a:ext cx="502920" cy="502920"/>
-          </a:xfrm>
-          <a:prstGeom prst="ellipse">
-            <a:avLst/>
-          </a:prstGeom>
-          <a:solidFill>
-            <a:srgbClr val="0E3A4A"/>
-          </a:solidFill>
-          <a:ln w="12700">
-            <a:solidFill>
-              <a:srgbClr val="0E3A4A"/>
-            </a:solidFill>
-            <a:prstDash val="solid"/>
-          </a:ln>
-        </p:spPr>
-      </p:sp>
-      <p:pic>
-        <p:nvPicPr>
-          <p:cNvPr id="7" name="Image 0" descr="preencoded.png"/>
-          <p:cNvPicPr>
-            <a:picLocks noChangeAspect="1"/>
-          </p:cNvPicPr>
-          <p:nvPr/>
-        </p:nvPicPr>
-        <p:blipFill>
-          <a:blip r:embed="rId1"/>
-          <a:stretch>
-            <a:fillRect/>
-          </a:stretch>
-        </p:blipFill>
-        <p:spPr>
-          <a:xfrm>
-            <a:off x="811530" y="1634490"/>
-            <a:ext cx="251460" cy="251460"/>
-          </a:xfrm>
-          <a:prstGeom prst="rect">
-            <a:avLst/>
-          </a:prstGeom>
-        </p:spPr>
-      </p:pic>
-      <p:sp>
-        <p:nvSpPr>
-          <p:cNvPr id="8" name="Text 5"/>
-          <p:cNvSpPr txBox="1"/>
-          <p:nvPr/>
-        </p:nvSpPr>
-        <p:spPr>
-          <a:xfrm>
-            <a:off x="685800" y="2194560"/>
-            <a:ext cx="2286000" cy="365760"/>
-          </a:xfrm>
-          <a:prstGeom prst="rect">
-            <a:avLst/>
-          </a:prstGeom>
-          <a:noFill/>
-          <a:ln/>
-        </p:spPr>
-        <p:txBody>
-          <a:bodyPr wrap="square" lIns="0" tIns="0" rIns="0" bIns="0" rtlCol="0" anchor="t"/>
-          <a:lstStyle/>
-          <a:p>
-            <a:pPr marL="0" indent="0">
-              <a:buNone/>
-            </a:pPr>
-            <a:r>
-              <a:rPr lang="en-US" sz="2000" strike="sngStrike" dirty="0">
-                <a:solidFill>
-                  <a:srgbClr val="94A3B8"/>
-                </a:solidFill>
-                <a:latin typeface="Arial" pitchFamily="34" charset="0"/>
-                <a:ea typeface="Arial" pitchFamily="34" charset="-122"/>
-                <a:cs typeface="Arial" pitchFamily="34" charset="-120"/>
-              </a:rPr>
-              <a:t>2–4 hours</a:t>
-            </a:r>
-            <a:endParaRPr lang="en-US" sz="2000" dirty="0"/>
-          </a:p>
-        </p:txBody>
-      </p:sp>
-      <p:sp>
-        <p:nvSpPr>
-          <p:cNvPr id="9" name="Text 6"/>
-          <p:cNvSpPr txBox="1"/>
-          <p:nvPr/>
-        </p:nvSpPr>
-        <p:spPr>
-          <a:xfrm>
-            <a:off x="685800" y="2560320"/>
-            <a:ext cx="2377440" cy="822960"/>
-          </a:xfrm>
-          <a:prstGeom prst="rect">
-            <a:avLst/>
-          </a:prstGeom>
-          <a:noFill/>
-          <a:ln/>
-        </p:spPr>
-        <p:txBody>
-          <a:bodyPr wrap="square" lIns="0" tIns="0" rIns="0" bIns="0" rtlCol="0" anchor="t"/>
-          <a:lstStyle/>
-          <a:p>
-            <a:pPr marL="0" indent="0">
-              <a:buNone/>
-            </a:pPr>
-            <a:r>
-              <a:rPr lang="en-US" sz="4800" b="1" dirty="0">
-                <a:solidFill>
-                  <a:srgbClr val="22D3EE"/>
-                </a:solidFill>
-                <a:latin typeface="Arial" pitchFamily="34" charset="0"/>
-                <a:ea typeface="Arial" pitchFamily="34" charset="-122"/>
-                <a:cs typeface="Arial" pitchFamily="34" charset="-120"/>
-              </a:rPr>
-              <a:t>&lt; 5 sec</a:t>
-            </a:r>
-            <a:endParaRPr lang="en-US" sz="4800" dirty="0"/>
-          </a:p>
-        </p:txBody>
-      </p:sp>
-      <p:sp>
-        <p:nvSpPr>
-          <p:cNvPr id="10" name="Text 7"/>
-          <p:cNvSpPr txBox="1"/>
-          <p:nvPr/>
-        </p:nvSpPr>
-        <p:spPr>
-          <a:xfrm>
-            <a:off x="685800" y="3474720"/>
-            <a:ext cx="2286000" cy="731520"/>
-          </a:xfrm>
-          <a:prstGeom prst="rect">
-            <a:avLst/>
-          </a:prstGeom>
-          <a:noFill/>
-          <a:ln/>
-        </p:spPr>
-        <p:txBody>
-          <a:bodyPr wrap="square" lIns="0" tIns="0" rIns="0" bIns="0" rtlCol="0" anchor="t"/>
-          <a:lstStyle/>
-          <a:p>
-            <a:pPr marL="0" indent="0">
-              <a:buNone/>
-            </a:pPr>
-            <a:r>
-              <a:rPr lang="en-US" sz="1200" dirty="0">
-                <a:solidFill>
-                  <a:srgbClr val="CBD5E1"/>
-                </a:solidFill>
-                <a:latin typeface="Calibri" pitchFamily="34" charset="0"/>
-                <a:ea typeface="Calibri" pitchFamily="34" charset="-122"/>
-                <a:cs typeface="Calibri" pitchFamily="34" charset="-120"/>
-              </a:rPr>
-              <a:t>Disruption triage time, from manual spreadsheet work to automated</a:t>
-            </a:r>
-            <a:endParaRPr lang="en-US" sz="1200" dirty="0"/>
-          </a:p>
-        </p:txBody>
-      </p:sp>
-      <p:graphicFrame>
-        <p:nvGraphicFramePr>
-          <p:cNvPr id="8" name="Table 0"/>
-          <p:cNvGraphicFramePr>
-            <a:graphicFrameLocks noGrp="1"/>
-          </p:cNvGraphicFramePr>
-          <p:nvPr>
-            <p:extLst>
-              <p:ext uri="{D42A27DB-BD31-4B8C-83A1-F6EECF244321}">
-                <p14:modId xmlns:p14="http://schemas.microsoft.com/office/powerpoint/2010/main" val="1579011935"/>
-              </p:ext>
-            </p:extLst>
-          </p:nvPr>
-        </p:nvGraphicFramePr>
-        <p:xfrm>
-          <a:off x="3474720" y="1280160"/>
-          <a:ext cx="5212080" cy="914400"/>
-        </p:xfrm>
-        <a:graphic>
-          <a:graphicData uri="http://schemas.openxmlformats.org/drawingml/2006/table">
-            <a:tbl>
-              <a:tblPr/>
-              <a:tblGrid>
-                <a:gridCol w="1783080"/>
-                <a:gridCol w="1645920"/>
-                <a:gridCol w="1783080"/>
-              </a:tblGrid>
-              <a:tr h="365760">
-                <a:tc>
-                  <a:txBody>
-                    <a:bodyPr/>
-                    <a:lstStyle/>
-                    <a:p>
-                      <a:pPr marL="0" indent="0">
-                        <a:buNone/>
-                      </a:pPr>
-                      <a:r>
-                        <a:rPr lang="en-US" sz="1000" b="1" dirty="0">
-                          <a:solidFill>
-                            <a:srgbClr val="94A3B8"/>
-                          </a:solidFill>
-                          <a:latin typeface="Calibri" pitchFamily="34" charset="0"/>
-                          <a:ea typeface="Calibri" pitchFamily="34" charset="-122"/>
-                          <a:cs typeface="Calibri" pitchFamily="34" charset="-120"/>
-                        </a:rPr>
-                        <a:t>METRIC</a:t>
-                      </a:r>
-                      <a:endParaRPr lang="en-US" sz="1000" dirty="0">
-                        <a:latin typeface="Calibri" charset="0"/>
-                        <a:ea typeface="Calibri" charset="0"/>
-                        <a:cs typeface="Calibri" charset="0"/>
-                      </a:endParaRPr>
-                    </a:p>
-                  </a:txBody>
-                  <a:tcPr marL="91440" marR="91440" marT="0" marB="0" anchor="ctr">
-                    <a:lnL w="0" cap="flat" cmpd="sng" algn="ctr">
-                      <a:noFill/>
-                    </a:lnL>
-                    <a:lnR w="0" cap="flat" cmpd="sng" algn="ctr">
-                      <a:noFill/>
-                    </a:lnR>
-                    <a:lnT w="0" cap="flat" cmpd="sng" algn="ctr">
-                      <a:noFill/>
-                    </a:lnT>
-                    <a:lnB w="0" cap="flat" cmpd="sng" algn="ctr">
-                      <a:noFill/>
-                    </a:lnB>
-                    <a:solidFill>
-                      <a:srgbClr val="0B1426"/>
-                    </a:solidFill>
-                  </a:tcPr>
-                </a:tc>
-                <a:tc>
-                  <a:txBody>
-                    <a:bodyPr/>
-                    <a:lstStyle/>
-                    <a:p>
-                      <a:pPr marL="0" indent="0">
-                        <a:buNone/>
-                      </a:pPr>
-                      <a:r>
-                        <a:rPr lang="en-US" sz="1000" b="1" dirty="0">
-                          <a:solidFill>
-                            <a:srgbClr val="94A3B8"/>
-                          </a:solidFill>
-                          <a:latin typeface="Calibri" pitchFamily="34" charset="0"/>
-                          <a:ea typeface="Calibri" pitchFamily="34" charset="-122"/>
-                          <a:cs typeface="Calibri" pitchFamily="34" charset="-120"/>
-                        </a:rPr>
-                        <a:t>BEFORE</a:t>
-                      </a:r>
-                      <a:endParaRPr lang="en-US" sz="1000" dirty="0">
-                        <a:latin typeface="Calibri" charset="0"/>
-                        <a:ea typeface="Calibri" charset="0"/>
-                        <a:cs typeface="Calibri" charset="0"/>
-                      </a:endParaRPr>
-                    </a:p>
-                  </a:txBody>
-                  <a:tcPr marL="91440" marR="91440" marT="0" marB="0" anchor="ctr">
-                    <a:lnL w="0" cap="flat" cmpd="sng" algn="ctr">
-                      <a:noFill/>
-                    </a:lnL>
-                    <a:lnR w="0" cap="flat" cmpd="sng" algn="ctr">
-                      <a:noFill/>
-                    </a:lnR>
-                    <a:lnT w="0" cap="flat" cmpd="sng" algn="ctr">
-                      <a:noFill/>
-                    </a:lnT>
-                    <a:lnB w="0" cap="flat" cmpd="sng" algn="ctr">
-                      <a:noFill/>
-                    </a:lnB>
-                    <a:solidFill>
-                      <a:srgbClr val="0B1426"/>
-                    </a:solidFill>
-                  </a:tcPr>
-                </a:tc>
-                <a:tc>
-                  <a:txBody>
-                    <a:bodyPr/>
-                    <a:lstStyle/>
-                    <a:p>
-                      <a:pPr marL="0" indent="0">
-                        <a:buNone/>
-                      </a:pPr>
-                      <a:r>
-                        <a:rPr lang="en-US" sz="1000" b="1" dirty="0">
-                          <a:solidFill>
-                            <a:srgbClr val="94A3B8"/>
-                          </a:solidFill>
-                          <a:latin typeface="Calibri" pitchFamily="34" charset="0"/>
-                          <a:ea typeface="Calibri" pitchFamily="34" charset="-122"/>
-                          <a:cs typeface="Calibri" pitchFamily="34" charset="-120"/>
-                        </a:rPr>
-                        <a:t>AFTER</a:t>
-                      </a:r>
-                      <a:endParaRPr lang="en-US" sz="1000" dirty="0">
-                        <a:latin typeface="Calibri" charset="0"/>
-                        <a:ea typeface="Calibri" charset="0"/>
-                        <a:cs typeface="Calibri" charset="0"/>
-                      </a:endParaRPr>
-                    </a:p>
-                  </a:txBody>
-                  <a:tcPr marL="91440" marR="91440" marT="0" marB="0" anchor="ctr">
-                    <a:lnL w="0" cap="flat" cmpd="sng" algn="ctr">
-                      <a:noFill/>
-                    </a:lnL>
-                    <a:lnR w="0" cap="flat" cmpd="sng" algn="ctr">
-                      <a:noFill/>
-                    </a:lnR>
-                    <a:lnT w="0" cap="flat" cmpd="sng" algn="ctr">
-                      <a:noFill/>
-                    </a:lnT>
-                    <a:lnB w="0" cap="flat" cmpd="sng" algn="ctr">
-                      <a:noFill/>
-                    </a:lnB>
-                    <a:solidFill>
-                      <a:srgbClr val="0B1426"/>
-                    </a:solidFill>
-                  </a:tcPr>
-                </a:tc>
-              </a:tr>
-              <a:tr h="566928">
-                <a:tc>
-                  <a:txBody>
-                    <a:bodyPr/>
-                    <a:lstStyle/>
-                    <a:p>
-                      <a:pPr marL="0" indent="0">
-                        <a:buNone/>
-                      </a:pPr>
-                      <a:r>
-                        <a:rPr lang="en-US" sz="1200" b="1" dirty="0">
-                          <a:solidFill>
-                            <a:srgbClr val="F1F5F9"/>
-                          </a:solidFill>
-                          <a:latin typeface="Calibri" pitchFamily="34" charset="0"/>
-                          <a:ea typeface="Calibri" pitchFamily="34" charset="-122"/>
-                          <a:cs typeface="Calibri" pitchFamily="34" charset="-120"/>
-                        </a:rPr>
-                        <a:t>Excursion detection</a:t>
-                      </a:r>
-                      <a:endParaRPr lang="en-US" sz="1200" dirty="0">
-                        <a:latin typeface="Calibri" charset="0"/>
-                        <a:ea typeface="Calibri" charset="0"/>
-                        <a:cs typeface="Calibri" charset="0"/>
-                      </a:endParaRPr>
-                    </a:p>
-                  </a:txBody>
-                  <a:tcPr marL="91440" marR="91440" marT="0" marB="0" anchor="ctr">
-                    <a:lnL w="0" cap="flat" cmpd="sng" algn="ctr">
-                      <a:noFill/>
-                    </a:lnL>
-                    <a:lnR w="0" cap="flat" cmpd="sng" algn="ctr">
-                      <a:noFill/>
-                    </a:lnR>
-                    <a:lnT w="0" cap="flat" cmpd="sng" algn="ctr">
-                      <a:noFill/>
-                    </a:lnT>
-                    <a:lnB w="0" cap="flat" cmpd="sng" algn="ctr">
-                      <a:noFill/>
-                    </a:lnB>
-                    <a:solidFill>
-                      <a:srgbClr val="14213D"/>
-                    </a:solidFill>
-                  </a:tcPr>
-                </a:tc>
-                <a:tc>
-                  <a:txBody>
-                    <a:bodyPr/>
-                    <a:lstStyle/>
-                    <a:p>
-                      <a:pPr marL="0" indent="0">
-                        <a:buNone/>
-                      </a:pPr>
-                      <a:r>
-                        <a:rPr lang="en-US" sz="1200" dirty="0">
-                          <a:solidFill>
-                            <a:srgbClr val="94A3B8"/>
-                          </a:solidFill>
-                          <a:latin typeface="Calibri" pitchFamily="34" charset="0"/>
-                          <a:ea typeface="Calibri" pitchFamily="34" charset="-122"/>
-                          <a:cs typeface="Calibri" pitchFamily="34" charset="-120"/>
-                        </a:rPr>
-                        <a:t>At delivery (too late)</a:t>
-                      </a:r>
-                      <a:endParaRPr lang="en-US" sz="1200" dirty="0">
-                        <a:latin typeface="Calibri" charset="0"/>
-                        <a:ea typeface="Calibri" charset="0"/>
-                        <a:cs typeface="Calibri" charset="0"/>
-                      </a:endParaRPr>
-                    </a:p>
-                  </a:txBody>
-                  <a:tcPr marL="91440" marR="91440" marT="0" marB="0" anchor="ctr">
-                    <a:lnL w="0" cap="flat" cmpd="sng" algn="ctr">
-                      <a:noFill/>
-                    </a:lnL>
-                    <a:lnR w="0" cap="flat" cmpd="sng" algn="ctr">
-                      <a:noFill/>
-                    </a:lnR>
-                    <a:lnT w="0" cap="flat" cmpd="sng" algn="ctr">
-                      <a:noFill/>
-                    </a:lnT>
-                    <a:lnB w="0" cap="flat" cmpd="sng" algn="ctr">
-                      <a:noFill/>
-                    </a:lnB>
-                    <a:solidFill>
-                      <a:srgbClr val="14213D"/>
-                    </a:solidFill>
-                  </a:tcPr>
-                </a:tc>
-                <a:tc>
-                  <a:txBody>
-                    <a:bodyPr/>
-                    <a:lstStyle/>
-                    <a:p>
-                      <a:pPr marL="0" indent="0">
-                        <a:buNone/>
-                      </a:pPr>
-                      <a:r>
-                        <a:rPr lang="en-US" sz="1200" b="1" dirty="0">
-                          <a:solidFill>
-                            <a:srgbClr val="22D3EE"/>
-                          </a:solidFill>
-                          <a:latin typeface="Calibri" pitchFamily="34" charset="0"/>
-                          <a:ea typeface="Calibri" pitchFamily="34" charset="-122"/>
-                          <a:cs typeface="Calibri" pitchFamily="34" charset="-120"/>
-                        </a:rPr>
-                        <a:t>Real-time, pre-delivery</a:t>
-                      </a:r>
-                      <a:endParaRPr lang="en-US" sz="1200" dirty="0">
-                        <a:latin typeface="Calibri" charset="0"/>
-                        <a:ea typeface="Calibri" charset="0"/>
-                        <a:cs typeface="Calibri" charset="0"/>
-                      </a:endParaRPr>
-                    </a:p>
-                  </a:txBody>
-                  <a:tcPr marL="91440" marR="91440" marT="0" marB="0" anchor="ctr">
-                    <a:lnL w="0" cap="flat" cmpd="sng" algn="ctr">
-                      <a:noFill/>
-                    </a:lnL>
-                    <a:lnR w="0" cap="flat" cmpd="sng" algn="ctr">
-                      <a:noFill/>
-                    </a:lnR>
-                    <a:lnT w="0" cap="flat" cmpd="sng" algn="ctr">
-                      <a:noFill/>
-                    </a:lnT>
-                    <a:lnB w="0" cap="flat" cmpd="sng" algn="ctr">
-                      <a:noFill/>
-                    </a:lnB>
-                    <a:solidFill>
-                      <a:srgbClr val="14213D"/>
-                    </a:solidFill>
-                  </a:tcPr>
-                </a:tc>
-              </a:tr>
-              <a:tr h="566928">
-                <a:tc>
-                  <a:txBody>
-                    <a:bodyPr/>
-                    <a:lstStyle/>
-                    <a:p>
-                      <a:pPr marL="0" indent="0">
-                        <a:buNone/>
-                      </a:pPr>
-                      <a:r>
-                        <a:rPr lang="en-US" sz="1200" b="1" dirty="0">
-                          <a:solidFill>
-                            <a:srgbClr val="F1F5F9"/>
-                          </a:solidFill>
-                          <a:latin typeface="Calibri" pitchFamily="34" charset="0"/>
-                          <a:ea typeface="Calibri" pitchFamily="34" charset="-122"/>
-                          <a:cs typeface="Calibri" pitchFamily="34" charset="-120"/>
-                        </a:rPr>
-                        <a:t>GDP severity classification</a:t>
-                      </a:r>
-                      <a:endParaRPr lang="en-US" sz="1200" dirty="0">
-                        <a:latin typeface="Calibri" charset="0"/>
-                        <a:ea typeface="Calibri" charset="0"/>
-                        <a:cs typeface="Calibri" charset="0"/>
-                      </a:endParaRPr>
-                    </a:p>
-                  </a:txBody>
-                  <a:tcPr marL="91440" marR="91440" marT="0" marB="0" anchor="ctr">
-                    <a:lnL w="0" cap="flat" cmpd="sng" algn="ctr">
-                      <a:noFill/>
-                    </a:lnL>
-                    <a:lnR w="0" cap="flat" cmpd="sng" algn="ctr">
-                      <a:noFill/>
-                    </a:lnR>
-                    <a:lnT w="0" cap="flat" cmpd="sng" algn="ctr">
-                      <a:noFill/>
-                    </a:lnT>
-                    <a:lnB w="0" cap="flat" cmpd="sng" algn="ctr">
-                      <a:noFill/>
-                    </a:lnB>
-                    <a:solidFill>
-                      <a:srgbClr val="0B1426"/>
-                    </a:solidFill>
-                  </a:tcPr>
-                </a:tc>
-                <a:tc>
-                  <a:txBody>
-                    <a:bodyPr/>
-                    <a:lstStyle/>
-                    <a:p>
-                      <a:pPr marL="0" indent="0">
-                        <a:buNone/>
-                      </a:pPr>
-                      <a:r>
-                        <a:rPr lang="en-US" sz="1200" dirty="0">
-                          <a:solidFill>
-                            <a:srgbClr val="94A3B8"/>
-                          </a:solidFill>
-                          <a:latin typeface="Calibri" pitchFamily="34" charset="0"/>
-                          <a:ea typeface="Calibri" pitchFamily="34" charset="-122"/>
-                          <a:cs typeface="Calibri" pitchFamily="34" charset="-120"/>
-                        </a:rPr>
-                        <a:t>4–8 hrs quality manager</a:t>
-                      </a:r>
-                      <a:endParaRPr lang="en-US" sz="1200" dirty="0">
-                        <a:latin typeface="Calibri" charset="0"/>
-                        <a:ea typeface="Calibri" charset="0"/>
-                        <a:cs typeface="Calibri" charset="0"/>
-                      </a:endParaRPr>
-                    </a:p>
-                  </a:txBody>
-                  <a:tcPr marL="91440" marR="91440" marT="0" marB="0" anchor="ctr">
-                    <a:lnL w="0" cap="flat" cmpd="sng" algn="ctr">
-                      <a:noFill/>
-                    </a:lnL>
-                    <a:lnR w="0" cap="flat" cmpd="sng" algn="ctr">
-                      <a:noFill/>
-                    </a:lnR>
-                    <a:lnT w="0" cap="flat" cmpd="sng" algn="ctr">
-                      <a:noFill/>
-                    </a:lnT>
-                    <a:lnB w="0" cap="flat" cmpd="sng" algn="ctr">
-                      <a:noFill/>
-                    </a:lnB>
-                    <a:solidFill>
-                      <a:srgbClr val="0B1426"/>
-                    </a:solidFill>
-                  </a:tcPr>
-                </a:tc>
-                <a:tc>
-                  <a:txBody>
-                    <a:bodyPr/>
-                    <a:lstStyle/>
-                    <a:p>
-                      <a:pPr marL="0" indent="0">
-                        <a:buNone/>
-                      </a:pPr>
-                      <a:r>
-                        <a:rPr lang="en-US" sz="1200" b="1" dirty="0">
-                          <a:solidFill>
-                            <a:srgbClr val="22D3EE"/>
-                          </a:solidFill>
-                          <a:latin typeface="Calibri" pitchFamily="34" charset="0"/>
-                          <a:ea typeface="Calibri" pitchFamily="34" charset="-122"/>
-                          <a:cs typeface="Calibri" pitchFamily="34" charset="-120"/>
-                        </a:rPr>
-                        <a:t>Instant, watsonx.ai-grounded</a:t>
-                      </a:r>
-                      <a:endParaRPr lang="en-US" sz="1200" dirty="0">
-                        <a:latin typeface="Calibri" charset="0"/>
-                        <a:ea typeface="Calibri" charset="0"/>
-                        <a:cs typeface="Calibri" charset="0"/>
-                      </a:endParaRPr>
-                    </a:p>
-                  </a:txBody>
-                  <a:tcPr marL="91440" marR="91440" marT="0" marB="0" anchor="ctr">
-                    <a:lnL w="0" cap="flat" cmpd="sng" algn="ctr">
-                      <a:noFill/>
-                    </a:lnL>
-                    <a:lnR w="0" cap="flat" cmpd="sng" algn="ctr">
-                      <a:noFill/>
-                    </a:lnR>
-                    <a:lnT w="0" cap="flat" cmpd="sng" algn="ctr">
-                      <a:noFill/>
-                    </a:lnT>
-                    <a:lnB w="0" cap="flat" cmpd="sng" algn="ctr">
-                      <a:noFill/>
-                    </a:lnB>
-                    <a:solidFill>
-                      <a:srgbClr val="0B1426"/>
-                    </a:solidFill>
-                  </a:tcPr>
-                </a:tc>
-              </a:tr>
-              <a:tr h="566928">
-                <a:tc>
-                  <a:txBody>
-                    <a:bodyPr/>
-                    <a:lstStyle/>
-                    <a:p>
-                      <a:pPr marL="0" indent="0">
-                        <a:buNone/>
-                      </a:pPr>
-                      <a:r>
-                        <a:rPr lang="en-US" sz="1200" b="1" dirty="0">
-                          <a:solidFill>
-                            <a:srgbClr val="F1F5F9"/>
-                          </a:solidFill>
-                          <a:latin typeface="Calibri" pitchFamily="34" charset="0"/>
-                          <a:ea typeface="Calibri" pitchFamily="34" charset="-122"/>
-                          <a:cs typeface="Calibri" pitchFamily="34" charset="-120"/>
-                        </a:rPr>
-                        <a:t>Fleet redeployment</a:t>
-                      </a:r>
-                      <a:endParaRPr lang="en-US" sz="1200" dirty="0">
-                        <a:latin typeface="Calibri" charset="0"/>
-                        <a:ea typeface="Calibri" charset="0"/>
-                        <a:cs typeface="Calibri" charset="0"/>
-                      </a:endParaRPr>
-                    </a:p>
-                  </a:txBody>
-                  <a:tcPr marL="91440" marR="91440" marT="0" marB="0" anchor="ctr">
-                    <a:lnL w="0" cap="flat" cmpd="sng" algn="ctr">
-                      <a:noFill/>
-                    </a:lnL>
-                    <a:lnR w="0" cap="flat" cmpd="sng" algn="ctr">
-                      <a:noFill/>
-                    </a:lnR>
-                    <a:lnT w="0" cap="flat" cmpd="sng" algn="ctr">
-                      <a:noFill/>
-                    </a:lnT>
-                    <a:lnB w="0" cap="flat" cmpd="sng" algn="ctr">
-                      <a:noFill/>
-                    </a:lnB>
-                    <a:solidFill>
-                      <a:srgbClr val="14213D"/>
-                    </a:solidFill>
-                  </a:tcPr>
-                </a:tc>
-                <a:tc>
-                  <a:txBody>
-                    <a:bodyPr/>
-                    <a:lstStyle/>
-                    <a:p>
-                      <a:pPr marL="0" indent="0">
-                        <a:buNone/>
-                      </a:pPr>
-                      <a:r>
-                        <a:rPr lang="en-US" sz="1200" dirty="0">
-                          <a:solidFill>
-                            <a:srgbClr val="94A3B8"/>
-                          </a:solidFill>
-                          <a:latin typeface="Calibri" pitchFamily="34" charset="0"/>
-                          <a:ea typeface="Calibri" pitchFamily="34" charset="-122"/>
-                          <a:cs typeface="Calibri" pitchFamily="34" charset="-120"/>
-                        </a:rPr>
-                        <a:t>Email &amp; phone calls</a:t>
-                      </a:r>
-                      <a:endParaRPr lang="en-US" sz="1200" dirty="0">
-                        <a:latin typeface="Calibri" charset="0"/>
-                        <a:ea typeface="Calibri" charset="0"/>
-                        <a:cs typeface="Calibri" charset="0"/>
-                      </a:endParaRPr>
-                    </a:p>
-                  </a:txBody>
-                  <a:tcPr marL="91440" marR="91440" marT="0" marB="0" anchor="ctr">
-                    <a:lnL w="0" cap="flat" cmpd="sng" algn="ctr">
-                      <a:noFill/>
-                    </a:lnL>
-                    <a:lnR w="0" cap="flat" cmpd="sng" algn="ctr">
-                      <a:noFill/>
-                    </a:lnR>
-                    <a:lnT w="0" cap="flat" cmpd="sng" algn="ctr">
-                      <a:noFill/>
-                    </a:lnT>
-                    <a:lnB w="0" cap="flat" cmpd="sng" algn="ctr">
-                      <a:noFill/>
-                    </a:lnB>
-                    <a:solidFill>
-                      <a:srgbClr val="14213D"/>
-                    </a:solidFill>
-                  </a:tcPr>
-                </a:tc>
-                <a:tc>
-                  <a:txBody>
-                    <a:bodyPr/>
-                    <a:lstStyle/>
-                    <a:p>
-                      <a:pPr marL="0" indent="0">
-                        <a:buNone/>
-                      </a:pPr>
-                      <a:r>
-                        <a:rPr lang="en-US" sz="1200" b="1" dirty="0">
-                          <a:solidFill>
-                            <a:srgbClr val="22D3EE"/>
-                          </a:solidFill>
-                          <a:latin typeface="Calibri" pitchFamily="34" charset="0"/>
-                          <a:ea typeface="Calibri" pitchFamily="34" charset="-122"/>
-                          <a:cs typeface="Calibri" pitchFamily="34" charset="-120"/>
-                        </a:rPr>
-                        <a:t>One-click approval</a:t>
-                      </a:r>
-                      <a:endParaRPr lang="en-US" sz="1200" dirty="0">
-                        <a:latin typeface="Calibri" charset="0"/>
-                        <a:ea typeface="Calibri" charset="0"/>
-                        <a:cs typeface="Calibri" charset="0"/>
-                      </a:endParaRPr>
-                    </a:p>
-                  </a:txBody>
-                  <a:tcPr marL="91440" marR="91440" marT="0" marB="0" anchor="ctr">
-                    <a:lnL w="0" cap="flat" cmpd="sng" algn="ctr">
-                      <a:noFill/>
-                    </a:lnL>
-                    <a:lnR w="0" cap="flat" cmpd="sng" algn="ctr">
-                      <a:noFill/>
-                    </a:lnR>
-                    <a:lnT w="0" cap="flat" cmpd="sng" algn="ctr">
-                      <a:noFill/>
-                    </a:lnT>
-                    <a:lnB w="0" cap="flat" cmpd="sng" algn="ctr">
-                      <a:noFill/>
-                    </a:lnB>
-                    <a:solidFill>
-                      <a:srgbClr val="14213D"/>
-                    </a:solidFill>
-                  </a:tcPr>
-                </a:tc>
-              </a:tr>
-              <a:tr h="566928">
-                <a:tc>
-                  <a:txBody>
-                    <a:bodyPr/>
-                    <a:lstStyle/>
-                    <a:p>
-                      <a:pPr marL="0" indent="0">
-                        <a:buNone/>
-                      </a:pPr>
-                      <a:r>
-                        <a:rPr lang="en-US" sz="1200" b="1" dirty="0">
-                          <a:solidFill>
-                            <a:srgbClr val="F1F5F9"/>
-                          </a:solidFill>
-                          <a:latin typeface="Calibri" pitchFamily="34" charset="0"/>
-                          <a:ea typeface="Calibri" pitchFamily="34" charset="-122"/>
-                          <a:cs typeface="Calibri" pitchFamily="34" charset="-120"/>
-                        </a:rPr>
-                        <a:t>Audit trail</a:t>
-                      </a:r>
-                      <a:endParaRPr lang="en-US" sz="1200" dirty="0">
-                        <a:latin typeface="Calibri" charset="0"/>
-                        <a:ea typeface="Calibri" charset="0"/>
-                        <a:cs typeface="Calibri" charset="0"/>
-                      </a:endParaRPr>
-                    </a:p>
-                  </a:txBody>
-                  <a:tcPr marL="91440" marR="91440" marT="0" marB="0" anchor="ctr">
-                    <a:lnL w="0" cap="flat" cmpd="sng" algn="ctr">
-                      <a:noFill/>
-                    </a:lnL>
-                    <a:lnR w="0" cap="flat" cmpd="sng" algn="ctr">
-                      <a:noFill/>
-                    </a:lnR>
-                    <a:lnT w="0" cap="flat" cmpd="sng" algn="ctr">
-                      <a:noFill/>
-                    </a:lnT>
-                    <a:lnB w="0" cap="flat" cmpd="sng" algn="ctr">
-                      <a:noFill/>
-                    </a:lnB>
-                    <a:solidFill>
-                      <a:srgbClr val="0B1426"/>
-                    </a:solidFill>
-                  </a:tcPr>
-                </a:tc>
-                <a:tc>
-                  <a:txBody>
-                    <a:bodyPr/>
-                    <a:lstStyle/>
-                    <a:p>
-                      <a:pPr marL="0" indent="0">
-                        <a:buNone/>
-                      </a:pPr>
-                      <a:r>
-                        <a:rPr lang="en-US" sz="1200" dirty="0">
-                          <a:solidFill>
-                            <a:srgbClr val="94A3B8"/>
-                          </a:solidFill>
-                          <a:latin typeface="Calibri" pitchFamily="34" charset="0"/>
-                          <a:ea typeface="Calibri" pitchFamily="34" charset="-122"/>
-                          <a:cs typeface="Calibri" pitchFamily="34" charset="-120"/>
-                        </a:rPr>
-                        <a:t>Spreadsheet</a:t>
-                      </a:r>
-                      <a:endParaRPr lang="en-US" sz="1200" dirty="0">
-                        <a:latin typeface="Calibri" charset="0"/>
-                        <a:ea typeface="Calibri" charset="0"/>
-                        <a:cs typeface="Calibri" charset="0"/>
-                      </a:endParaRPr>
-                    </a:p>
-                  </a:txBody>
-                  <a:tcPr marL="91440" marR="91440" marT="0" marB="0" anchor="ctr">
-                    <a:lnL w="0" cap="flat" cmpd="sng" algn="ctr">
-                      <a:noFill/>
-                    </a:lnL>
-                    <a:lnR w="0" cap="flat" cmpd="sng" algn="ctr">
-                      <a:noFill/>
-                    </a:lnR>
-                    <a:lnT w="0" cap="flat" cmpd="sng" algn="ctr">
-                      <a:noFill/>
-                    </a:lnT>
-                    <a:lnB w="0" cap="flat" cmpd="sng" algn="ctr">
-                      <a:noFill/>
-                    </a:lnB>
-                    <a:solidFill>
-                      <a:srgbClr val="0B1426"/>
-                    </a:solidFill>
-                  </a:tcPr>
-                </a:tc>
-                <a:tc>
-                  <a:txBody>
-                    <a:bodyPr/>
-                    <a:lstStyle/>
-                    <a:p>
-                      <a:pPr marL="0" indent="0">
-                        <a:buNone/>
-                      </a:pPr>
-                      <a:r>
-                        <a:rPr lang="en-US" sz="1200" b="1" dirty="0">
-                          <a:solidFill>
-                            <a:srgbClr val="22D3EE"/>
-                          </a:solidFill>
-                          <a:latin typeface="Calibri" pitchFamily="34" charset="0"/>
-                          <a:ea typeface="Calibri" pitchFamily="34" charset="-122"/>
-                          <a:cs typeface="Calibri" pitchFamily="34" charset="-120"/>
-                        </a:rPr>
-                        <a:t>Immutable, timestamped</a:t>
-                      </a:r>
-                      <a:endParaRPr lang="en-US" sz="1200" dirty="0">
-                        <a:latin typeface="Calibri" charset="0"/>
-                        <a:ea typeface="Calibri" charset="0"/>
-                        <a:cs typeface="Calibri" charset="0"/>
-                      </a:endParaRPr>
-                    </a:p>
-                  </a:txBody>
-                  <a:tcPr marL="91440" marR="91440" marT="0" marB="0" anchor="ctr">
-                    <a:lnL w="0" cap="flat" cmpd="sng" algn="ctr">
-                      <a:noFill/>
-                    </a:lnL>
-                    <a:lnR w="0" cap="flat" cmpd="sng" algn="ctr">
-                      <a:noFill/>
-                    </a:lnR>
-                    <a:lnT w="0" cap="flat" cmpd="sng" algn="ctr">
-                      <a:noFill/>
-                    </a:lnT>
-                    <a:lnB w="0" cap="flat" cmpd="sng" algn="ctr">
-                      <a:noFill/>
-                    </a:lnB>
-                    <a:solidFill>
-                      <a:srgbClr val="0B1426"/>
-                    </a:solidFill>
-                  </a:tcPr>
-                </a:tc>
-              </a:tr>
-              <a:tr h="566928">
-                <a:tc>
-                  <a:txBody>
-                    <a:bodyPr/>
-                    <a:lstStyle/>
-                    <a:p>
-                      <a:pPr marL="0" indent="0">
-                        <a:buNone/>
-                      </a:pPr>
-                      <a:r>
-                        <a:rPr lang="en-US" sz="1200" b="1" dirty="0">
-                          <a:solidFill>
-                            <a:srgbClr val="F1F5F9"/>
-                          </a:solidFill>
-                          <a:latin typeface="Calibri" pitchFamily="34" charset="0"/>
-                          <a:ea typeface="Calibri" pitchFamily="34" charset="-122"/>
-                          <a:cs typeface="Calibri" pitchFamily="34" charset="-120"/>
-                        </a:rPr>
-                        <a:t>Shipments monitored</a:t>
-                      </a:r>
-                      <a:endParaRPr lang="en-US" sz="1200" dirty="0">
-                        <a:latin typeface="Calibri" charset="0"/>
-                        <a:ea typeface="Calibri" charset="0"/>
-                        <a:cs typeface="Calibri" charset="0"/>
-                      </a:endParaRPr>
-                    </a:p>
-                  </a:txBody>
-                  <a:tcPr marL="91440" marR="91440" marT="0" marB="0" anchor="ctr">
-                    <a:lnL w="0" cap="flat" cmpd="sng" algn="ctr">
-                      <a:noFill/>
-                    </a:lnL>
-                    <a:lnR w="0" cap="flat" cmpd="sng" algn="ctr">
-                      <a:noFill/>
-                    </a:lnR>
-                    <a:lnT w="0" cap="flat" cmpd="sng" algn="ctr">
-                      <a:noFill/>
-                    </a:lnT>
-                    <a:lnB w="0" cap="flat" cmpd="sng" algn="ctr">
-                      <a:noFill/>
-                    </a:lnB>
-                    <a:solidFill>
-                      <a:srgbClr val="14213D"/>
-                    </a:solidFill>
-                  </a:tcPr>
-                </a:tc>
-                <a:tc>
-                  <a:txBody>
-                    <a:bodyPr/>
-                    <a:lstStyle/>
-                    <a:p>
-                      <a:pPr marL="0" indent="0">
-                        <a:buNone/>
-                      </a:pPr>
-                      <a:r>
-                        <a:rPr lang="en-US" sz="1200" dirty="0">
-                          <a:solidFill>
-                            <a:srgbClr val="94A3B8"/>
-                          </a:solidFill>
-                          <a:latin typeface="Calibri" pitchFamily="34" charset="0"/>
-                          <a:ea typeface="Calibri" pitchFamily="34" charset="-122"/>
-                          <a:cs typeface="Calibri" pitchFamily="34" charset="-120"/>
-                        </a:rPr>
-                        <a:t>Manual (~10)</a:t>
-                      </a:r>
-                      <a:endParaRPr lang="en-US" sz="1200" dirty="0">
-                        <a:latin typeface="Calibri" charset="0"/>
-                        <a:ea typeface="Calibri" charset="0"/>
-                        <a:cs typeface="Calibri" charset="0"/>
-                      </a:endParaRPr>
-                    </a:p>
-                  </a:txBody>
-                  <a:tcPr marL="91440" marR="91440" marT="0" marB="0" anchor="ctr">
-                    <a:lnL w="0" cap="flat" cmpd="sng" algn="ctr">
-                      <a:noFill/>
-                    </a:lnL>
-                    <a:lnR w="0" cap="flat" cmpd="sng" algn="ctr">
-                      <a:noFill/>
-                    </a:lnR>
-                    <a:lnT w="0" cap="flat" cmpd="sng" algn="ctr">
-                      <a:noFill/>
-                    </a:lnT>
-                    <a:lnB w="0" cap="flat" cmpd="sng" algn="ctr">
-                      <a:noFill/>
-                    </a:lnB>
-                    <a:solidFill>
-                      <a:srgbClr val="14213D"/>
-                    </a:solidFill>
-                  </a:tcPr>
-                </a:tc>
-                <a:tc>
-                  <a:txBody>
-                    <a:bodyPr/>
-                    <a:lstStyle/>
-                    <a:p>
-                      <a:pPr marL="0" indent="0">
-                        <a:buNone/>
-                      </a:pPr>
-                      <a:r>
-                        <a:rPr lang="en-US" sz="1200" b="1" dirty="0">
-                          <a:solidFill>
-                            <a:srgbClr val="22D3EE"/>
-                          </a:solidFill>
-                          <a:latin typeface="Calibri" pitchFamily="34" charset="0"/>
-                          <a:ea typeface="Calibri" pitchFamily="34" charset="-122"/>
-                          <a:cs typeface="Calibri" pitchFamily="34" charset="-120"/>
-                        </a:rPr>
-                        <a:t>Unlimited, continuous</a:t>
-                      </a:r>
-                      <a:endParaRPr lang="en-US" sz="1200" dirty="0">
-                        <a:latin typeface="Calibri" charset="0"/>
-                        <a:ea typeface="Calibri" charset="0"/>
-                        <a:cs typeface="Calibri" charset="0"/>
-                      </a:endParaRPr>
-                    </a:p>
-                  </a:txBody>
-                  <a:tcPr marL="91440" marR="91440" marT="0" marB="0" anchor="ctr">
-                    <a:lnL w="0" cap="flat" cmpd="sng" algn="ctr">
-                      <a:noFill/>
-                    </a:lnL>
-                    <a:lnR w="0" cap="flat" cmpd="sng" algn="ctr">
-                      <a:noFill/>
-                    </a:lnR>
-                    <a:lnT w="0" cap="flat" cmpd="sng" algn="ctr">
-                      <a:noFill/>
-                    </a:lnT>
-                    <a:lnB w="0" cap="flat" cmpd="sng" algn="ctr">
-                      <a:noFill/>
-                    </a:lnB>
-                    <a:solidFill>
-                      <a:srgbClr val="14213D"/>
-                    </a:solidFill>
-                  </a:tcPr>
-                </a:tc>
-              </a:tr>
-            </a:tbl>
-          </a:graphicData>
-        </a:graphic>
-      </p:graphicFrame>
-    </p:spTree>
-  </p:cSld>
-  <p:clrMapOvr>
-    <a:masterClrMapping/>
-  </p:clrMapOvr>
-</p:sld>
-</file>
-
-<file path=ppt/slides/slide8.xml><?xml version="1.0" encoding="utf-8"?>
-<p:sld xmlns:a="http://schemas.openxmlformats.org/drawingml/2006/main" xmlns:r="http://schemas.openxmlformats.org/officeDocument/2006/relationships" xmlns:p="http://schemas.openxmlformats.org/presentationml/2006/main">
-  <p:cSld name="Slide 8">
-    <p:bg>
-      <p:bgPr>
-        <a:solidFill>
-          <a:srgbClr val="0B1426"/>
-        </a:solidFill>
-      </p:bgPr>
-    </p:bg>
-    <p:spTree>
-      <p:nvGrpSpPr>
-        <p:cNvPr id="1" name=""/>
-        <p:cNvGrpSpPr/>
-        <p:nvPr/>
-      </p:nvGrpSpPr>
-      <p:grpSpPr>
-        <a:xfrm>
-          <a:off x="0" y="0"/>
-          <a:ext cx="0" cy="0"/>
-          <a:chOff x="0" y="0"/>
-          <a:chExt cx="0" cy="0"/>
-        </a:xfrm>
-      </p:grpSpPr>
-      <p:sp>
-        <p:nvSpPr>
-          <p:cNvPr id="2" name="Text 0"/>
-          <p:cNvSpPr txBox="1"/>
-          <p:nvPr/>
-        </p:nvSpPr>
-        <p:spPr>
-          <a:xfrm>
-            <a:off x="457200" y="320040"/>
-            <a:ext cx="8229600" cy="228600"/>
-          </a:xfrm>
-          <a:prstGeom prst="rect">
-            <a:avLst/>
-          </a:prstGeom>
-          <a:noFill/>
-          <a:ln/>
-        </p:spPr>
-        <p:txBody>
-          <a:bodyPr wrap="square" lIns="0" tIns="0" rIns="0" bIns="0" rtlCol="0" anchor="t"/>
-          <a:lstStyle/>
-          <a:p>
-            <a:pPr marL="0" indent="0">
-              <a:buNone/>
-            </a:pPr>
-            <a:r>
-              <a:rPr lang="en-US" sz="1100" b="1" kern="0" spc="200" dirty="0">
-                <a:solidFill>
-                  <a:srgbClr val="22D3EE"/>
-                </a:solidFill>
-                <a:latin typeface="Calibri" pitchFamily="34" charset="0"/>
-                <a:ea typeface="Calibri" pitchFamily="34" charset="-122"/>
-                <a:cs typeface="Calibri" pitchFamily="34" charset="-120"/>
-              </a:rPr>
-              <a:t>08  ·  TEAM &amp; WHAT'S NEXT</a:t>
-            </a:r>
-            <a:endParaRPr lang="en-US" sz="1100" dirty="0"/>
-          </a:p>
-        </p:txBody>
-      </p:sp>
-      <p:sp>
-        <p:nvSpPr>
-          <p:cNvPr id="3" name="Text 1"/>
-          <p:cNvSpPr txBox="1"/>
-          <p:nvPr/>
-        </p:nvSpPr>
-        <p:spPr>
-          <a:xfrm>
-            <a:off x="457200" y="566928"/>
-            <a:ext cx="8229600" cy="548640"/>
-          </a:xfrm>
-          <a:prstGeom prst="rect">
-            <a:avLst/>
-          </a:prstGeom>
-          <a:noFill/>
-          <a:ln/>
-        </p:spPr>
-        <p:txBody>
-          <a:bodyPr wrap="square" lIns="0" tIns="0" rIns="0" bIns="0" rtlCol="0" anchor="t"/>
-          <a:lstStyle/>
-          <a:p>
-            <a:pPr marL="0" indent="0">
-              <a:buNone/>
-            </a:pPr>
-            <a:r>
-              <a:rPr lang="en-US" sz="2800" b="1" dirty="0">
-                <a:solidFill>
-                  <a:srgbClr val="F1F5F9"/>
-                </a:solidFill>
-                <a:latin typeface="Arial" pitchFamily="34" charset="0"/>
-                <a:ea typeface="Arial" pitchFamily="34" charset="-122"/>
-                <a:cs typeface="Arial" pitchFamily="34" charset="-120"/>
-              </a:rPr>
-              <a:t>Team Error Fellows</a:t>
-            </a:r>
-            <a:endParaRPr lang="en-US" sz="2800" dirty="0"/>
-          </a:p>
-        </p:txBody>
-      </p:sp>
-      <p:sp>
-        <p:nvSpPr>
-          <p:cNvPr id="4" name="Shape 2"/>
-          <p:cNvSpPr/>
-          <p:nvPr/>
-        </p:nvSpPr>
-        <p:spPr>
-          <a:xfrm>
-            <a:off x="457200" y="1280160"/>
-            <a:ext cx="3931920" cy="3063240"/>
-          </a:xfrm>
-          <a:prstGeom prst="roundRect">
-            <a:avLst>
-              <a:gd name="adj" fmla="val 2388"/>
-            </a:avLst>
-          </a:prstGeom>
-          <a:solidFill>
-            <a:srgbClr val="14213D"/>
-          </a:solidFill>
-          <a:ln w="12700">
-            <a:solidFill>
-              <a:srgbClr val="14213D"/>
-            </a:solidFill>
-            <a:prstDash val="solid"/>
-          </a:ln>
-        </p:spPr>
-      </p:sp>
-      <p:sp>
-        <p:nvSpPr>
-          <p:cNvPr id="5" name="Text 3"/>
-          <p:cNvSpPr txBox="1"/>
-          <p:nvPr/>
-        </p:nvSpPr>
-        <p:spPr>
-          <a:xfrm>
-            <a:off x="731520" y="1481328"/>
-            <a:ext cx="3474720" cy="228600"/>
-          </a:xfrm>
-          <a:prstGeom prst="rect">
-            <a:avLst/>
-          </a:prstGeom>
-          <a:noFill/>
-          <a:ln/>
-        </p:spPr>
-        <p:txBody>
-          <a:bodyPr wrap="square" lIns="0" tIns="0" rIns="0" bIns="0" rtlCol="0" anchor="t"/>
-          <a:lstStyle/>
-          <a:p>
-            <a:pPr marL="0" indent="0">
-              <a:buNone/>
-            </a:pPr>
-            <a:r>
-              <a:rPr lang="en-US" sz="1100" b="1" kern="0" spc="200" dirty="0">
-                <a:solidFill>
-                  <a:srgbClr val="22D3EE"/>
-                </a:solidFill>
-                <a:latin typeface="Calibri" pitchFamily="34" charset="0"/>
-                <a:ea typeface="Calibri" pitchFamily="34" charset="-122"/>
-                <a:cs typeface="Calibri" pitchFamily="34" charset="-120"/>
-              </a:rPr>
-              <a:t>WHAT WE'RE MOST PROUD OF</a:t>
-            </a:r>
-            <a:endParaRPr lang="en-US" sz="1100" dirty="0"/>
-          </a:p>
-        </p:txBody>
-      </p:sp>
-      <p:sp>
-        <p:nvSpPr>
-          <p:cNvPr id="6" name="Text 4"/>
-          <p:cNvSpPr txBox="1"/>
-          <p:nvPr/>
-        </p:nvSpPr>
-        <p:spPr>
-          <a:xfrm>
-            <a:off x="731520" y="1828800"/>
-            <a:ext cx="3429000" cy="1097280"/>
-          </a:xfrm>
-          <a:prstGeom prst="rect">
-            <a:avLst/>
-          </a:prstGeom>
-          <a:noFill/>
-          <a:ln/>
-        </p:spPr>
-        <p:txBody>
-          <a:bodyPr wrap="square" lIns="0" tIns="0" rIns="0" bIns="0" rtlCol="0" anchor="t"/>
-          <a:lstStyle/>
-          <a:p>
-            <a:pPr marL="0" indent="0">
-              <a:buNone/>
-            </a:pPr>
-            <a:r>
-              <a:rPr lang="en-US" sz="2000" b="1" dirty="0">
-                <a:solidFill>
-                  <a:srgbClr val="F1F5F9"/>
-                </a:solidFill>
-                <a:latin typeface="Arial" pitchFamily="34" charset="0"/>
-                <a:ea typeface="Arial" pitchFamily="34" charset="-122"/>
-                <a:cs typeface="Arial" pitchFamily="34" charset="-120"/>
-              </a:rPr>
-              <a:t>Every number an operator sees comes from a testable engine, not an LLM.</a:t>
-            </a:r>
-            <a:endParaRPr lang="en-US" sz="2000" dirty="0"/>
-          </a:p>
-        </p:txBody>
-      </p:sp>
-      <p:sp>
-        <p:nvSpPr>
-          <p:cNvPr id="7" name="Text 5"/>
-          <p:cNvSpPr txBox="1"/>
-          <p:nvPr/>
-        </p:nvSpPr>
-        <p:spPr>
-          <a:xfrm>
-            <a:off x="731520" y="3017520"/>
-            <a:ext cx="3429000" cy="1188720"/>
-          </a:xfrm>
-          <a:prstGeom prst="rect">
-            <a:avLst/>
-          </a:prstGeom>
-          <a:noFill/>
-          <a:ln/>
-        </p:spPr>
-        <p:txBody>
-          <a:bodyPr wrap="square" lIns="0" tIns="0" rIns="0" bIns="0" rtlCol="0" anchor="t"/>
-          <a:lstStyle/>
-          <a:p>
-            <a:pPr marL="0" indent="0">
-              <a:buNone/>
-            </a:pPr>
-            <a:r>
-              <a:rPr lang="en-US" sz="1200" dirty="0">
-                <a:solidFill>
-                  <a:srgbClr val="CBD5E1"/>
-                </a:solidFill>
-                <a:latin typeface="Calibri" pitchFamily="34" charset="0"/>
-                <a:ea typeface="Calibri" pitchFamily="34" charset="-122"/>
-                <a:cs typeface="Calibri" pitchFamily="34" charset="-120"/>
-              </a:rPr>
-              <a:t>Strict separation of deterministic computation from generative AI. watsonx.ai explains and orchestrates; it never invents operational facts. This is the production-grade pattern.</a:t>
-            </a:r>
-            <a:endParaRPr lang="en-US" sz="1200" dirty="0"/>
-          </a:p>
-        </p:txBody>
-      </p:sp>
-      <p:sp>
-        <p:nvSpPr>
-          <p:cNvPr id="8" name="Text 6"/>
-          <p:cNvSpPr txBox="1"/>
-          <p:nvPr/>
-        </p:nvSpPr>
-        <p:spPr>
-          <a:xfrm>
-            <a:off x="4754880" y="1280160"/>
-            <a:ext cx="3931920" cy="228600"/>
-          </a:xfrm>
-          <a:prstGeom prst="rect">
-            <a:avLst/>
-          </a:prstGeom>
-          <a:noFill/>
-          <a:ln/>
-        </p:spPr>
-        <p:txBody>
-          <a:bodyPr wrap="square" lIns="0" tIns="0" rIns="0" bIns="0" rtlCol="0" anchor="t"/>
-          <a:lstStyle/>
-          <a:p>
-            <a:pPr marL="0" indent="0">
-              <a:buNone/>
-            </a:pPr>
-            <a:r>
-              <a:rPr lang="en-US" sz="1100" b="1" kern="0" spc="200" dirty="0">
-                <a:solidFill>
-                  <a:srgbClr val="22D3EE"/>
-                </a:solidFill>
-                <a:latin typeface="Calibri" pitchFamily="34" charset="0"/>
-                <a:ea typeface="Calibri" pitchFamily="34" charset="-122"/>
-                <a:cs typeface="Calibri" pitchFamily="34" charset="-120"/>
-              </a:rPr>
-              <a:t>WHAT THIS COULD BECOME</a:t>
-            </a:r>
-            <a:endParaRPr lang="en-US" sz="1100" dirty="0"/>
-          </a:p>
-        </p:txBody>
-      </p:sp>
-      <p:sp>
-        <p:nvSpPr>
-          <p:cNvPr id="9" name="Shape 7"/>
-          <p:cNvSpPr/>
-          <p:nvPr/>
-        </p:nvSpPr>
-        <p:spPr>
-          <a:xfrm>
-            <a:off x="4754880" y="1645920"/>
-            <a:ext cx="457200" cy="457200"/>
-          </a:xfrm>
-          <a:prstGeom prst="ellipse">
-            <a:avLst/>
-          </a:prstGeom>
-          <a:solidFill>
-            <a:srgbClr val="0E3A4A"/>
-          </a:solidFill>
-          <a:ln w="12700">
-            <a:solidFill>
-              <a:srgbClr val="0E3A4A"/>
-            </a:solidFill>
-            <a:prstDash val="solid"/>
-          </a:ln>
-        </p:spPr>
-      </p:sp>
-      <p:pic>
-        <p:nvPicPr>
-          <p:cNvPr id="10" name="Image 0" descr="preencoded.png"/>
-          <p:cNvPicPr>
-            <a:picLocks noChangeAspect="1"/>
-          </p:cNvPicPr>
-          <p:nvPr/>
-        </p:nvPicPr>
-        <p:blipFill>
-          <a:blip r:embed="rId1"/>
-          <a:stretch>
-            <a:fillRect/>
-          </a:stretch>
-        </p:blipFill>
-        <p:spPr>
-          <a:xfrm>
-            <a:off x="4869180" y="1760220"/>
-            <a:ext cx="228600" cy="228600"/>
-          </a:xfrm>
-          <a:prstGeom prst="rect">
-            <a:avLst/>
-          </a:prstGeom>
-        </p:spPr>
-      </p:pic>
-      <p:sp>
-        <p:nvSpPr>
-          <p:cNvPr id="11" name="Text 8"/>
-          <p:cNvSpPr txBox="1"/>
-          <p:nvPr/>
-        </p:nvSpPr>
-        <p:spPr>
-          <a:xfrm>
-            <a:off x="5394960" y="1627632"/>
-            <a:ext cx="3291840" cy="256032"/>
-          </a:xfrm>
-          <a:prstGeom prst="rect">
-            <a:avLst/>
-          </a:prstGeom>
-          <a:noFill/>
-          <a:ln/>
-        </p:spPr>
-        <p:txBody>
-          <a:bodyPr wrap="square" lIns="0" tIns="0" rIns="0" bIns="0" rtlCol="0" anchor="t"/>
-          <a:lstStyle/>
-          <a:p>
-            <a:pPr marL="0" indent="0">
-              <a:buNone/>
-            </a:pPr>
-            <a:r>
-              <a:rPr lang="en-US" sz="1350" b="1" dirty="0">
-                <a:solidFill>
-                  <a:srgbClr val="F1F5F9"/>
-                </a:solidFill>
-                <a:latin typeface="Calibri" pitchFamily="34" charset="0"/>
-                <a:ea typeface="Calibri" pitchFamily="34" charset="-122"/>
-                <a:cs typeface="Calibri" pitchFamily="34" charset="-120"/>
-              </a:rPr>
-              <a:t>Live disruption feeds</a:t>
-            </a:r>
-            <a:endParaRPr lang="en-US" sz="1350" dirty="0"/>
-          </a:p>
-        </p:txBody>
-      </p:sp>
-      <p:sp>
-        <p:nvSpPr>
-          <p:cNvPr id="12" name="Text 9"/>
-          <p:cNvSpPr txBox="1"/>
-          <p:nvPr/>
-        </p:nvSpPr>
-        <p:spPr>
-          <a:xfrm>
-            <a:off x="5394960" y="1883664"/>
-            <a:ext cx="3291840" cy="228600"/>
-          </a:xfrm>
-          <a:prstGeom prst="rect">
-            <a:avLst/>
-          </a:prstGeom>
-          <a:noFill/>
-          <a:ln/>
-        </p:spPr>
-        <p:txBody>
-          <a:bodyPr wrap="square" lIns="0" tIns="0" rIns="0" bIns="0" rtlCol="0" anchor="t"/>
-          <a:lstStyle/>
-          <a:p>
-            <a:pPr marL="0" indent="0">
-              <a:buNone/>
-            </a:pPr>
-            <a:r>
-              <a:rPr lang="en-US" sz="1100" dirty="0">
-                <a:solidFill>
-                  <a:srgbClr val="94A3B8"/>
-                </a:solidFill>
-                <a:latin typeface="Calibri" pitchFamily="34" charset="0"/>
-                <a:ea typeface="Calibri" pitchFamily="34" charset="-122"/>
-                <a:cs typeface="Calibri" pitchFamily="34" charset="-120"/>
-              </a:rPr>
-              <a:t>FlightAware, port APIs, weather APIs</a:t>
-            </a:r>
-            <a:endParaRPr lang="en-US" sz="1100" dirty="0"/>
-          </a:p>
-        </p:txBody>
-      </p:sp>
-      <p:sp>
-        <p:nvSpPr>
-          <p:cNvPr id="13" name="Shape 10"/>
-          <p:cNvSpPr/>
-          <p:nvPr/>
-        </p:nvSpPr>
-        <p:spPr>
-          <a:xfrm>
-            <a:off x="4754880" y="2331720"/>
-            <a:ext cx="457200" cy="457200"/>
-          </a:xfrm>
-          <a:prstGeom prst="ellipse">
-            <a:avLst/>
-          </a:prstGeom>
-          <a:solidFill>
-            <a:srgbClr val="0E3A4A"/>
-          </a:solidFill>
-          <a:ln w="12700">
-            <a:solidFill>
-              <a:srgbClr val="0E3A4A"/>
-            </a:solidFill>
-            <a:prstDash val="solid"/>
-          </a:ln>
-        </p:spPr>
-      </p:sp>
-      <p:pic>
-        <p:nvPicPr>
-          <p:cNvPr id="14" name="Image 1" descr="preencoded.png"/>
-          <p:cNvPicPr>
-            <a:picLocks noChangeAspect="1"/>
-          </p:cNvPicPr>
-          <p:nvPr/>
-        </p:nvPicPr>
-        <p:blipFill>
-          <a:blip r:embed="rId2"/>
-          <a:stretch>
-            <a:fillRect/>
-          </a:stretch>
-        </p:blipFill>
-        <p:spPr>
-          <a:xfrm>
-            <a:off x="4869180" y="2446020"/>
-            <a:ext cx="228600" cy="228600"/>
-          </a:xfrm>
-          <a:prstGeom prst="rect">
-            <a:avLst/>
-          </a:prstGeom>
-        </p:spPr>
-      </p:pic>
-      <p:sp>
-        <p:nvSpPr>
-          <p:cNvPr id="15" name="Text 11"/>
-          <p:cNvSpPr txBox="1"/>
-          <p:nvPr/>
-        </p:nvSpPr>
-        <p:spPr>
-          <a:xfrm>
-            <a:off x="5394960" y="2313432"/>
-            <a:ext cx="3291840" cy="256032"/>
-          </a:xfrm>
-          <a:prstGeom prst="rect">
-            <a:avLst/>
-          </a:prstGeom>
-          <a:noFill/>
-          <a:ln/>
-        </p:spPr>
-        <p:txBody>
-          <a:bodyPr wrap="square" lIns="0" tIns="0" rIns="0" bIns="0" rtlCol="0" anchor="t"/>
-          <a:lstStyle/>
-          <a:p>
-            <a:pPr marL="0" indent="0">
-              <a:buNone/>
-            </a:pPr>
-            <a:r>
-              <a:rPr lang="en-US" sz="1350" b="1" dirty="0">
-                <a:solidFill>
-                  <a:srgbClr val="F1F5F9"/>
-                </a:solidFill>
-                <a:latin typeface="Calibri" pitchFamily="34" charset="0"/>
-                <a:ea typeface="Calibri" pitchFamily="34" charset="-122"/>
-                <a:cs typeface="Calibri" pitchFamily="34" charset="-120"/>
-              </a:rPr>
-              <a:t>Real TMS routing engine</a:t>
-            </a:r>
-            <a:endParaRPr lang="en-US" sz="1350" dirty="0"/>
-          </a:p>
-        </p:txBody>
-      </p:sp>
-      <p:sp>
-        <p:nvSpPr>
-          <p:cNvPr id="16" name="Text 12"/>
-          <p:cNvSpPr txBox="1"/>
-          <p:nvPr/>
-        </p:nvSpPr>
-        <p:spPr>
-          <a:xfrm>
-            <a:off x="5394960" y="2569464"/>
-            <a:ext cx="3291840" cy="228600"/>
-          </a:xfrm>
-          <a:prstGeom prst="rect">
-            <a:avLst/>
-          </a:prstGeom>
-          <a:noFill/>
-          <a:ln/>
-        </p:spPr>
-        <p:txBody>
-          <a:bodyPr wrap="square" lIns="0" tIns="0" rIns="0" bIns="0" rtlCol="0" anchor="t"/>
-          <a:lstStyle/>
-          <a:p>
-            <a:pPr marL="0" indent="0">
-              <a:buNone/>
-            </a:pPr>
-            <a:r>
-              <a:rPr lang="en-US" sz="1100" dirty="0">
-                <a:solidFill>
-                  <a:srgbClr val="94A3B8"/>
-                </a:solidFill>
-                <a:latin typeface="Calibri" pitchFamily="34" charset="0"/>
-                <a:ea typeface="Calibri" pitchFamily="34" charset="-122"/>
-                <a:cs typeface="Calibri" pitchFamily="34" charset="-120"/>
-              </a:rPr>
-              <a:t>Replaces the demo route network</a:t>
-            </a:r>
-            <a:endParaRPr lang="en-US" sz="1100" dirty="0"/>
-          </a:p>
-        </p:txBody>
-      </p:sp>
-      <p:sp>
-        <p:nvSpPr>
-          <p:cNvPr id="17" name="Shape 13"/>
-          <p:cNvSpPr/>
-          <p:nvPr/>
-        </p:nvSpPr>
-        <p:spPr>
-          <a:xfrm>
-            <a:off x="4754880" y="3017520"/>
-            <a:ext cx="457200" cy="457200"/>
-          </a:xfrm>
-          <a:prstGeom prst="ellipse">
-            <a:avLst/>
-          </a:prstGeom>
-          <a:solidFill>
-            <a:srgbClr val="0E3A4A"/>
-          </a:solidFill>
-          <a:ln w="12700">
-            <a:solidFill>
-              <a:srgbClr val="0E3A4A"/>
-            </a:solidFill>
-            <a:prstDash val="solid"/>
-          </a:ln>
-        </p:spPr>
-      </p:sp>
-      <p:pic>
-        <p:nvPicPr>
-          <p:cNvPr id="18" name="Image 2" descr="preencoded.png"/>
-          <p:cNvPicPr>
-            <a:picLocks noChangeAspect="1"/>
-          </p:cNvPicPr>
-          <p:nvPr/>
-        </p:nvPicPr>
-        <p:blipFill>
-          <a:blip r:embed="rId3"/>
-          <a:stretch>
-            <a:fillRect/>
-          </a:stretch>
-        </p:blipFill>
-        <p:spPr>
-          <a:xfrm>
-            <a:off x="4869180" y="3131820"/>
-            <a:ext cx="228600" cy="228600"/>
-          </a:xfrm>
-          <a:prstGeom prst="rect">
-            <a:avLst/>
-          </a:prstGeom>
-        </p:spPr>
-      </p:pic>
-      <p:sp>
-        <p:nvSpPr>
-          <p:cNvPr id="19" name="Text 14"/>
-          <p:cNvSpPr txBox="1"/>
-          <p:nvPr/>
-        </p:nvSpPr>
-        <p:spPr>
-          <a:xfrm>
-            <a:off x="5394960" y="2999232"/>
-            <a:ext cx="3291840" cy="256032"/>
-          </a:xfrm>
-          <a:prstGeom prst="rect">
-            <a:avLst/>
-          </a:prstGeom>
-          <a:noFill/>
-          <a:ln/>
-        </p:spPr>
-        <p:txBody>
-          <a:bodyPr wrap="square" lIns="0" tIns="0" rIns="0" bIns="0" rtlCol="0" anchor="t"/>
-          <a:lstStyle/>
-          <a:p>
-            <a:pPr marL="0" indent="0">
-              <a:buNone/>
-            </a:pPr>
-            <a:r>
-              <a:rPr lang="en-US" sz="1350" b="1" dirty="0">
-                <a:solidFill>
-                  <a:srgbClr val="F1F5F9"/>
-                </a:solidFill>
-                <a:latin typeface="Calibri" pitchFamily="34" charset="0"/>
-                <a:ea typeface="Calibri" pitchFamily="34" charset="-122"/>
-                <a:cs typeface="Calibri" pitchFamily="34" charset="-120"/>
-              </a:rPr>
-              <a:t>Production scale on IBM Cloud</a:t>
-            </a:r>
-            <a:endParaRPr lang="en-US" sz="1350" dirty="0"/>
-          </a:p>
-        </p:txBody>
-      </p:sp>
-      <p:sp>
-        <p:nvSpPr>
-          <p:cNvPr id="20" name="Text 15"/>
-          <p:cNvSpPr txBox="1"/>
-          <p:nvPr/>
-        </p:nvSpPr>
-        <p:spPr>
-          <a:xfrm>
-            <a:off x="5394960" y="3255264"/>
-            <a:ext cx="3291840" cy="228600"/>
-          </a:xfrm>
-          <a:prstGeom prst="rect">
-            <a:avLst/>
-          </a:prstGeom>
-          <a:noFill/>
-          <a:ln/>
-        </p:spPr>
-        <p:txBody>
-          <a:bodyPr wrap="square" lIns="0" tIns="0" rIns="0" bIns="0" rtlCol="0" anchor="t"/>
-          <a:lstStyle/>
-          <a:p>
-            <a:pPr marL="0" indent="0">
-              <a:buNone/>
-            </a:pPr>
-            <a:r>
-              <a:rPr lang="en-US" sz="1100" dirty="0">
-                <a:solidFill>
-                  <a:srgbClr val="94A3B8"/>
-                </a:solidFill>
-                <a:latin typeface="Calibri" pitchFamily="34" charset="0"/>
-                <a:ea typeface="Calibri" pitchFamily="34" charset="-122"/>
-                <a:cs typeface="Calibri" pitchFamily="34" charset="-120"/>
-              </a:rPr>
-              <a:t>MongoDB Atlas + Redis</a:t>
-            </a:r>
-            <a:endParaRPr lang="en-US" sz="1100" dirty="0"/>
-          </a:p>
-        </p:txBody>
-      </p:sp>
-      <p:sp>
-        <p:nvSpPr>
-          <p:cNvPr id="21" name="Shape 16"/>
-          <p:cNvSpPr/>
-          <p:nvPr/>
-        </p:nvSpPr>
-        <p:spPr>
-          <a:xfrm>
-            <a:off x="4754880" y="3703320"/>
-            <a:ext cx="457200" cy="457200"/>
-          </a:xfrm>
-          <a:prstGeom prst="ellipse">
-            <a:avLst/>
-          </a:prstGeom>
-          <a:solidFill>
-            <a:srgbClr val="0E3A4A"/>
-          </a:solidFill>
-          <a:ln w="12700">
-            <a:solidFill>
-              <a:srgbClr val="0E3A4A"/>
-            </a:solidFill>
-            <a:prstDash val="solid"/>
-          </a:ln>
-        </p:spPr>
-      </p:sp>
-      <p:pic>
-        <p:nvPicPr>
-          <p:cNvPr id="22" name="Image 3" descr="preencoded.png"/>
-          <p:cNvPicPr>
-            <a:picLocks noChangeAspect="1"/>
-          </p:cNvPicPr>
-          <p:nvPr/>
-        </p:nvPicPr>
-        <p:blipFill>
-          <a:blip r:embed="rId4"/>
-          <a:stretch>
-            <a:fillRect/>
-          </a:stretch>
-        </p:blipFill>
-        <p:spPr>
-          <a:xfrm>
-            <a:off x="4869180" y="3817620"/>
-            <a:ext cx="228600" cy="228600"/>
-          </a:xfrm>
-          <a:prstGeom prst="rect">
-            <a:avLst/>
-          </a:prstGeom>
-        </p:spPr>
-      </p:pic>
-      <p:sp>
-        <p:nvSpPr>
-          <p:cNvPr id="23" name="Text 17"/>
-          <p:cNvSpPr txBox="1"/>
-          <p:nvPr/>
-        </p:nvSpPr>
-        <p:spPr>
-          <a:xfrm>
-            <a:off x="5394960" y="3685032"/>
-            <a:ext cx="3291840" cy="256032"/>
-          </a:xfrm>
-          <a:prstGeom prst="rect">
-            <a:avLst/>
-          </a:prstGeom>
-          <a:noFill/>
-          <a:ln/>
-        </p:spPr>
-        <p:txBody>
-          <a:bodyPr wrap="square" lIns="0" tIns="0" rIns="0" bIns="0" rtlCol="0" anchor="t"/>
-          <a:lstStyle/>
-          <a:p>
-            <a:pPr marL="0" indent="0">
-              <a:buNone/>
-            </a:pPr>
-            <a:r>
-              <a:rPr lang="en-US" sz="1350" b="1" dirty="0">
-                <a:solidFill>
-                  <a:srgbClr val="F1F5F9"/>
-                </a:solidFill>
-                <a:latin typeface="Calibri" pitchFamily="34" charset="0"/>
-                <a:ea typeface="Calibri" pitchFamily="34" charset="-122"/>
-                <a:cs typeface="Calibri" pitchFamily="34" charset="-120"/>
-              </a:rPr>
-              <a:t>Multi-tenant MCP tools</a:t>
-            </a:r>
-            <a:endParaRPr lang="en-US" sz="1350" dirty="0"/>
-          </a:p>
-        </p:txBody>
-      </p:sp>
-      <p:sp>
-        <p:nvSpPr>
-          <p:cNvPr id="24" name="Text 18"/>
-          <p:cNvSpPr txBox="1"/>
-          <p:nvPr/>
-        </p:nvSpPr>
-        <p:spPr>
-          <a:xfrm>
-            <a:off x="5394960" y="3941064"/>
-            <a:ext cx="3291840" cy="228600"/>
-          </a:xfrm>
-          <a:prstGeom prst="rect">
-            <a:avLst/>
-          </a:prstGeom>
-          <a:noFill/>
-          <a:ln/>
-        </p:spPr>
-        <p:txBody>
-          <a:bodyPr wrap="square" lIns="0" tIns="0" rIns="0" bIns="0" rtlCol="0" anchor="t"/>
-          <a:lstStyle/>
-          <a:p>
-            <a:pPr marL="0" indent="0">
-              <a:buNone/>
-            </a:pPr>
-            <a:r>
-              <a:rPr lang="en-US" sz="1100" dirty="0">
-                <a:solidFill>
-                  <a:srgbClr val="94A3B8"/>
-                </a:solidFill>
-                <a:latin typeface="Calibri" pitchFamily="34" charset="0"/>
-                <a:ea typeface="Calibri" pitchFamily="34" charset="-122"/>
-                <a:cs typeface="Calibri" pitchFamily="34" charset="-120"/>
-              </a:rPr>
-              <a:t>Carrier management across tenants</a:t>
-            </a:r>
-            <a:endParaRPr lang="en-US" sz="1100" dirty="0"/>
-          </a:p>
-        </p:txBody>
-      </p:sp>
-      <p:sp>
-        <p:nvSpPr>
-          <p:cNvPr id="25" name="Text 19"/>
-          <p:cNvSpPr txBox="1"/>
-          <p:nvPr/>
-        </p:nvSpPr>
-        <p:spPr>
-          <a:xfrm>
-            <a:off x="457200" y="4553712"/>
-            <a:ext cx="6217920" cy="274320"/>
-          </a:xfrm>
-          <a:prstGeom prst="rect">
-            <a:avLst/>
-          </a:prstGeom>
-          <a:noFill/>
-          <a:ln/>
-        </p:spPr>
-        <p:txBody>
-          <a:bodyPr wrap="square" lIns="0" tIns="0" rIns="0" bIns="0" rtlCol="0" anchor="ctr"/>
-          <a:lstStyle/>
-          <a:p>
-            <a:pPr marL="0" indent="0">
-              <a:buNone/>
-            </a:pPr>
-            <a:r>
-              <a:rPr lang="en-US" sz="1050" dirty="0">
-                <a:solidFill>
-                  <a:srgbClr val="94A3B8"/>
-                </a:solidFill>
-                <a:latin typeface="Calibri" pitchFamily="34" charset="0"/>
-                <a:ea typeface="Calibri" pitchFamily="34" charset="-122"/>
-                <a:cs typeface="Calibri" pitchFamily="34" charset="-120"/>
-              </a:rPr>
-              <a:t>Lead: Nilkanth Patel  ·  Team: Manav Shah, Priyank Patel, Prachi Patel</a:t>
-            </a:r>
-            <a:endParaRPr lang="en-US" sz="1050" dirty="0"/>
-          </a:p>
-        </p:txBody>
-      </p:sp>
-      <p:sp>
-        <p:nvSpPr>
-          <p:cNvPr id="26" name="Text 20"/>
-          <p:cNvSpPr txBox="1"/>
-          <p:nvPr/>
-        </p:nvSpPr>
-        <p:spPr>
-          <a:xfrm>
-            <a:off x="6675120" y="4480560"/>
-            <a:ext cx="2011680" cy="365760"/>
-          </a:xfrm>
-          <a:prstGeom prst="rect">
-            <a:avLst/>
-          </a:prstGeom>
-          <a:noFill/>
-          <a:ln/>
-        </p:spPr>
-        <p:txBody>
-          <a:bodyPr wrap="square" lIns="0" tIns="0" rIns="0" bIns="0" rtlCol="0" anchor="ctr"/>
-          <a:lstStyle/>
-          <a:p>
-            <a:pPr marL="0" indent="0" algn="r">
-              <a:buNone/>
-            </a:pPr>
-            <a:r>
-              <a:rPr lang="en-US" sz="1800" b="1" dirty="0">
-                <a:solidFill>
-                  <a:srgbClr val="22D3EE"/>
-                </a:solidFill>
-                <a:latin typeface="Arial" pitchFamily="34" charset="0"/>
-                <a:ea typeface="Arial" pitchFamily="34" charset="-122"/>
-                <a:cs typeface="Arial" pitchFamily="34" charset="-120"/>
-              </a:rPr>
-              <a:t>Thank you</a:t>
-            </a:r>
-            <a:endParaRPr lang="en-US" sz="1800" dirty="0"/>
           </a:p>
         </p:txBody>
       </p:sp>

--- a/presentation/slides.pptx
+++ b/presentation/slides.pptx
@@ -3786,1261 +3786,1278 @@
       </p:sp>
       <p:sp>
         <p:nvSpPr>
-          <p:cNvPr id="5" name="Shape 3"/>
+          <p:cNvPr id="5" name="TextBox 4"/>
+          <p:cNvSpPr txBox="1"/>
+          <p:nvPr/>
+        </p:nvSpPr>
+        <p:spPr>
+          <a:xfrm>
+            <a:off x="411480" y="1078992"/>
+            <a:ext cx="1828800" cy="182880"/>
+          </a:xfrm>
+          <a:prstGeom prst="rect">
+            <a:avLst/>
+          </a:prstGeom>
+          <a:noFill/>
+        </p:spPr>
+        <p:txBody>
+          <a:bodyPr wrap="square">
+            <a:spAutoFit/>
+          </a:bodyPr>
+          <a:lstStyle/>
+          <a:p>
+            <a:pPr algn="l"/>
+            <a:r>
+              <a:rPr sz="650" b="1">
+                <a:solidFill>
+                  <a:srgbClr val="64748B"/>
+                </a:solidFill>
+                <a:latin typeface="Arial"/>
+              </a:rPr>
+              <a:t>CLIENTS</a:t>
+            </a:r>
+          </a:p>
+        </p:txBody>
+      </p:sp>
+      <p:sp>
+        <p:nvSpPr>
+          <p:cNvPr id="6" name="Rounded Rectangle 5"/>
           <p:cNvSpPr/>
           <p:nvPr/>
         </p:nvSpPr>
         <p:spPr>
           <a:xfrm>
-            <a:off x="457200" y="1280160"/>
-            <a:ext cx="1371600" cy="548640"/>
+            <a:off x="411480" y="1280160"/>
+            <a:ext cx="2377440" cy="475488"/>
           </a:xfrm>
           <a:prstGeom prst="roundRect">
-            <a:avLst>
-              <a:gd name="adj" fmla="val 10000"/>
-            </a:avLst>
+            <a:avLst/>
           </a:prstGeom>
           <a:solidFill>
             <a:srgbClr val="1F2A44"/>
           </a:solidFill>
+          <a:ln>
+            <a:noFill/>
+          </a:ln>
+          <a:effectLst/>
+        </p:spPr>
+        <p:style>
+          <a:lnRef idx="1">
+            <a:schemeClr val="accent1"/>
+          </a:lnRef>
+          <a:fillRef idx="3">
+            <a:schemeClr val="accent1"/>
+          </a:fillRef>
+          <a:effectRef idx="2">
+            <a:schemeClr val="accent1"/>
+          </a:effectRef>
+          <a:fontRef idx="minor">
+            <a:schemeClr val="lt1"/>
+          </a:fontRef>
+        </p:style>
+        <p:txBody>
+          <a:bodyPr rtlCol="0" anchor="ctr" wrap="square" lIns="45720" rIns="45720" tIns="18288" bIns="18288"/>
+          <a:lstStyle/>
+          <a:p>
+            <a:pPr algn="ctr"/>
+            <a:r>
+              <a:rPr sz="1000" b="1">
+                <a:solidFill>
+                  <a:srgbClr val="F1F5F9"/>
+                </a:solidFill>
+                <a:latin typeface="Arial"/>
+              </a:rPr>
+              <a:t>Dashboard</a:t>
+            </a:r>
+          </a:p>
+          <a:p>
+            <a:pPr algn="ctr"/>
+            <a:r>
+              <a:rPr sz="750">
+                <a:solidFill>
+                  <a:srgbClr val="94A3B8"/>
+                </a:solidFill>
+                <a:latin typeface="Arial"/>
+              </a:rPr>
+              <a:t>map · triage · audit</a:t>
+            </a:r>
+          </a:p>
+        </p:txBody>
+      </p:sp>
+      <p:sp>
+        <p:nvSpPr>
+          <p:cNvPr id="7" name="Rounded Rectangle 6"/>
+          <p:cNvSpPr/>
+          <p:nvPr/>
+        </p:nvSpPr>
+        <p:spPr>
+          <a:xfrm>
+            <a:off x="3017520" y="1280160"/>
+            <a:ext cx="2377440" cy="475488"/>
+          </a:xfrm>
+          <a:prstGeom prst="roundRect">
+            <a:avLst/>
+          </a:prstGeom>
+          <a:solidFill>
+            <a:srgbClr val="1F2A44"/>
+          </a:solidFill>
+          <a:ln w="15875">
+            <a:solidFill>
+              <a:srgbClr val="38BDF8"/>
+            </a:solidFill>
+          </a:ln>
+          <a:effectLst/>
+        </p:spPr>
+        <p:style>
+          <a:lnRef idx="1">
+            <a:schemeClr val="accent1"/>
+          </a:lnRef>
+          <a:fillRef idx="3">
+            <a:schemeClr val="accent1"/>
+          </a:fillRef>
+          <a:effectRef idx="2">
+            <a:schemeClr val="accent1"/>
+          </a:effectRef>
+          <a:fontRef idx="minor">
+            <a:schemeClr val="lt1"/>
+          </a:fontRef>
+        </p:style>
+        <p:txBody>
+          <a:bodyPr rtlCol="0" anchor="ctr" wrap="square" lIns="45720" rIns="45720" tIns="18288" bIns="18288"/>
+          <a:lstStyle/>
+          <a:p>
+            <a:pPr algn="ctr"/>
+            <a:r>
+              <a:rPr sz="1000" b="1">
+                <a:solidFill>
+                  <a:srgbClr val="F1F5F9"/>
+                </a:solidFill>
+                <a:latin typeface="Arial"/>
+              </a:rPr>
+              <a:t>IBM Bob</a:t>
+            </a:r>
+          </a:p>
+          <a:p>
+            <a:pPr algn="ctr"/>
+            <a:r>
+              <a:rPr sz="750">
+                <a:solidFill>
+                  <a:srgbClr val="94A3B8"/>
+                </a:solidFill>
+                <a:latin typeface="Arial"/>
+              </a:rPr>
+              <a:t>Control Tower mode</a:t>
+            </a:r>
+          </a:p>
+        </p:txBody>
+      </p:sp>
+      <p:sp>
+        <p:nvSpPr>
+          <p:cNvPr id="8" name="Rounded Rectangle 7"/>
+          <p:cNvSpPr/>
+          <p:nvPr/>
+        </p:nvSpPr>
+        <p:spPr>
+          <a:xfrm>
+            <a:off x="5623560" y="1280160"/>
+            <a:ext cx="3108960" cy="475488"/>
+          </a:xfrm>
+          <a:prstGeom prst="roundRect">
+            <a:avLst/>
+          </a:prstGeom>
+          <a:solidFill>
+            <a:srgbClr val="1F2A44"/>
+          </a:solidFill>
+          <a:ln>
+            <a:noFill/>
+          </a:ln>
+          <a:effectLst/>
+        </p:spPr>
+        <p:style>
+          <a:lnRef idx="1">
+            <a:schemeClr val="accent1"/>
+          </a:lnRef>
+          <a:fillRef idx="3">
+            <a:schemeClr val="accent1"/>
+          </a:fillRef>
+          <a:effectRef idx="2">
+            <a:schemeClr val="accent1"/>
+          </a:effectRef>
+          <a:fontRef idx="minor">
+            <a:schemeClr val="lt1"/>
+          </a:fontRef>
+        </p:style>
+        <p:txBody>
+          <a:bodyPr rtlCol="0" anchor="ctr" wrap="square" lIns="45720" rIns="45720" tIns="18288" bIns="18288"/>
+          <a:lstStyle/>
+          <a:p>
+            <a:pPr algn="ctr"/>
+            <a:r>
+              <a:rPr sz="1000" b="1">
+                <a:solidFill>
+                  <a:srgbClr val="F1F5F9"/>
+                </a:solidFill>
+                <a:latin typeface="Arial"/>
+              </a:rPr>
+              <a:t>Real telemetry</a:t>
+            </a:r>
+          </a:p>
+          <a:p>
+            <a:pPr algn="ctr"/>
+            <a:r>
+              <a:rPr sz="750">
+                <a:solidFill>
+                  <a:srgbClr val="94A3B8"/>
+                </a:solidFill>
+                <a:latin typeface="Arial"/>
+              </a:rPr>
+              <a:t>POST /ingest/sensor</a:t>
+            </a:r>
+          </a:p>
+        </p:txBody>
+      </p:sp>
+      <p:cxnSp>
+        <p:nvCxnSpPr>
+          <p:cNvPr id="9" name="Connector 8"/>
+          <p:cNvCxnSpPr/>
+          <p:nvPr/>
+        </p:nvCxnSpPr>
+        <p:spPr>
+          <a:xfrm>
+            <a:off x="1600200" y="1755648"/>
+            <a:ext cx="0" cy="274320"/>
+          </a:xfrm>
+          <a:prstGeom prst="line">
+            <a:avLst/>
+          </a:prstGeom>
           <a:ln w="12700">
             <a:solidFill>
-              <a:srgbClr val="1F2A44"/>
+              <a:srgbClr val="64748B"/>
             </a:solidFill>
-            <a:prstDash val="solid"/>
           </a:ln>
         </p:spPr>
-      </p:sp>
-      <p:sp>
-        <p:nvSpPr>
-          <p:cNvPr id="6" name="Text 4"/>
-          <p:cNvSpPr txBox="1"/>
-          <p:nvPr/>
-        </p:nvSpPr>
-        <p:spPr>
-          <a:xfrm>
-            <a:off x="502920" y="1280160"/>
-            <a:ext cx="1280160" cy="548640"/>
-          </a:xfrm>
-          <a:prstGeom prst="rect">
-            <a:avLst/>
-          </a:prstGeom>
-          <a:noFill/>
-          <a:ln/>
-        </p:spPr>
-        <p:txBody>
-          <a:bodyPr wrap="square" lIns="0" tIns="0" rIns="0" bIns="0" rtlCol="0" anchor="ctr"/>
-          <a:lstStyle/>
-          <a:p>
-            <a:pPr marL="0" indent="0" algn="ctr">
-              <a:buNone/>
-            </a:pPr>
-            <a:r>
-              <a:rPr lang="en-US" sz="1050" b="1" dirty="0">
-                <a:solidFill>
-                  <a:srgbClr val="CBD5E1"/>
-                </a:solidFill>
-                <a:latin typeface="Calibri" pitchFamily="34" charset="0"/>
-                <a:ea typeface="Calibri" pitchFamily="34" charset="-122"/>
-                <a:cs typeface="Calibri" pitchFamily="34" charset="-120"/>
-              </a:rPr>
-              <a:t>Simulated world (motion + telemetry)</a:t>
-            </a:r>
-            <a:endParaRPr lang="en-US" sz="1050" dirty="0"/>
-          </a:p>
-        </p:txBody>
-      </p:sp>
-      <p:sp>
-        <p:nvSpPr>
-          <p:cNvPr id="7" name="Shape 5"/>
-          <p:cNvSpPr/>
-          <p:nvPr/>
-        </p:nvSpPr>
-        <p:spPr>
-          <a:xfrm>
-            <a:off x="2171700" y="1280160"/>
-            <a:ext cx="1371600" cy="548640"/>
-          </a:xfrm>
-          <a:prstGeom prst="roundRect">
-            <a:avLst>
-              <a:gd name="adj" fmla="val 10000"/>
-            </a:avLst>
-          </a:prstGeom>
-          <a:solidFill>
-            <a:srgbClr val="0E3A4A"/>
-          </a:solidFill>
+        <p:style>
+          <a:lnRef idx="2">
+            <a:schemeClr val="accent1"/>
+          </a:lnRef>
+          <a:fillRef idx="0">
+            <a:schemeClr val="accent1"/>
+          </a:fillRef>
+          <a:effectRef idx="1">
+            <a:schemeClr val="accent1"/>
+          </a:effectRef>
+          <a:fontRef idx="minor">
+            <a:schemeClr val="tx1"/>
+          </a:fontRef>
+        </p:style>
+      </p:cxnSp>
+      <p:cxnSp>
+        <p:nvCxnSpPr>
+          <p:cNvPr id="10" name="Connector 9"/>
+          <p:cNvCxnSpPr/>
+          <p:nvPr/>
+        </p:nvCxnSpPr>
+        <p:spPr>
+          <a:xfrm>
+            <a:off x="4206240" y="1755648"/>
+            <a:ext cx="0" cy="274320"/>
+          </a:xfrm>
+          <a:prstGeom prst="line">
+            <a:avLst/>
+          </a:prstGeom>
+          <a:ln w="15875">
+            <a:solidFill>
+              <a:srgbClr val="38BDF8"/>
+            </a:solidFill>
+          </a:ln>
+        </p:spPr>
+        <p:style>
+          <a:lnRef idx="2">
+            <a:schemeClr val="accent1"/>
+          </a:lnRef>
+          <a:fillRef idx="0">
+            <a:schemeClr val="accent1"/>
+          </a:fillRef>
+          <a:effectRef idx="1">
+            <a:schemeClr val="accent1"/>
+          </a:effectRef>
+          <a:fontRef idx="minor">
+            <a:schemeClr val="tx1"/>
+          </a:fontRef>
+        </p:style>
+      </p:cxnSp>
+      <p:cxnSp>
+        <p:nvCxnSpPr>
+          <p:cNvPr id="11" name="Connector 10"/>
+          <p:cNvCxnSpPr/>
+          <p:nvPr/>
+        </p:nvCxnSpPr>
+        <p:spPr>
+          <a:xfrm>
+            <a:off x="7178040" y="1755648"/>
+            <a:ext cx="0" cy="274320"/>
+          </a:xfrm>
+          <a:prstGeom prst="line">
+            <a:avLst/>
+          </a:prstGeom>
           <a:ln w="12700">
             <a:solidFill>
-              <a:srgbClr val="0E3A4A"/>
+              <a:srgbClr val="64748B"/>
             </a:solidFill>
-            <a:prstDash val="solid"/>
           </a:ln>
         </p:spPr>
-      </p:sp>
-      <p:sp>
-        <p:nvSpPr>
-          <p:cNvPr id="8" name="Text 6"/>
+        <p:style>
+          <a:lnRef idx="2">
+            <a:schemeClr val="accent1"/>
+          </a:lnRef>
+          <a:fillRef idx="0">
+            <a:schemeClr val="accent1"/>
+          </a:fillRef>
+          <a:effectRef idx="1">
+            <a:schemeClr val="accent1"/>
+          </a:effectRef>
+          <a:fontRef idx="minor">
+            <a:schemeClr val="tx1"/>
+          </a:fontRef>
+        </p:style>
+      </p:cxnSp>
+      <p:sp>
+        <p:nvSpPr>
+          <p:cNvPr id="12" name="Rounded Rectangle 11"/>
+          <p:cNvSpPr/>
+          <p:nvPr/>
+        </p:nvSpPr>
+        <p:spPr>
+          <a:xfrm>
+            <a:off x="411480" y="2029968"/>
+            <a:ext cx="8321040" cy="420624"/>
+          </a:xfrm>
+          <a:prstGeom prst="roundRect">
+            <a:avLst/>
+          </a:prstGeom>
+          <a:solidFill>
+            <a:srgbClr val="4A2A1A"/>
+          </a:solidFill>
+          <a:ln w="15875">
+            <a:solidFill>
+              <a:srgbClr val="F59E0B"/>
+            </a:solidFill>
+          </a:ln>
+          <a:effectLst/>
+        </p:spPr>
+        <p:style>
+          <a:lnRef idx="1">
+            <a:schemeClr val="accent1"/>
+          </a:lnRef>
+          <a:fillRef idx="3">
+            <a:schemeClr val="accent1"/>
+          </a:fillRef>
+          <a:effectRef idx="2">
+            <a:schemeClr val="accent1"/>
+          </a:effectRef>
+          <a:fontRef idx="minor">
+            <a:schemeClr val="lt1"/>
+          </a:fontRef>
+        </p:style>
+        <p:txBody>
+          <a:bodyPr rtlCol="0" anchor="ctr" wrap="square" lIns="45720" rIns="45720" tIns="18288" bIns="18288"/>
+          <a:lstStyle/>
+          <a:p>
+            <a:pPr algn="ctr"/>
+            <a:r>
+              <a:rPr sz="1000" b="1">
+                <a:solidFill>
+                  <a:srgbClr val="F1F5F9"/>
+                </a:solidFill>
+                <a:latin typeface="Arial"/>
+              </a:rPr>
+              <a:t>policy.js  —  read · propose · COMMIT</a:t>
+            </a:r>
+          </a:p>
+          <a:p>
+            <a:pPr algn="ctr"/>
+            <a:r>
+              <a:rPr sz="700">
+                <a:solidFill>
+                  <a:srgbClr val="94A3B8"/>
+                </a:solidFill>
+                <a:latin typeface="Arial"/>
+              </a:rPr>
+              <a:t>an agent may read and propose · only a human may commit</a:t>
+            </a:r>
+          </a:p>
+        </p:txBody>
+      </p:sp>
+      <p:sp>
+        <p:nvSpPr>
+          <p:cNvPr id="13" name="TextBox 12"/>
           <p:cNvSpPr txBox="1"/>
           <p:nvPr/>
         </p:nvSpPr>
         <p:spPr>
           <a:xfrm>
-            <a:off x="2217420" y="1280160"/>
-            <a:ext cx="1280160" cy="548640"/>
+            <a:off x="411480" y="2468880"/>
+            <a:ext cx="3657600" cy="182880"/>
           </a:xfrm>
           <a:prstGeom prst="rect">
             <a:avLst/>
           </a:prstGeom>
           <a:noFill/>
-          <a:ln/>
-        </p:spPr>
-        <p:txBody>
-          <a:bodyPr wrap="square" lIns="0" tIns="0" rIns="0" bIns="0" rtlCol="0" anchor="ctr"/>
-          <a:lstStyle/>
-          <a:p>
-            <a:pPr marL="0" indent="0" algn="ctr">
-              <a:buNone/>
-            </a:pPr>
-            <a:r>
-              <a:rPr lang="en-US" sz="1050" b="1" dirty="0">
-                <a:solidFill>
-                  <a:srgbClr val="A5F3FC"/>
-                </a:solidFill>
-                <a:latin typeface="Calibri" pitchFamily="34" charset="0"/>
-                <a:ea typeface="Calibri" pitchFamily="34" charset="-122"/>
-                <a:cs typeface="Calibri" pitchFamily="34" charset="-120"/>
-              </a:rPr>
-              <a:t>Sensor sanity → Regulatory engine</a:t>
-            </a:r>
-            <a:endParaRPr lang="en-US" sz="1050" dirty="0"/>
-          </a:p>
-        </p:txBody>
-      </p:sp>
-      <p:sp>
-        <p:nvSpPr>
-          <p:cNvPr id="9" name="Shape 7"/>
+        </p:spPr>
+        <p:txBody>
+          <a:bodyPr wrap="square">
+            <a:spAutoFit/>
+          </a:bodyPr>
+          <a:lstStyle/>
+          <a:p>
+            <a:pPr algn="l"/>
+            <a:r>
+              <a:rPr sz="650" b="1">
+                <a:solidFill>
+                  <a:srgbClr val="F59E0B"/>
+                </a:solidFill>
+                <a:latin typeface="Arial"/>
+              </a:rPr>
+              <a:t>▲  a refused commit is appended to the hash chain</a:t>
+            </a:r>
+          </a:p>
+        </p:txBody>
+      </p:sp>
+      <p:sp>
+        <p:nvSpPr>
+          <p:cNvPr id="14" name="TextBox 13"/>
+          <p:cNvSpPr txBox="1"/>
+          <p:nvPr/>
+        </p:nvSpPr>
+        <p:spPr>
+          <a:xfrm>
+            <a:off x="411480" y="2697480"/>
+            <a:ext cx="4114800" cy="182880"/>
+          </a:xfrm>
+          <a:prstGeom prst="rect">
+            <a:avLst/>
+          </a:prstGeom>
+          <a:noFill/>
+        </p:spPr>
+        <p:txBody>
+          <a:bodyPr wrap="square">
+            <a:spAutoFit/>
+          </a:bodyPr>
+          <a:lstStyle/>
+          <a:p>
+            <a:pPr algn="l"/>
+            <a:r>
+              <a:rPr sz="650" b="1">
+                <a:solidFill>
+                  <a:srgbClr val="64748B"/>
+                </a:solidFill>
+                <a:latin typeface="Arial"/>
+              </a:rPr>
+              <a:t>DETERMINISTIC ENGINES   no I/O · no wall clock · 165 tests</a:t>
+            </a:r>
+          </a:p>
+        </p:txBody>
+      </p:sp>
+      <p:sp>
+        <p:nvSpPr>
+          <p:cNvPr id="15" name="Rounded Rectangle 14"/>
           <p:cNvSpPr/>
           <p:nvPr/>
         </p:nvSpPr>
         <p:spPr>
           <a:xfrm>
-            <a:off x="3886200" y="1280160"/>
-            <a:ext cx="1371600" cy="548640"/>
+            <a:off x="411480" y="2898648"/>
+            <a:ext cx="1627632" cy="457200"/>
           </a:xfrm>
           <a:prstGeom prst="roundRect">
-            <a:avLst>
-              <a:gd name="adj" fmla="val 10000"/>
-            </a:avLst>
+            <a:avLst/>
+          </a:prstGeom>
+          <a:solidFill>
+            <a:srgbClr val="0E3A4A"/>
+          </a:solidFill>
+          <a:ln>
+            <a:noFill/>
+          </a:ln>
+          <a:effectLst/>
+        </p:spPr>
+        <p:style>
+          <a:lnRef idx="1">
+            <a:schemeClr val="accent1"/>
+          </a:lnRef>
+          <a:fillRef idx="3">
+            <a:schemeClr val="accent1"/>
+          </a:fillRef>
+          <a:effectRef idx="2">
+            <a:schemeClr val="accent1"/>
+          </a:effectRef>
+          <a:fontRef idx="minor">
+            <a:schemeClr val="lt1"/>
+          </a:fontRef>
+        </p:style>
+        <p:txBody>
+          <a:bodyPr rtlCol="0" anchor="ctr" wrap="square" lIns="45720" rIns="45720" tIns="18288" bIns="18288"/>
+          <a:lstStyle/>
+          <a:p>
+            <a:pPr algn="ctr"/>
+            <a:r>
+              <a:rPr sz="850" b="1">
+                <a:solidFill>
+                  <a:srgbClr val="F1F5F9"/>
+                </a:solidFill>
+                <a:latin typeface="Arial"/>
+              </a:rPr>
+              <a:t>viabilityClock</a:t>
+            </a:r>
+          </a:p>
+          <a:p>
+            <a:pPr algn="ctr"/>
+            <a:r>
+              <a:rPr sz="650">
+                <a:solidFill>
+                  <a:srgbClr val="94A3B8"/>
+                </a:solidFill>
+                <a:latin typeface="Arial"/>
+              </a:rPr>
+              <a:t>two clocks</a:t>
+            </a:r>
+          </a:p>
+        </p:txBody>
+      </p:sp>
+      <p:sp>
+        <p:nvSpPr>
+          <p:cNvPr id="16" name="Rounded Rectangle 15"/>
+          <p:cNvSpPr/>
+          <p:nvPr/>
+        </p:nvSpPr>
+        <p:spPr>
+          <a:xfrm>
+            <a:off x="2084832" y="2898648"/>
+            <a:ext cx="1627632" cy="457200"/>
+          </a:xfrm>
+          <a:prstGeom prst="roundRect">
+            <a:avLst/>
+          </a:prstGeom>
+          <a:solidFill>
+            <a:srgbClr val="0E3A4A"/>
+          </a:solidFill>
+          <a:ln>
+            <a:noFill/>
+          </a:ln>
+          <a:effectLst/>
+        </p:spPr>
+        <p:style>
+          <a:lnRef idx="1">
+            <a:schemeClr val="accent1"/>
+          </a:lnRef>
+          <a:fillRef idx="3">
+            <a:schemeClr val="accent1"/>
+          </a:fillRef>
+          <a:effectRef idx="2">
+            <a:schemeClr val="accent1"/>
+          </a:effectRef>
+          <a:fontRef idx="minor">
+            <a:schemeClr val="lt1"/>
+          </a:fontRef>
+        </p:style>
+        <p:txBody>
+          <a:bodyPr rtlCol="0" anchor="ctr" wrap="square" lIns="45720" rIns="45720" tIns="18288" bIns="18288"/>
+          <a:lstStyle/>
+          <a:p>
+            <a:pPr algn="ctr"/>
+            <a:r>
+              <a:rPr sz="850" b="1">
+                <a:solidFill>
+                  <a:srgbClr val="F1F5F9"/>
+                </a:solidFill>
+                <a:latin typeface="Arial"/>
+              </a:rPr>
+              <a:t>regulatoryEngine</a:t>
+            </a:r>
+          </a:p>
+          <a:p>
+            <a:pPr algn="ctr"/>
+            <a:r>
+              <a:rPr sz="650">
+                <a:solidFill>
+                  <a:srgbClr val="94A3B8"/>
+                </a:solidFill>
+                <a:latin typeface="Arial"/>
+              </a:rPr>
+              <a:t>matrix · MKT</a:t>
+            </a:r>
+          </a:p>
+        </p:txBody>
+      </p:sp>
+      <p:sp>
+        <p:nvSpPr>
+          <p:cNvPr id="17" name="Rounded Rectangle 16"/>
+          <p:cNvSpPr/>
+          <p:nvPr/>
+        </p:nvSpPr>
+        <p:spPr>
+          <a:xfrm>
+            <a:off x="3758184" y="2898648"/>
+            <a:ext cx="1627632" cy="457200"/>
+          </a:xfrm>
+          <a:prstGeom prst="roundRect">
+            <a:avLst/>
+          </a:prstGeom>
+          <a:solidFill>
+            <a:srgbClr val="0E3A4A"/>
+          </a:solidFill>
+          <a:ln>
+            <a:noFill/>
+          </a:ln>
+          <a:effectLst/>
+        </p:spPr>
+        <p:style>
+          <a:lnRef idx="1">
+            <a:schemeClr val="accent1"/>
+          </a:lnRef>
+          <a:fillRef idx="3">
+            <a:schemeClr val="accent1"/>
+          </a:fillRef>
+          <a:effectRef idx="2">
+            <a:schemeClr val="accent1"/>
+          </a:effectRef>
+          <a:fontRef idx="minor">
+            <a:schemeClr val="lt1"/>
+          </a:fontRef>
+        </p:style>
+        <p:txBody>
+          <a:bodyPr rtlCol="0" anchor="ctr" wrap="square" lIns="45720" rIns="45720" tIns="18288" bIns="18288"/>
+          <a:lstStyle/>
+          <a:p>
+            <a:pPr algn="ctr"/>
+            <a:r>
+              <a:rPr sz="850" b="1">
+                <a:solidFill>
+                  <a:srgbClr val="F1F5F9"/>
+                </a:solidFill>
+                <a:latin typeface="Arial"/>
+              </a:rPr>
+              <a:t>breachPredictor</a:t>
+            </a:r>
+          </a:p>
+          <a:p>
+            <a:pPr algn="ctr"/>
+            <a:r>
+              <a:rPr sz="650">
+                <a:solidFill>
+                  <a:srgbClr val="94A3B8"/>
+                </a:solidFill>
+                <a:latin typeface="Arial"/>
+              </a:rPr>
+              <a:t>Newton fit</a:t>
+            </a:r>
+          </a:p>
+        </p:txBody>
+      </p:sp>
+      <p:sp>
+        <p:nvSpPr>
+          <p:cNvPr id="18" name="Rounded Rectangle 17"/>
+          <p:cNvSpPr/>
+          <p:nvPr/>
+        </p:nvSpPr>
+        <p:spPr>
+          <a:xfrm>
+            <a:off x="5431536" y="2898648"/>
+            <a:ext cx="1627632" cy="457200"/>
+          </a:xfrm>
+          <a:prstGeom prst="roundRect">
+            <a:avLst/>
+          </a:prstGeom>
+          <a:solidFill>
+            <a:srgbClr val="0E3A4A"/>
+          </a:solidFill>
+          <a:ln>
+            <a:noFill/>
+          </a:ln>
+          <a:effectLst/>
+        </p:spPr>
+        <p:style>
+          <a:lnRef idx="1">
+            <a:schemeClr val="accent1"/>
+          </a:lnRef>
+          <a:fillRef idx="3">
+            <a:schemeClr val="accent1"/>
+          </a:fillRef>
+          <a:effectRef idx="2">
+            <a:schemeClr val="accent1"/>
+          </a:effectRef>
+          <a:fontRef idx="minor">
+            <a:schemeClr val="lt1"/>
+          </a:fontRef>
+        </p:style>
+        <p:txBody>
+          <a:bodyPr rtlCol="0" anchor="ctr" wrap="square" lIns="45720" rIns="45720" tIns="18288" bIns="18288"/>
+          <a:lstStyle/>
+          <a:p>
+            <a:pPr algn="ctr"/>
+            <a:r>
+              <a:rPr sz="850" b="1">
+                <a:solidFill>
+                  <a:srgbClr val="F1F5F9"/>
+                </a:solidFill>
+                <a:latin typeface="Arial"/>
+              </a:rPr>
+              <a:t>graphRouter</a:t>
+            </a:r>
+          </a:p>
+          <a:p>
+            <a:pPr algn="ctr"/>
+            <a:r>
+              <a:rPr sz="650">
+                <a:solidFill>
+                  <a:srgbClr val="94A3B8"/>
+                </a:solidFill>
+                <a:latin typeface="Arial"/>
+              </a:rPr>
+              <a:t>+ landedCost</a:t>
+            </a:r>
+          </a:p>
+        </p:txBody>
+      </p:sp>
+      <p:sp>
+        <p:nvSpPr>
+          <p:cNvPr id="19" name="Rounded Rectangle 18"/>
+          <p:cNvSpPr/>
+          <p:nvPr/>
+        </p:nvSpPr>
+        <p:spPr>
+          <a:xfrm>
+            <a:off x="7104888" y="2898648"/>
+            <a:ext cx="1627632" cy="457200"/>
+          </a:xfrm>
+          <a:prstGeom prst="roundRect">
+            <a:avLst/>
+          </a:prstGeom>
+          <a:solidFill>
+            <a:srgbClr val="0E3A4A"/>
+          </a:solidFill>
+          <a:ln>
+            <a:noFill/>
+          </a:ln>
+          <a:effectLst/>
+        </p:spPr>
+        <p:style>
+          <a:lnRef idx="1">
+            <a:schemeClr val="accent1"/>
+          </a:lnRef>
+          <a:fillRef idx="3">
+            <a:schemeClr val="accent1"/>
+          </a:fillRef>
+          <a:effectRef idx="2">
+            <a:schemeClr val="accent1"/>
+          </a:effectRef>
+          <a:fontRef idx="minor">
+            <a:schemeClr val="lt1"/>
+          </a:fontRef>
+        </p:style>
+        <p:txBody>
+          <a:bodyPr rtlCol="0" anchor="ctr" wrap="square" lIns="45720" rIns="45720" tIns="18288" bIns="18288"/>
+          <a:lstStyle/>
+          <a:p>
+            <a:pPr algn="ctr"/>
+            <a:r>
+              <a:rPr sz="850" b="1">
+                <a:solidFill>
+                  <a:srgbClr val="F1F5F9"/>
+                </a:solidFill>
+                <a:latin typeface="Arial"/>
+              </a:rPr>
+              <a:t>fleetMatcher</a:t>
+            </a:r>
+          </a:p>
+          <a:p>
+            <a:pPr algn="ctr"/>
+            <a:r>
+              <a:rPr sz="650">
+                <a:solidFill>
+                  <a:srgbClr val="94A3B8"/>
+                </a:solidFill>
+                <a:latin typeface="Arial"/>
+              </a:rPr>
+              <a:t>0–100 score</a:t>
+            </a:r>
+          </a:p>
+        </p:txBody>
+      </p:sp>
+      <p:cxnSp>
+        <p:nvCxnSpPr>
+          <p:cNvPr id="20" name="Connector 19"/>
+          <p:cNvCxnSpPr/>
+          <p:nvPr/>
+        </p:nvCxnSpPr>
+        <p:spPr>
+          <a:xfrm>
+            <a:off x="4206240" y="2450592"/>
+            <a:ext cx="0" cy="448056"/>
+          </a:xfrm>
+          <a:prstGeom prst="line">
+            <a:avLst/>
+          </a:prstGeom>
+          <a:ln w="15875">
+            <a:solidFill>
+              <a:srgbClr val="22C55E"/>
+            </a:solidFill>
+          </a:ln>
+        </p:spPr>
+        <p:style>
+          <a:lnRef idx="2">
+            <a:schemeClr val="accent1"/>
+          </a:lnRef>
+          <a:fillRef idx="0">
+            <a:schemeClr val="accent1"/>
+          </a:fillRef>
+          <a:effectRef idx="1">
+            <a:schemeClr val="accent1"/>
+          </a:effectRef>
+          <a:fontRef idx="minor">
+            <a:schemeClr val="tx1"/>
+          </a:fontRef>
+        </p:style>
+      </p:cxnSp>
+      <p:sp>
+        <p:nvSpPr>
+          <p:cNvPr id="21" name="Rounded Rectangle 20"/>
+          <p:cNvSpPr/>
+          <p:nvPr/>
+        </p:nvSpPr>
+        <p:spPr>
+          <a:xfrm>
+            <a:off x="411480" y="3547872"/>
+            <a:ext cx="2697480" cy="420624"/>
+          </a:xfrm>
+          <a:prstGeom prst="roundRect">
+            <a:avLst/>
+          </a:prstGeom>
+          <a:solidFill>
+            <a:srgbClr val="1F2A44"/>
+          </a:solidFill>
+          <a:ln>
+            <a:noFill/>
+          </a:ln>
+          <a:effectLst/>
+        </p:spPr>
+        <p:style>
+          <a:lnRef idx="1">
+            <a:schemeClr val="accent1"/>
+          </a:lnRef>
+          <a:fillRef idx="3">
+            <a:schemeClr val="accent1"/>
+          </a:fillRef>
+          <a:effectRef idx="2">
+            <a:schemeClr val="accent1"/>
+          </a:effectRef>
+          <a:fontRef idx="minor">
+            <a:schemeClr val="lt1"/>
+          </a:fontRef>
+        </p:style>
+        <p:txBody>
+          <a:bodyPr rtlCol="0" anchor="ctr" wrap="square" lIns="45720" rIns="45720" tIns="18288" bIns="18288"/>
+          <a:lstStyle/>
+          <a:p>
+            <a:pPr algn="ctr"/>
+            <a:r>
+              <a:rPr sz="850" b="1">
+                <a:solidFill>
+                  <a:srgbClr val="F1F5F9"/>
+                </a:solidFill>
+                <a:latin typeface="Arial"/>
+              </a:rPr>
+              <a:t>Simulated world</a:t>
+            </a:r>
+          </a:p>
+          <a:p>
+            <a:pPr algn="ctr"/>
+            <a:r>
+              <a:rPr sz="650">
+                <a:solidFill>
+                  <a:srgbClr val="94A3B8"/>
+                </a:solidFill>
+                <a:latin typeface="Arial"/>
+              </a:rPr>
+              <a:t>clock · motion · telemetry</a:t>
+            </a:r>
+          </a:p>
+        </p:txBody>
+      </p:sp>
+      <p:sp>
+        <p:nvSpPr>
+          <p:cNvPr id="22" name="Rounded Rectangle 21"/>
+          <p:cNvSpPr/>
+          <p:nvPr/>
+        </p:nvSpPr>
+        <p:spPr>
+          <a:xfrm>
+            <a:off x="3246120" y="3547872"/>
+            <a:ext cx="2697480" cy="420624"/>
+          </a:xfrm>
+          <a:prstGeom prst="roundRect">
+            <a:avLst/>
           </a:prstGeom>
           <a:solidFill>
             <a:srgbClr val="2A2560"/>
           </a:solidFill>
+          <a:ln>
+            <a:noFill/>
+          </a:ln>
+          <a:effectLst/>
+        </p:spPr>
+        <p:style>
+          <a:lnRef idx="1">
+            <a:schemeClr val="accent1"/>
+          </a:lnRef>
+          <a:fillRef idx="3">
+            <a:schemeClr val="accent1"/>
+          </a:fillRef>
+          <a:effectRef idx="2">
+            <a:schemeClr val="accent1"/>
+          </a:effectRef>
+          <a:fontRef idx="minor">
+            <a:schemeClr val="lt1"/>
+          </a:fontRef>
+        </p:style>
+        <p:txBody>
+          <a:bodyPr rtlCol="0" anchor="ctr" wrap="square" lIns="45720" rIns="45720" tIns="18288" bIns="18288"/>
+          <a:lstStyle/>
+          <a:p>
+            <a:pPr algn="ctr"/>
+            <a:r>
+              <a:rPr sz="850" b="1">
+                <a:solidFill>
+                  <a:srgbClr val="F1F5F9"/>
+                </a:solidFill>
+                <a:latin typeface="Arial"/>
+              </a:rPr>
+              <a:t>watsonx.ai</a:t>
+            </a:r>
+          </a:p>
+          <a:p>
+            <a:pPr algn="ctr"/>
+            <a:r>
+              <a:rPr sz="650">
+                <a:solidFill>
+                  <a:srgbClr val="94A3B8"/>
+                </a:solidFill>
+                <a:latin typeface="Arial"/>
+              </a:rPr>
+              <a:t>explains — never decides</a:t>
+            </a:r>
+          </a:p>
+        </p:txBody>
+      </p:sp>
+      <p:sp>
+        <p:nvSpPr>
+          <p:cNvPr id="23" name="Rounded Rectangle 22"/>
+          <p:cNvSpPr/>
+          <p:nvPr/>
+        </p:nvSpPr>
+        <p:spPr>
+          <a:xfrm>
+            <a:off x="6080760" y="3547872"/>
+            <a:ext cx="2651760" cy="420624"/>
+          </a:xfrm>
+          <a:prstGeom prst="roundRect">
+            <a:avLst/>
+          </a:prstGeom>
+          <a:solidFill>
+            <a:srgbClr val="1F2A44"/>
+          </a:solidFill>
+          <a:ln w="15875">
+            <a:solidFill>
+              <a:srgbClr val="22C55E"/>
+            </a:solidFill>
+          </a:ln>
+          <a:effectLst/>
+        </p:spPr>
+        <p:style>
+          <a:lnRef idx="1">
+            <a:schemeClr val="accent1"/>
+          </a:lnRef>
+          <a:fillRef idx="3">
+            <a:schemeClr val="accent1"/>
+          </a:fillRef>
+          <a:effectRef idx="2">
+            <a:schemeClr val="accent1"/>
+          </a:effectRef>
+          <a:fontRef idx="minor">
+            <a:schemeClr val="lt1"/>
+          </a:fontRef>
+        </p:style>
+        <p:txBody>
+          <a:bodyPr rtlCol="0" anchor="ctr" wrap="square" lIns="45720" rIns="45720" tIns="18288" bIns="18288"/>
+          <a:lstStyle/>
+          <a:p>
+            <a:pPr algn="ctr"/>
+            <a:r>
+              <a:rPr sz="850" b="1">
+                <a:solidFill>
+                  <a:srgbClr val="F1F5F9"/>
+                </a:solidFill>
+                <a:latin typeface="Arial"/>
+              </a:rPr>
+              <a:t>Hash-chained audit</a:t>
+            </a:r>
+          </a:p>
+          <a:p>
+            <a:pPr algn="ctr"/>
+            <a:r>
+              <a:rPr sz="650">
+                <a:solidFill>
+                  <a:srgbClr val="94A3B8"/>
+                </a:solidFill>
+                <a:latin typeface="Arial"/>
+              </a:rPr>
+              <a:t>verifiable on screen</a:t>
+            </a:r>
+          </a:p>
+        </p:txBody>
+      </p:sp>
+      <p:cxnSp>
+        <p:nvCxnSpPr>
+          <p:cNvPr id="24" name="Connector 23"/>
+          <p:cNvCxnSpPr/>
+          <p:nvPr/>
+        </p:nvCxnSpPr>
+        <p:spPr>
+          <a:xfrm flipV="1">
+            <a:off x="1755648" y="3355848"/>
+            <a:ext cx="0" cy="192024"/>
+          </a:xfrm>
+          <a:prstGeom prst="line">
+            <a:avLst/>
+          </a:prstGeom>
+          <a:ln w="12700">
+            <a:solidFill>
+              <a:srgbClr val="64748B"/>
+            </a:solidFill>
+          </a:ln>
+        </p:spPr>
+        <p:style>
+          <a:lnRef idx="2">
+            <a:schemeClr val="accent1"/>
+          </a:lnRef>
+          <a:fillRef idx="0">
+            <a:schemeClr val="accent1"/>
+          </a:fillRef>
+          <a:effectRef idx="1">
+            <a:schemeClr val="accent1"/>
+          </a:effectRef>
+          <a:fontRef idx="minor">
+            <a:schemeClr val="tx1"/>
+          </a:fontRef>
+        </p:style>
+      </p:cxnSp>
+      <p:cxnSp>
+        <p:nvCxnSpPr>
+          <p:cNvPr id="25" name="Connector 24"/>
+          <p:cNvCxnSpPr/>
+          <p:nvPr/>
+        </p:nvCxnSpPr>
+        <p:spPr>
+          <a:xfrm>
+            <a:off x="4590288" y="3355848"/>
+            <a:ext cx="0" cy="192024"/>
+          </a:xfrm>
+          <a:prstGeom prst="line">
+            <a:avLst/>
+          </a:prstGeom>
           <a:ln w="12700">
             <a:solidFill>
               <a:srgbClr val="2A2560"/>
             </a:solidFill>
-            <a:prstDash val="solid"/>
+            <a:prstDash val="dash"/>
           </a:ln>
         </p:spPr>
-      </p:sp>
-      <p:sp>
-        <p:nvSpPr>
-          <p:cNvPr id="10" name="Text 8"/>
-          <p:cNvSpPr txBox="1"/>
-          <p:nvPr/>
-        </p:nvSpPr>
-        <p:spPr>
-          <a:xfrm>
-            <a:off x="3931920" y="1280160"/>
-            <a:ext cx="1280160" cy="548640"/>
-          </a:xfrm>
-          <a:prstGeom prst="rect">
-            <a:avLst/>
-          </a:prstGeom>
-          <a:noFill/>
-          <a:ln/>
-        </p:spPr>
-        <p:txBody>
-          <a:bodyPr wrap="square" lIns="0" tIns="0" rIns="0" bIns="0" rtlCol="0" anchor="ctr"/>
-          <a:lstStyle/>
-          <a:p>
-            <a:pPr marL="0" indent="0" algn="ctr">
-              <a:buNone/>
-            </a:pPr>
-            <a:r>
-              <a:rPr lang="en-US" sz="1050" b="1" dirty="0">
-                <a:solidFill>
-                  <a:srgbClr val="DDD6FE"/>
-                </a:solidFill>
-                <a:latin typeface="Calibri" pitchFamily="34" charset="0"/>
-                <a:ea typeface="Calibri" pitchFamily="34" charset="-122"/>
-                <a:cs typeface="Calibri" pitchFamily="34" charset="-120"/>
-              </a:rPr>
-              <a:t>watsonx (Granite-ready) explains only</a:t>
-            </a:r>
-            <a:endParaRPr lang="en-US" sz="1050" dirty="0"/>
-          </a:p>
-        </p:txBody>
-      </p:sp>
-      <p:sp>
-        <p:nvSpPr>
-          <p:cNvPr id="11" name="Shape 9"/>
-          <p:cNvSpPr/>
-          <p:nvPr/>
-        </p:nvSpPr>
-        <p:spPr>
-          <a:xfrm>
-            <a:off x="1865376" y="1554480"/>
-            <a:ext cx="274320" cy="0"/>
+        <p:style>
+          <a:lnRef idx="2">
+            <a:schemeClr val="accent1"/>
+          </a:lnRef>
+          <a:fillRef idx="0">
+            <a:schemeClr val="accent1"/>
+          </a:fillRef>
+          <a:effectRef idx="1">
+            <a:schemeClr val="accent1"/>
+          </a:effectRef>
+          <a:fontRef idx="minor">
+            <a:schemeClr val="tx1"/>
+          </a:fontRef>
+        </p:style>
+      </p:cxnSp>
+      <p:cxnSp>
+        <p:nvCxnSpPr>
+          <p:cNvPr id="26" name="Connector 25"/>
+          <p:cNvCxnSpPr/>
+          <p:nvPr/>
+        </p:nvCxnSpPr>
+        <p:spPr>
+          <a:xfrm>
+            <a:off x="7406640" y="3355848"/>
+            <a:ext cx="0" cy="192024"/>
           </a:xfrm>
           <a:prstGeom prst="line">
             <a:avLst/>
           </a:prstGeom>
-          <a:noFill/>
-          <a:ln w="15875">
-            <a:solidFill>
-              <a:srgbClr val="94A3B8"/>
-            </a:solidFill>
-            <a:prstDash val="solid"/>
-            <a:tailEnd type="triangle"/>
-          </a:ln>
-        </p:spPr>
-      </p:sp>
-      <p:sp>
-        <p:nvSpPr>
-          <p:cNvPr id="12" name="Shape 10"/>
-          <p:cNvSpPr/>
-          <p:nvPr/>
-        </p:nvSpPr>
-        <p:spPr>
-          <a:xfrm>
-            <a:off x="3579876" y="1554480"/>
-            <a:ext cx="274320" cy="0"/>
-          </a:xfrm>
-          <a:prstGeom prst="line">
-            <a:avLst/>
-          </a:prstGeom>
-          <a:noFill/>
-          <a:ln w="15875">
-            <a:solidFill>
-              <a:srgbClr val="94A3B8"/>
-            </a:solidFill>
-            <a:prstDash val="solid"/>
-            <a:tailEnd type="triangle"/>
-          </a:ln>
-        </p:spPr>
-      </p:sp>
-      <p:sp>
-        <p:nvSpPr>
-          <p:cNvPr id="13" name="Shape 11"/>
-          <p:cNvSpPr/>
-          <p:nvPr/>
-        </p:nvSpPr>
-        <p:spPr>
-          <a:xfrm>
-            <a:off x="457200" y="2103120"/>
-            <a:ext cx="1371600" cy="548640"/>
-          </a:xfrm>
-          <a:prstGeom prst="roundRect">
-            <a:avLst>
-              <a:gd name="adj" fmla="val 10000"/>
-            </a:avLst>
-          </a:prstGeom>
-          <a:solidFill>
-            <a:srgbClr val="1F2A44"/>
-          </a:solidFill>
           <a:ln w="12700">
             <a:solidFill>
-              <a:srgbClr val="1F2A44"/>
+              <a:srgbClr val="22C55E"/>
             </a:solidFill>
-            <a:prstDash val="solid"/>
           </a:ln>
         </p:spPr>
-      </p:sp>
-      <p:sp>
-        <p:nvSpPr>
-          <p:cNvPr id="14" name="Text 12"/>
+        <p:style>
+          <a:lnRef idx="2">
+            <a:schemeClr val="accent1"/>
+          </a:lnRef>
+          <a:fillRef idx="0">
+            <a:schemeClr val="accent1"/>
+          </a:fillRef>
+          <a:effectRef idx="1">
+            <a:schemeClr val="accent1"/>
+          </a:effectRef>
+          <a:fontRef idx="minor">
+            <a:schemeClr val="tx1"/>
+          </a:fontRef>
+        </p:style>
+      </p:cxnSp>
+      <p:sp>
+        <p:nvSpPr>
+          <p:cNvPr id="27" name="TextBox 26"/>
           <p:cNvSpPr txBox="1"/>
           <p:nvPr/>
         </p:nvSpPr>
         <p:spPr>
           <a:xfrm>
-            <a:off x="502920" y="2103120"/>
-            <a:ext cx="1280160" cy="548640"/>
+            <a:off x="3246120" y="3986784"/>
+            <a:ext cx="2743200" cy="182880"/>
           </a:xfrm>
           <a:prstGeom prst="rect">
             <a:avLst/>
           </a:prstGeom>
           <a:noFill/>
-          <a:ln/>
-        </p:spPr>
-        <p:txBody>
-          <a:bodyPr wrap="square" lIns="0" tIns="0" rIns="0" bIns="0" rtlCol="0" anchor="ctr"/>
-          <a:lstStyle/>
-          <a:p>
-            <a:pPr marL="0" indent="0" algn="ctr">
-              <a:buNone/>
-            </a:pPr>
-            <a:r>
-              <a:rPr lang="en-US" sz="1050" b="1" dirty="0">
-                <a:solidFill>
-                  <a:srgbClr val="CBD5E1"/>
-                </a:solidFill>
-                <a:latin typeface="Calibri" pitchFamily="34" charset="0"/>
-                <a:ea typeface="Calibri" pitchFamily="34" charset="-122"/>
-                <a:cs typeface="Calibri" pitchFamily="34" charset="-120"/>
-              </a:rPr>
-              <a:t>Disruption / headline</a:t>
-            </a:r>
-            <a:endParaRPr lang="en-US" sz="1050" dirty="0"/>
-          </a:p>
-        </p:txBody>
-      </p:sp>
-      <p:sp>
-        <p:nvSpPr>
-          <p:cNvPr id="15" name="Shape 13"/>
-          <p:cNvSpPr/>
-          <p:nvPr/>
-        </p:nvSpPr>
-        <p:spPr>
-          <a:xfrm>
-            <a:off x="1865376" y="2377440"/>
-            <a:ext cx="274320" cy="0"/>
-          </a:xfrm>
-          <a:prstGeom prst="line">
+        </p:spPr>
+        <p:txBody>
+          <a:bodyPr wrap="square">
+            <a:spAutoFit/>
+          </a:bodyPr>
+          <a:lstStyle/>
+          <a:p>
+            <a:pPr algn="l"/>
+            <a:r>
+              <a:rPr sz="600" b="0">
+                <a:solidFill>
+                  <a:srgbClr val="64748B"/>
+                </a:solidFill>
+                <a:latin typeface="Arial"/>
+              </a:rPr>
+              <a:t>dashed = after the decision is made</a:t>
+            </a:r>
+          </a:p>
+        </p:txBody>
+      </p:sp>
+      <p:sp>
+        <p:nvSpPr>
+          <p:cNvPr id="28" name="TextBox 27"/>
+          <p:cNvSpPr txBox="1"/>
+          <p:nvPr/>
+        </p:nvSpPr>
+        <p:spPr>
+          <a:xfrm>
+            <a:off x="411480" y="4224528"/>
+            <a:ext cx="8321040" cy="182880"/>
+          </a:xfrm>
+          <a:prstGeom prst="rect">
             <a:avLst/>
           </a:prstGeom>
           <a:noFill/>
-          <a:ln w="15875">
-            <a:solidFill>
-              <a:srgbClr val="94A3B8"/>
-            </a:solidFill>
-            <a:prstDash val="solid"/>
-            <a:tailEnd type="triangle"/>
-          </a:ln>
-        </p:spPr>
-      </p:sp>
-      <p:sp>
-        <p:nvSpPr>
-          <p:cNvPr id="16" name="Shape 14"/>
-          <p:cNvSpPr/>
-          <p:nvPr/>
-        </p:nvSpPr>
-        <p:spPr>
-          <a:xfrm>
-            <a:off x="2171700" y="2103120"/>
-            <a:ext cx="1371600" cy="548640"/>
-          </a:xfrm>
-          <a:prstGeom prst="roundRect">
-            <a:avLst>
-              <a:gd name="adj" fmla="val 10000"/>
-            </a:avLst>
-          </a:prstGeom>
-          <a:solidFill>
-            <a:srgbClr val="0E3A4A"/>
-          </a:solidFill>
-          <a:ln w="12700">
-            <a:solidFill>
-              <a:srgbClr val="0E3A4A"/>
-            </a:solidFill>
-            <a:prstDash val="solid"/>
-          </a:ln>
-        </p:spPr>
-      </p:sp>
-      <p:sp>
-        <p:nvSpPr>
-          <p:cNvPr id="17" name="Text 15"/>
+        </p:spPr>
+        <p:txBody>
+          <a:bodyPr wrap="square">
+            <a:spAutoFit/>
+          </a:bodyPr>
+          <a:lstStyle/>
+          <a:p>
+            <a:pPr algn="l"/>
+            <a:r>
+              <a:rPr sz="800" b="1">
+                <a:solidFill>
+                  <a:srgbClr val="F1F5F9"/>
+                </a:solidFill>
+                <a:latin typeface="Arial"/>
+              </a:rPr>
+              <a:t>Severity, disposition and the clock are computed. Pull the credentials and every number on screen is identical.</a:t>
+            </a:r>
+          </a:p>
+        </p:txBody>
+      </p:sp>
+      <p:sp>
+        <p:nvSpPr>
+          <p:cNvPr id="29" name="TextBox 28"/>
           <p:cNvSpPr txBox="1"/>
           <p:nvPr/>
         </p:nvSpPr>
         <p:spPr>
           <a:xfrm>
-            <a:off x="2217420" y="2103120"/>
-            <a:ext cx="1280160" cy="548640"/>
+            <a:off x="411480" y="4434840"/>
+            <a:ext cx="8321040" cy="182880"/>
           </a:xfrm>
           <a:prstGeom prst="rect">
             <a:avLst/>
           </a:prstGeom>
           <a:noFill/>
-          <a:ln/>
-        </p:spPr>
-        <p:txBody>
-          <a:bodyPr wrap="square" lIns="0" tIns="0" rIns="0" bIns="0" rtlCol="0" anchor="ctr"/>
-          <a:lstStyle/>
-          <a:p>
-            <a:pPr marL="0" indent="0" algn="ctr">
-              <a:buNone/>
-            </a:pPr>
-            <a:r>
-              <a:rPr lang="en-US" sz="1050" b="1" dirty="0">
-                <a:solidFill>
-                  <a:srgbClr val="A5F3FC"/>
-                </a:solidFill>
-                <a:latin typeface="Calibri" pitchFamily="34" charset="0"/>
-                <a:ea typeface="Calibri" pitchFamily="34" charset="-122"/>
-                <a:cs typeface="Calibri" pitchFamily="34" charset="-120"/>
-              </a:rPr>
-              <a:t>Remaining-path impact</a:t>
-            </a:r>
-            <a:endParaRPr lang="en-US" sz="1050" dirty="0"/>
-          </a:p>
-        </p:txBody>
-      </p:sp>
-      <p:sp>
-        <p:nvSpPr>
-          <p:cNvPr id="18" name="Shape 16"/>
-          <p:cNvSpPr/>
-          <p:nvPr/>
-        </p:nvSpPr>
-        <p:spPr>
-          <a:xfrm>
-            <a:off x="3579876" y="2377440"/>
-            <a:ext cx="274320" cy="0"/>
-          </a:xfrm>
-          <a:prstGeom prst="line">
+        </p:spPr>
+        <p:txBody>
+          <a:bodyPr wrap="square">
+            <a:spAutoFit/>
+          </a:bodyPr>
+          <a:lstStyle/>
+          <a:p>
+            <a:pPr algn="l"/>
+            <a:r>
+              <a:rPr sz="750" b="0">
+                <a:solidFill>
+                  <a:srgbClr val="94A3B8"/>
+                </a:solidFill>
+                <a:latin typeface="Arial"/>
+              </a:rPr>
+              <a:t>IBM Bob operates the tower through 12 MCP tools over Streamable HTTP — and is refused when it tries to commit.</a:t>
+            </a:r>
+          </a:p>
+        </p:txBody>
+      </p:sp>
+      <p:sp>
+        <p:nvSpPr>
+          <p:cNvPr id="30" name="TextBox 29"/>
+          <p:cNvSpPr txBox="1"/>
+          <p:nvPr/>
+        </p:nvSpPr>
+        <p:spPr>
+          <a:xfrm>
+            <a:off x="411480" y="4736592"/>
+            <a:ext cx="8321040" cy="182880"/>
+          </a:xfrm>
+          <a:prstGeom prst="rect">
             <a:avLst/>
           </a:prstGeom>
           <a:noFill/>
-          <a:ln w="15875">
-            <a:solidFill>
-              <a:srgbClr val="94A3B8"/>
-            </a:solidFill>
-            <a:prstDash val="solid"/>
-            <a:tailEnd type="triangle"/>
-          </a:ln>
-        </p:spPr>
-      </p:sp>
-      <p:sp>
-        <p:nvSpPr>
-          <p:cNvPr id="19" name="Shape 17"/>
-          <p:cNvSpPr/>
-          <p:nvPr/>
-        </p:nvSpPr>
-        <p:spPr>
-          <a:xfrm>
-            <a:off x="3886200" y="2103120"/>
-            <a:ext cx="1371600" cy="548640"/>
-          </a:xfrm>
-          <a:prstGeom prst="roundRect">
-            <a:avLst>
-              <a:gd name="adj" fmla="val 10000"/>
-            </a:avLst>
-          </a:prstGeom>
-          <a:solidFill>
-            <a:srgbClr val="0E3A4A"/>
-          </a:solidFill>
-          <a:ln w="12700">
-            <a:solidFill>
-              <a:srgbClr val="0E3A4A"/>
-            </a:solidFill>
-            <a:prstDash val="solid"/>
-          </a:ln>
-        </p:spPr>
-      </p:sp>
-      <p:sp>
-        <p:nvSpPr>
-          <p:cNvPr id="20" name="Text 18"/>
-          <p:cNvSpPr txBox="1"/>
-          <p:nvPr/>
-        </p:nvSpPr>
-        <p:spPr>
-          <a:xfrm>
-            <a:off x="3931920" y="2103120"/>
-            <a:ext cx="1280160" cy="548640"/>
-          </a:xfrm>
-          <a:prstGeom prst="rect">
-            <a:avLst/>
-          </a:prstGeom>
-          <a:noFill/>
-          <a:ln/>
-        </p:spPr>
-        <p:txBody>
-          <a:bodyPr wrap="square" lIns="0" tIns="0" rIns="0" bIns="0" rtlCol="0" anchor="ctr"/>
-          <a:lstStyle/>
-          <a:p>
-            <a:pPr marL="0" indent="0" algn="ctr">
-              <a:buNone/>
-            </a:pPr>
-            <a:r>
-              <a:rPr lang="en-US" sz="1050" b="1" dirty="0">
-                <a:solidFill>
-                  <a:srgbClr val="A5F3FC"/>
-                </a:solidFill>
-                <a:latin typeface="Calibri" pitchFamily="34" charset="0"/>
-                <a:ea typeface="Calibri" pitchFamily="34" charset="-122"/>
-                <a:cs typeface="Calibri" pitchFamily="34" charset="-120"/>
-              </a:rPr>
-              <a:t>Viability clock</a:t>
-            </a:r>
-            <a:endParaRPr lang="en-US" sz="1050" dirty="0"/>
-          </a:p>
-        </p:txBody>
-      </p:sp>
-      <p:sp>
-        <p:nvSpPr>
-          <p:cNvPr id="21" name="Shape 19"/>
-          <p:cNvSpPr/>
-          <p:nvPr/>
-        </p:nvSpPr>
-        <p:spPr>
-          <a:xfrm>
-            <a:off x="5294376" y="2377440"/>
-            <a:ext cx="274320" cy="0"/>
-          </a:xfrm>
-          <a:prstGeom prst="line">
-            <a:avLst/>
-          </a:prstGeom>
-          <a:noFill/>
-          <a:ln w="15875">
-            <a:solidFill>
-              <a:srgbClr val="94A3B8"/>
-            </a:solidFill>
-            <a:prstDash val="solid"/>
-            <a:tailEnd type="triangle"/>
-          </a:ln>
-        </p:spPr>
-      </p:sp>
-      <p:sp>
-        <p:nvSpPr>
-          <p:cNvPr id="22" name="Shape 20"/>
-          <p:cNvSpPr/>
-          <p:nvPr/>
-        </p:nvSpPr>
-        <p:spPr>
-          <a:xfrm>
-            <a:off x="5600700" y="2103120"/>
-            <a:ext cx="1371600" cy="548640"/>
-          </a:xfrm>
-          <a:prstGeom prst="roundRect">
-            <a:avLst>
-              <a:gd name="adj" fmla="val 10000"/>
-            </a:avLst>
-          </a:prstGeom>
-          <a:solidFill>
-            <a:srgbClr val="0E3A4A"/>
-          </a:solidFill>
-          <a:ln w="12700">
-            <a:solidFill>
-              <a:srgbClr val="0E3A4A"/>
-            </a:solidFill>
-            <a:prstDash val="solid"/>
-          </a:ln>
-        </p:spPr>
-      </p:sp>
-      <p:sp>
-        <p:nvSpPr>
-          <p:cNvPr id="23" name="Text 21"/>
-          <p:cNvSpPr txBox="1"/>
-          <p:nvPr/>
-        </p:nvSpPr>
-        <p:spPr>
-          <a:xfrm>
-            <a:off x="5646420" y="2103120"/>
-            <a:ext cx="1280160" cy="548640"/>
-          </a:xfrm>
-          <a:prstGeom prst="rect">
-            <a:avLst/>
-          </a:prstGeom>
-          <a:noFill/>
-          <a:ln/>
-        </p:spPr>
-        <p:txBody>
-          <a:bodyPr wrap="square" lIns="0" tIns="0" rIns="0" bIns="0" rtlCol="0" anchor="ctr"/>
-          <a:lstStyle/>
-          <a:p>
-            <a:pPr marL="0" indent="0" algn="ctr">
-              <a:buNone/>
-            </a:pPr>
-            <a:r>
-              <a:rPr lang="en-US" sz="1050" b="1" dirty="0">
-                <a:solidFill>
-                  <a:srgbClr val="A5F3FC"/>
-                </a:solidFill>
-                <a:latin typeface="Calibri" pitchFamily="34" charset="0"/>
-                <a:ea typeface="Calibri" pitchFamily="34" charset="-122"/>
-                <a:cs typeface="Calibri" pitchFamily="34" charset="-120"/>
-              </a:rPr>
-              <a:t>Graph router + landed cost</a:t>
-            </a:r>
-            <a:endParaRPr lang="en-US" sz="1050" dirty="0"/>
-          </a:p>
-        </p:txBody>
-      </p:sp>
-      <p:sp>
-        <p:nvSpPr>
-          <p:cNvPr id="24" name="Shape 22"/>
-          <p:cNvSpPr/>
-          <p:nvPr/>
-        </p:nvSpPr>
-        <p:spPr>
-          <a:xfrm>
-            <a:off x="7008876" y="2377440"/>
-            <a:ext cx="274320" cy="0"/>
-          </a:xfrm>
-          <a:prstGeom prst="line">
-            <a:avLst/>
-          </a:prstGeom>
-          <a:noFill/>
-          <a:ln w="15875">
-            <a:solidFill>
-              <a:srgbClr val="94A3B8"/>
-            </a:solidFill>
-            <a:prstDash val="solid"/>
-            <a:tailEnd type="triangle"/>
-          </a:ln>
-        </p:spPr>
-      </p:sp>
-      <p:sp>
-        <p:nvSpPr>
-          <p:cNvPr id="25" name="Shape 23"/>
-          <p:cNvSpPr/>
-          <p:nvPr/>
-        </p:nvSpPr>
-        <p:spPr>
-          <a:xfrm>
-            <a:off x="7315200" y="2103120"/>
-            <a:ext cx="1371600" cy="548640"/>
-          </a:xfrm>
-          <a:prstGeom prst="roundRect">
-            <a:avLst>
-              <a:gd name="adj" fmla="val 10000"/>
-            </a:avLst>
-          </a:prstGeom>
-          <a:solidFill>
-            <a:srgbClr val="0E3A4A"/>
-          </a:solidFill>
-          <a:ln w="12700">
-            <a:solidFill>
-              <a:srgbClr val="0E3A4A"/>
-            </a:solidFill>
-            <a:prstDash val="solid"/>
-          </a:ln>
-        </p:spPr>
-      </p:sp>
-      <p:sp>
-        <p:nvSpPr>
-          <p:cNvPr id="26" name="Text 24"/>
-          <p:cNvSpPr txBox="1"/>
-          <p:nvPr/>
-        </p:nvSpPr>
-        <p:spPr>
-          <a:xfrm>
-            <a:off x="7360920" y="2103120"/>
-            <a:ext cx="1280160" cy="548640"/>
-          </a:xfrm>
-          <a:prstGeom prst="rect">
-            <a:avLst/>
-          </a:prstGeom>
-          <a:noFill/>
-          <a:ln/>
-        </p:spPr>
-        <p:txBody>
-          <a:bodyPr wrap="square" lIns="0" tIns="0" rIns="0" bIns="0" rtlCol="0" anchor="ctr"/>
-          <a:lstStyle/>
-          <a:p>
-            <a:pPr marL="0" indent="0" algn="ctr">
-              <a:buNone/>
-            </a:pPr>
-            <a:r>
-              <a:rPr lang="en-US" sz="1050" b="1" dirty="0">
-                <a:solidFill>
-                  <a:srgbClr val="A5F3FC"/>
-                </a:solidFill>
-                <a:latin typeface="Calibri" pitchFamily="34" charset="0"/>
-                <a:ea typeface="Calibri" pitchFamily="34" charset="-122"/>
-                <a:cs typeface="Calibri" pitchFamily="34" charset="-120"/>
-              </a:rPr>
-              <a:t>Fleet matcher (0–100)</a:t>
-            </a:r>
-            <a:endParaRPr lang="en-US" sz="1050" dirty="0"/>
-          </a:p>
-        </p:txBody>
-      </p:sp>
-      <p:sp>
-        <p:nvSpPr>
-          <p:cNvPr id="27" name="Shape 25"/>
-          <p:cNvSpPr/>
-          <p:nvPr/>
-        </p:nvSpPr>
-        <p:spPr>
-          <a:xfrm>
-            <a:off x="457200" y="2926080"/>
-            <a:ext cx="1371600" cy="548640"/>
-          </a:xfrm>
-          <a:prstGeom prst="roundRect">
-            <a:avLst>
-              <a:gd name="adj" fmla="val 10000"/>
-            </a:avLst>
-          </a:prstGeom>
-          <a:solidFill>
-            <a:srgbClr val="1F2A44"/>
-          </a:solidFill>
-          <a:ln w="12700">
-            <a:solidFill>
-              <a:srgbClr val="1F2A44"/>
-            </a:solidFill>
-            <a:prstDash val="solid"/>
-          </a:ln>
-        </p:spPr>
-      </p:sp>
-      <p:sp>
-        <p:nvSpPr>
-          <p:cNvPr id="28" name="Text 26"/>
-          <p:cNvSpPr txBox="1"/>
-          <p:nvPr/>
-        </p:nvSpPr>
-        <p:spPr>
-          <a:xfrm>
-            <a:off x="502920" y="2926080"/>
-            <a:ext cx="1280160" cy="548640"/>
-          </a:xfrm>
-          <a:prstGeom prst="rect">
-            <a:avLst/>
-          </a:prstGeom>
-          <a:noFill/>
-          <a:ln/>
-        </p:spPr>
-        <p:txBody>
-          <a:bodyPr wrap="square" lIns="0" tIns="0" rIns="0" bIns="0" rtlCol="0" anchor="ctr"/>
-          <a:lstStyle/>
-          <a:p>
-            <a:pPr marL="0" indent="0" algn="ctr">
-              <a:buNone/>
-            </a:pPr>
-            <a:r>
-              <a:rPr lang="en-US" sz="1050" b="1" dirty="0">
-                <a:solidFill>
-                  <a:srgbClr val="CBD5E1"/>
-                </a:solidFill>
-                <a:latin typeface="Calibri" pitchFamily="34" charset="0"/>
-                <a:ea typeface="Calibri" pitchFamily="34" charset="-122"/>
-                <a:cs typeface="Calibri" pitchFamily="34" charset="-120"/>
-              </a:rPr>
-              <a:t>IBM Bob</a:t>
-            </a:r>
-            <a:endParaRPr lang="en-US" sz="1050" dirty="0"/>
-          </a:p>
-        </p:txBody>
-      </p:sp>
-      <p:sp>
-        <p:nvSpPr>
-          <p:cNvPr id="29" name="Shape 27"/>
-          <p:cNvSpPr/>
-          <p:nvPr/>
-        </p:nvSpPr>
-        <p:spPr>
-          <a:xfrm>
-            <a:off x="2171700" y="2926080"/>
-            <a:ext cx="1371600" cy="548640"/>
-          </a:xfrm>
-          <a:prstGeom prst="roundRect">
-            <a:avLst>
-              <a:gd name="adj" fmla="val 10000"/>
-            </a:avLst>
-          </a:prstGeom>
-          <a:solidFill>
-            <a:srgbClr val="2A2560"/>
-          </a:solidFill>
-          <a:ln w="12700">
-            <a:solidFill>
-              <a:srgbClr val="2A2560"/>
-            </a:solidFill>
-            <a:prstDash val="solid"/>
-          </a:ln>
-        </p:spPr>
-      </p:sp>
-      <p:sp>
-        <p:nvSpPr>
-          <p:cNvPr id="30" name="Text 28"/>
-          <p:cNvSpPr txBox="1"/>
-          <p:nvPr/>
-        </p:nvSpPr>
-        <p:spPr>
-          <a:xfrm>
-            <a:off x="2217420" y="2926080"/>
-            <a:ext cx="1280160" cy="548640"/>
-          </a:xfrm>
-          <a:prstGeom prst="rect">
-            <a:avLst/>
-          </a:prstGeom>
-          <a:noFill/>
-          <a:ln/>
-        </p:spPr>
-        <p:txBody>
-          <a:bodyPr wrap="square" lIns="0" tIns="0" rIns="0" bIns="0" rtlCol="0" anchor="ctr"/>
-          <a:lstStyle/>
-          <a:p>
-            <a:pPr marL="0" indent="0" algn="ctr">
-              <a:buNone/>
-            </a:pPr>
-            <a:r>
-              <a:rPr lang="en-US" sz="1050" b="1" dirty="0">
-                <a:solidFill>
-                  <a:srgbClr val="DDD6FE"/>
-                </a:solidFill>
-                <a:latin typeface="Calibri" pitchFamily="34" charset="0"/>
-                <a:ea typeface="Calibri" pitchFamily="34" charset="-122"/>
-                <a:cs typeface="Calibri" pitchFamily="34" charset="-120"/>
-              </a:rPr>
-              <a:t>MCP over HTTP · 12 tools · commits refused</a:t>
-            </a:r>
-            <a:endParaRPr lang="en-US" sz="1050" dirty="0"/>
-          </a:p>
-        </p:txBody>
-      </p:sp>
-      <p:sp>
-        <p:nvSpPr>
-          <p:cNvPr id="31" name="Shape 29"/>
-          <p:cNvSpPr/>
-          <p:nvPr/>
-        </p:nvSpPr>
-        <p:spPr>
-          <a:xfrm>
-            <a:off x="1865376" y="3200400"/>
-            <a:ext cx="274320" cy="0"/>
-          </a:xfrm>
-          <a:prstGeom prst="line">
-            <a:avLst/>
-          </a:prstGeom>
-          <a:noFill/>
-          <a:ln w="15875">
-            <a:solidFill>
-              <a:srgbClr val="94A3B8"/>
-            </a:solidFill>
-            <a:prstDash val="solid"/>
-            <a:tailEnd type="triangle"/>
-          </a:ln>
-        </p:spPr>
-      </p:sp>
-      <p:sp>
-        <p:nvSpPr>
-          <p:cNvPr id="32" name="Shape 30"/>
-          <p:cNvSpPr/>
-          <p:nvPr/>
-        </p:nvSpPr>
-        <p:spPr>
-          <a:xfrm>
-            <a:off x="7315200" y="2926080"/>
-            <a:ext cx="1371600" cy="548640"/>
-          </a:xfrm>
-          <a:prstGeom prst="roundRect">
-            <a:avLst>
-              <a:gd name="adj" fmla="val 10000"/>
-            </a:avLst>
-          </a:prstGeom>
-          <a:solidFill>
-            <a:srgbClr val="2A2560"/>
-          </a:solidFill>
-          <a:ln w="12700">
-            <a:solidFill>
-              <a:srgbClr val="2A2560"/>
-            </a:solidFill>
-            <a:prstDash val="solid"/>
-          </a:ln>
-        </p:spPr>
-      </p:sp>
-      <p:sp>
-        <p:nvSpPr>
-          <p:cNvPr id="33" name="Text 31"/>
-          <p:cNvSpPr txBox="1"/>
-          <p:nvPr/>
-        </p:nvSpPr>
-        <p:spPr>
-          <a:xfrm>
-            <a:off x="7360920" y="2926080"/>
-            <a:ext cx="1280160" cy="548640"/>
-          </a:xfrm>
-          <a:prstGeom prst="rect">
-            <a:avLst/>
-          </a:prstGeom>
-          <a:noFill/>
-          <a:ln/>
-        </p:spPr>
-        <p:txBody>
-          <a:bodyPr wrap="square" lIns="0" tIns="0" rIns="0" bIns="0" rtlCol="0" anchor="ctr"/>
-          <a:lstStyle/>
-          <a:p>
-            <a:pPr marL="0" indent="0" algn="ctr">
-              <a:buNone/>
-            </a:pPr>
-            <a:r>
-              <a:rPr lang="en-US" sz="1050" b="1" dirty="0">
-                <a:solidFill>
-                  <a:srgbClr val="DDD6FE"/>
-                </a:solidFill>
-                <a:latin typeface="Calibri" pitchFamily="34" charset="0"/>
-                <a:ea typeface="Calibri" pitchFamily="34" charset="-122"/>
-                <a:cs typeface="Calibri" pitchFamily="34" charset="-120"/>
-              </a:rPr>
-              <a:t>Hash-chained audit</a:t>
-            </a:r>
-            <a:endParaRPr lang="en-US" sz="1050" dirty="0"/>
-          </a:p>
-        </p:txBody>
-      </p:sp>
-      <p:sp>
-        <p:nvSpPr>
-          <p:cNvPr id="34" name="Shape 32"/>
-          <p:cNvSpPr/>
-          <p:nvPr/>
-        </p:nvSpPr>
-        <p:spPr>
-          <a:xfrm>
-            <a:off x="8001000" y="2670048"/>
-            <a:ext cx="0" cy="256032"/>
-          </a:xfrm>
-          <a:prstGeom prst="line">
-            <a:avLst/>
-          </a:prstGeom>
-          <a:noFill/>
-          <a:ln w="15875">
-            <a:solidFill>
-              <a:srgbClr val="94A3B8"/>
-            </a:solidFill>
-            <a:prstDash val="solid"/>
-            <a:tailEnd type="triangle"/>
-          </a:ln>
-        </p:spPr>
-      </p:sp>
-      <p:sp>
-        <p:nvSpPr>
-          <p:cNvPr id="35" name="Shape 33"/>
-          <p:cNvSpPr/>
-          <p:nvPr/>
-        </p:nvSpPr>
-        <p:spPr>
-          <a:xfrm>
-            <a:off x="457200" y="3749040"/>
-            <a:ext cx="5394960" cy="868680"/>
-          </a:xfrm>
-          <a:prstGeom prst="roundRect">
-            <a:avLst>
-              <a:gd name="adj" fmla="val 8421"/>
-            </a:avLst>
-          </a:prstGeom>
-          <a:solidFill>
-            <a:srgbClr val="14213D"/>
-          </a:solidFill>
-          <a:ln w="12700">
-            <a:solidFill>
-              <a:srgbClr val="14213D"/>
-            </a:solidFill>
-            <a:prstDash val="solid"/>
-          </a:ln>
-        </p:spPr>
-      </p:sp>
-      <p:sp>
-        <p:nvSpPr>
-          <p:cNvPr id="36" name="Text 34"/>
-          <p:cNvSpPr txBox="1"/>
-          <p:nvPr/>
-        </p:nvSpPr>
-        <p:spPr>
-          <a:xfrm>
-            <a:off x="685800" y="3840480"/>
-            <a:ext cx="5029200" cy="365760"/>
-          </a:xfrm>
-          <a:prstGeom prst="rect">
-            <a:avLst/>
-          </a:prstGeom>
-          <a:noFill/>
-          <a:ln/>
-        </p:spPr>
-        <p:txBody>
-          <a:bodyPr wrap="square" lIns="0" tIns="0" rIns="0" bIns="0" rtlCol="0" anchor="t"/>
-          <a:lstStyle/>
-          <a:p>
-            <a:pPr marL="0" indent="0">
-              <a:buNone/>
-            </a:pPr>
-            <a:r>
-              <a:rPr lang="en-US" sz="1600" b="1" dirty="0">
-                <a:solidFill>
-                  <a:srgbClr val="F1F5F9"/>
-                </a:solidFill>
-                <a:latin typeface="Calibri" pitchFamily="34" charset="0"/>
-                <a:ea typeface="Calibri" pitchFamily="34" charset="-122"/>
-                <a:cs typeface="Calibri" pitchFamily="34" charset="-120"/>
-              </a:rPr>
-              <a:t>Engines are pure functions with an injected clock — 165 tests, no I/O, no wall-clock reads.</a:t>
-            </a:r>
-            <a:endParaRPr lang="en-US" sz="1600" dirty="0"/>
-          </a:p>
-        </p:txBody>
-      </p:sp>
-      <p:sp>
-        <p:nvSpPr>
-          <p:cNvPr id="37" name="Text 35"/>
-          <p:cNvSpPr txBox="1"/>
-          <p:nvPr/>
-        </p:nvSpPr>
-        <p:spPr>
-          <a:xfrm>
-            <a:off x="685800" y="4206240"/>
-            <a:ext cx="5029200" cy="274320"/>
-          </a:xfrm>
-          <a:prstGeom prst="rect">
-            <a:avLst/>
-          </a:prstGeom>
-          <a:noFill/>
-          <a:ln/>
-        </p:spPr>
-        <p:txBody>
-          <a:bodyPr wrap="square" lIns="0" tIns="0" rIns="0" bIns="0" rtlCol="0" anchor="t"/>
-          <a:lstStyle/>
-          <a:p>
-            <a:pPr marL="0" indent="0">
-              <a:buNone/>
-            </a:pPr>
-            <a:r>
-              <a:rPr lang="en-US" sz="1200" dirty="0">
-                <a:solidFill>
-                  <a:srgbClr val="94A3B8"/>
-                </a:solidFill>
-                <a:latin typeface="Calibri" pitchFamily="34" charset="0"/>
-                <a:ea typeface="Calibri" pitchFamily="34" charset="-122"/>
-                <a:cs typeface="Calibri" pitchFamily="34" charset="-120"/>
-              </a:rPr>
-              <a:t>The model never sets a severity, a clock value or a disposition.</a:t>
-            </a:r>
-            <a:endParaRPr lang="en-US" sz="1200" dirty="0"/>
-          </a:p>
-        </p:txBody>
-      </p:sp>
-      <p:sp>
-        <p:nvSpPr>
-          <p:cNvPr id="38" name="Shape 36"/>
-          <p:cNvSpPr/>
-          <p:nvPr/>
-        </p:nvSpPr>
-        <p:spPr>
-          <a:xfrm>
-            <a:off x="6217920" y="3794760"/>
-            <a:ext cx="201168" cy="182880"/>
-          </a:xfrm>
-          <a:prstGeom prst="roundRect">
-            <a:avLst>
-              <a:gd name="adj" fmla="val 20000"/>
-            </a:avLst>
-          </a:prstGeom>
-          <a:solidFill>
-            <a:srgbClr val="1F2A44"/>
-          </a:solidFill>
-          <a:ln w="12700">
-            <a:solidFill>
-              <a:srgbClr val="334155"/>
-            </a:solidFill>
-            <a:prstDash val="solid"/>
-          </a:ln>
-        </p:spPr>
-      </p:sp>
-      <p:sp>
-        <p:nvSpPr>
-          <p:cNvPr id="39" name="Text 37"/>
-          <p:cNvSpPr txBox="1"/>
-          <p:nvPr/>
-        </p:nvSpPr>
-        <p:spPr>
-          <a:xfrm>
-            <a:off x="6510528" y="3767328"/>
-            <a:ext cx="2103120" cy="237744"/>
-          </a:xfrm>
-          <a:prstGeom prst="rect">
-            <a:avLst/>
-          </a:prstGeom>
-          <a:noFill/>
-          <a:ln/>
-        </p:spPr>
-        <p:txBody>
-          <a:bodyPr wrap="square" lIns="0" tIns="0" rIns="0" bIns="0" rtlCol="0" anchor="ctr"/>
-          <a:lstStyle/>
-          <a:p>
-            <a:pPr marL="0" indent="0">
-              <a:buNone/>
-            </a:pPr>
-            <a:r>
-              <a:rPr lang="en-US" sz="1100" dirty="0">
-                <a:solidFill>
-                  <a:srgbClr val="CBD5E1"/>
-                </a:solidFill>
-                <a:latin typeface="Calibri" pitchFamily="34" charset="0"/>
-                <a:ea typeface="Calibri" pitchFamily="34" charset="-122"/>
-                <a:cs typeface="Calibri" pitchFamily="34" charset="-120"/>
-              </a:rPr>
-              <a:t>Input</a:t>
-            </a:r>
-            <a:endParaRPr lang="en-US" sz="1100" dirty="0"/>
-          </a:p>
-        </p:txBody>
-      </p:sp>
-      <p:sp>
-        <p:nvSpPr>
-          <p:cNvPr id="40" name="Shape 38"/>
-          <p:cNvSpPr/>
-          <p:nvPr/>
-        </p:nvSpPr>
-        <p:spPr>
-          <a:xfrm>
-            <a:off x="6217920" y="4069080"/>
-            <a:ext cx="201168" cy="182880"/>
-          </a:xfrm>
-          <a:prstGeom prst="roundRect">
-            <a:avLst>
-              <a:gd name="adj" fmla="val 20000"/>
-            </a:avLst>
-          </a:prstGeom>
-          <a:solidFill>
-            <a:srgbClr val="0E3A4A"/>
-          </a:solidFill>
-          <a:ln w="12700">
-            <a:solidFill>
-              <a:srgbClr val="0E3A4A"/>
-            </a:solidFill>
-            <a:prstDash val="solid"/>
-          </a:ln>
-        </p:spPr>
-      </p:sp>
-      <p:sp>
-        <p:nvSpPr>
-          <p:cNvPr id="41" name="Text 39"/>
-          <p:cNvSpPr txBox="1"/>
-          <p:nvPr/>
-        </p:nvSpPr>
-        <p:spPr>
-          <a:xfrm>
-            <a:off x="6510528" y="4041648"/>
-            <a:ext cx="2103120" cy="237744"/>
-          </a:xfrm>
-          <a:prstGeom prst="rect">
-            <a:avLst/>
-          </a:prstGeom>
-          <a:noFill/>
-          <a:ln/>
-        </p:spPr>
-        <p:txBody>
-          <a:bodyPr wrap="square" lIns="0" tIns="0" rIns="0" bIns="0" rtlCol="0" anchor="ctr"/>
-          <a:lstStyle/>
-          <a:p>
-            <a:pPr marL="0" indent="0">
-              <a:buNone/>
-            </a:pPr>
-            <a:r>
-              <a:rPr lang="en-US" sz="1100" dirty="0">
-                <a:solidFill>
-                  <a:srgbClr val="CBD5E1"/>
-                </a:solidFill>
-                <a:latin typeface="Calibri" pitchFamily="34" charset="0"/>
-                <a:ea typeface="Calibri" pitchFamily="34" charset="-122"/>
-                <a:cs typeface="Calibri" pitchFamily="34" charset="-120"/>
-              </a:rPr>
-              <a:t>Deterministic engine</a:t>
-            </a:r>
-            <a:endParaRPr lang="en-US" sz="1100" dirty="0"/>
-          </a:p>
-        </p:txBody>
-      </p:sp>
-      <p:sp>
-        <p:nvSpPr>
-          <p:cNvPr id="42" name="Shape 40"/>
-          <p:cNvSpPr/>
-          <p:nvPr/>
-        </p:nvSpPr>
-        <p:spPr>
-          <a:xfrm>
-            <a:off x="6217920" y="4343400"/>
-            <a:ext cx="201168" cy="182880"/>
-          </a:xfrm>
-          <a:prstGeom prst="roundRect">
-            <a:avLst>
-              <a:gd name="adj" fmla="val 20000"/>
-            </a:avLst>
-          </a:prstGeom>
-          <a:solidFill>
-            <a:srgbClr val="2A2560"/>
-          </a:solidFill>
-          <a:ln w="12700">
-            <a:solidFill>
-              <a:srgbClr val="2A2560"/>
-            </a:solidFill>
-            <a:prstDash val="solid"/>
-          </a:ln>
-        </p:spPr>
-      </p:sp>
-      <p:sp>
-        <p:nvSpPr>
-          <p:cNvPr id="43" name="Text 41"/>
-          <p:cNvSpPr txBox="1"/>
-          <p:nvPr/>
-        </p:nvSpPr>
-        <p:spPr>
-          <a:xfrm>
-            <a:off x="6510528" y="4315968"/>
-            <a:ext cx="2103120" cy="237744"/>
-          </a:xfrm>
-          <a:prstGeom prst="rect">
-            <a:avLst/>
-          </a:prstGeom>
-          <a:noFill/>
-          <a:ln/>
-        </p:spPr>
-        <p:txBody>
-          <a:bodyPr wrap="square" lIns="0" tIns="0" rIns="0" bIns="0" rtlCol="0" anchor="ctr"/>
-          <a:lstStyle/>
-          <a:p>
-            <a:pPr marL="0" indent="0">
-              <a:buNone/>
-            </a:pPr>
-            <a:r>
-              <a:rPr lang="en-US" sz="1100" dirty="0">
-                <a:solidFill>
-                  <a:srgbClr val="CBD5E1"/>
-                </a:solidFill>
-                <a:latin typeface="Calibri" pitchFamily="34" charset="0"/>
-                <a:ea typeface="Calibri" pitchFamily="34" charset="-122"/>
-                <a:cs typeface="Calibri" pitchFamily="34" charset="-120"/>
-              </a:rPr>
-              <a:t>watsonx.ai / AI layer</a:t>
-            </a:r>
-            <a:endParaRPr lang="en-US" sz="1100" dirty="0"/>
-          </a:p>
-        </p:txBody>
-      </p:sp>
-      <p:sp>
-        <p:nvSpPr>
-          <p:cNvPr id="44" name="Text 42"/>
-          <p:cNvSpPr txBox="1"/>
-          <p:nvPr/>
-        </p:nvSpPr>
-        <p:spPr>
-          <a:xfrm>
-            <a:off x="457200" y="4754880"/>
-            <a:ext cx="6858000" cy="228600"/>
-          </a:xfrm>
-          <a:prstGeom prst="rect">
-            <a:avLst/>
-          </a:prstGeom>
-          <a:noFill/>
-          <a:ln/>
-        </p:spPr>
-        <p:txBody>
-          <a:bodyPr wrap="square" lIns="0" tIns="0" rIns="0" bIns="0" rtlCol="0" anchor="t"/>
-          <a:lstStyle/>
-          <a:p>
-            <a:pPr marL="0" indent="0">
-              <a:buNone/>
-            </a:pPr>
-            <a:r>
-              <a:rPr lang="en-US" sz="950" dirty="0">
-                <a:solidFill>
-                  <a:srgbClr val="94A3B8"/>
-                </a:solidFill>
-                <a:latin typeface="Calibri" pitchFamily="34" charset="0"/>
-                <a:ea typeface="Calibri" pitchFamily="34" charset="-122"/>
-                <a:cs typeface="Calibri" pitchFamily="34" charset="-120"/>
+        </p:spPr>
+        <p:txBody>
+          <a:bodyPr wrap="square">
+            <a:spAutoFit/>
+          </a:bodyPr>
+          <a:lstStyle/>
+          <a:p>
+            <a:pPr algn="l"/>
+            <a:r>
+              <a:rPr sz="650" b="0">
+                <a:solidFill>
+                  <a:srgbClr val="64748B"/>
+                </a:solidFill>
+                <a:latin typeface="Arial"/>
               </a:rPr>
               <a:t>Next.js 16 · React 19 · Express 5 · Socket.IO · MongoDB 7 · @modelcontextprotocol/sdk · watsonx.ai</a:t>
             </a:r>
-            <a:endParaRPr lang="en-US" sz="950" dirty="0"/>
           </a:p>
         </p:txBody>
       </p:sp>

--- a/presentation/slides.pptx
+++ b/presentation/slides.pptx
@@ -4,16 +4,16 @@
   <p:sldMasterIdLst>
     <p:sldMasterId id="2147483648" r:id="rId1"/>
   </p:sldMasterIdLst>
+  <p:notesMasterIdLst>
+    <p:notesMasterId r:id="rId6"/>
+  </p:notesMasterIdLst>
   <p:sldIdLst>
     <p:sldId id="256" r:id="rId2"/>
     <p:sldId id="257" r:id="rId3"/>
     <p:sldId id="258" r:id="rId4"/>
     <p:sldId id="259" r:id="rId5"/>
   </p:sldIdLst>
-  <p:notesMasterIdLst>
-    <p:notesMasterId r:id="rId10"/>
-  </p:notesMasterIdLst>
-  <p:sldSz cx="9144000" cy="5143500"/>
+  <p:sldSz cx="9144000" cy="5143500" type="screen16x9"/>
   <p:notesSz cx="5143500" cy="9144000"/>
   <p:defaultTextStyle>
     <a:lvl1pPr marL="0" algn="l" defTabSz="914400" rtl="0" eaLnBrk="1" latinLnBrk="0" hangingPunct="1">
@@ -107,6 +107,11 @@
       </a:defRPr>
     </a:lvl9pPr>
   </p:defaultTextStyle>
+  <p:extLst>
+    <p:ext uri="{EFAFB233-063F-42B5-8137-9DF3F51BA10A}">
+      <p15:sldGuideLst xmlns:p15="http://schemas.microsoft.com/office/powerpoint/2012/main"/>
+    </p:ext>
+  </p:extLst>
 </p:presentation>
 </file>
 
@@ -132,234 +137,10 @@
           <a:chExt cx="0" cy="0"/>
         </a:xfrm>
       </p:grpSpPr>
-      <p:sp>
-        <p:nvSpPr>
-          <p:cNvPr id="2" name="Header Placeholder 1"/>
-          <p:cNvSpPr>
-            <a:spLocks noGrp="1"/>
-          </p:cNvSpPr>
-          <p:nvPr>
-            <p:ph type="hdr" sz="quarter"/>
-          </p:nvPr>
-        </p:nvSpPr>
-        <p:spPr>
-          <a:xfrm>
-            <a:off x="0" y="0"/>
-            <a:ext cx="2971800" cy="458788"/>
-          </a:xfrm>
-          <a:prstGeom prst="rect">
-            <a:avLst/>
-          </a:prstGeom>
-        </p:spPr>
-        <p:txBody>
-          <a:bodyPr vert="horz" lIns="91440" tIns="45720" rIns="91440" bIns="45720" rtlCol="0"/>
-          <a:lstStyle>
-            <a:lvl1pPr algn="l">
-              <a:defRPr sz="1200"/>
-            </a:lvl1pPr>
-          </a:lstStyle>
-          <a:p>
-            <a:endParaRPr lang="en-US"/>
-          </a:p>
-        </p:txBody>
-      </p:sp>
-      <p:sp>
-        <p:nvSpPr>
-          <p:cNvPr id="3" name="Date Placeholder 2"/>
-          <p:cNvSpPr>
-            <a:spLocks noGrp="1"/>
-          </p:cNvSpPr>
-          <p:nvPr>
-            <p:ph type="dt" idx="1"/>
-          </p:nvPr>
-        </p:nvSpPr>
-        <p:spPr>
-          <a:xfrm>
-            <a:off x="3884613" y="0"/>
-            <a:ext cx="2971800" cy="458788"/>
-          </a:xfrm>
-          <a:prstGeom prst="rect">
-            <a:avLst/>
-          </a:prstGeom>
-        </p:spPr>
-        <p:txBody>
-          <a:bodyPr vert="horz" lIns="91440" tIns="45720" rIns="91440" bIns="45720" rtlCol="0"/>
-          <a:lstStyle>
-            <a:lvl1pPr algn="r">
-              <a:defRPr sz="1200"/>
-            </a:lvl1pPr>
-          </a:lstStyle>
-          <a:p>
-            <a:fld id="{5282F153-3F37-0F45-9E97-73ACFA13230C}" type="datetimeFigureOut">
-              <a:rPr lang="en-US"/>
-              <a:t>7/23/19</a:t>
-            </a:fld>
-            <a:endParaRPr lang="en-US"/>
-          </a:p>
-        </p:txBody>
-      </p:sp>
-      <p:sp>
-        <p:nvSpPr>
-          <p:cNvPr id="4" name="Slide Image Placeholder 3"/>
-          <p:cNvSpPr>
-            <a:spLocks noGrp="1" noRot="1" noChangeAspect="1"/>
-          </p:cNvSpPr>
-          <p:nvPr>
-            <p:ph type="sldImg" idx="2"/>
-          </p:nvPr>
-        </p:nvSpPr>
-        <p:spPr>
-          <a:xfrm>
-            <a:off x="685800" y="1143000"/>
-            <a:ext cx="5486400" cy="3086100"/>
-          </a:xfrm>
-          <a:prstGeom prst="rect">
-            <a:avLst/>
-          </a:prstGeom>
-          <a:noFill/>
-          <a:ln w="12700">
-            <a:solidFill>
-              <a:prstClr val="black"/>
-            </a:solidFill>
-          </a:ln>
-        </p:spPr>
-        <p:txBody>
-          <a:bodyPr vert="horz" lIns="91440" tIns="45720" rIns="91440" bIns="45720" rtlCol="0" anchor="ctr"/>
-          <a:lstStyle/>
-          <a:p>
-            <a:endParaRPr lang="en-US"/>
-          </a:p>
-        </p:txBody>
-      </p:sp>
-      <p:sp>
-        <p:nvSpPr>
-          <p:cNvPr id="5" name="Notes Placeholder 4"/>
-          <p:cNvSpPr>
-            <a:spLocks noGrp="1"/>
-          </p:cNvSpPr>
-          <p:nvPr>
-            <p:ph type="body" sz="quarter" idx="3"/>
-          </p:nvPr>
-        </p:nvSpPr>
-        <p:spPr>
-          <a:xfrm>
-            <a:off x="685800" y="4400550"/>
-            <a:ext cx="5486400" cy="3600450"/>
-          </a:xfrm>
-          <a:prstGeom prst="rect">
-            <a:avLst/>
-          </a:prstGeom>
-        </p:spPr>
-        <p:txBody>
-          <a:bodyPr vert="horz" lIns="91440" tIns="45720" rIns="91440" bIns="45720" rtlCol="0"/>
-          <a:lstStyle/>
-          <a:p>
-            <a:pPr lvl="0"/>
-            <a:r>
-              <a:rPr lang="en-US"/>
-              <a:t>Click to edit Master text styles</a:t>
-            </a:r>
-          </a:p>
-          <a:p>
-            <a:pPr lvl="1"/>
-            <a:r>
-              <a:rPr lang="en-US"/>
-              <a:t>Second level</a:t>
-            </a:r>
-          </a:p>
-          <a:p>
-            <a:pPr lvl="2"/>
-            <a:r>
-              <a:rPr lang="en-US"/>
-              <a:t>Third level</a:t>
-            </a:r>
-          </a:p>
-          <a:p>
-            <a:pPr lvl="3"/>
-            <a:r>
-              <a:rPr lang="en-US"/>
-              <a:t>Fourth level</a:t>
-            </a:r>
-          </a:p>
-          <a:p>
-            <a:pPr lvl="4"/>
-            <a:r>
-              <a:rPr lang="en-US"/>
-              <a:t>Fifth level</a:t>
-            </a:r>
-          </a:p>
-        </p:txBody>
-      </p:sp>
-      <p:sp>
-        <p:nvSpPr>
-          <p:cNvPr id="6" name="Footer Placeholder 5"/>
-          <p:cNvSpPr>
-            <a:spLocks noGrp="1"/>
-          </p:cNvSpPr>
-          <p:nvPr>
-            <p:ph type="ftr" sz="quarter" idx="4"/>
-          </p:nvPr>
-        </p:nvSpPr>
-        <p:spPr>
-          <a:xfrm>
-            <a:off x="0" y="8685213"/>
-            <a:ext cx="2971800" cy="458787"/>
-          </a:xfrm>
-          <a:prstGeom prst="rect">
-            <a:avLst/>
-          </a:prstGeom>
-        </p:spPr>
-        <p:txBody>
-          <a:bodyPr vert="horz" lIns="91440" tIns="45720" rIns="91440" bIns="45720" rtlCol="0" anchor="b"/>
-          <a:lstStyle>
-            <a:lvl1pPr algn="l">
-              <a:defRPr sz="1200"/>
-            </a:lvl1pPr>
-          </a:lstStyle>
-          <a:p>
-            <a:endParaRPr lang="en-US"/>
-          </a:p>
-        </p:txBody>
-      </p:sp>
-      <p:sp>
-        <p:nvSpPr>
-          <p:cNvPr id="7" name="Slide Number Placeholder 6"/>
-          <p:cNvSpPr>
-            <a:spLocks noGrp="1"/>
-          </p:cNvSpPr>
-          <p:nvPr>
-            <p:ph type="sldNum" sz="quarter" idx="5"/>
-          </p:nvPr>
-        </p:nvSpPr>
-        <p:spPr>
-          <a:xfrm>
-            <a:off x="3884613" y="8685213"/>
-            <a:ext cx="2971800" cy="458787"/>
-          </a:xfrm>
-          <a:prstGeom prst="rect">
-            <a:avLst/>
-          </a:prstGeom>
-        </p:spPr>
-        <p:txBody>
-          <a:bodyPr vert="horz" lIns="91440" tIns="45720" rIns="91440" bIns="45720" rtlCol="0" anchor="b"/>
-          <a:lstStyle>
-            <a:lvl1pPr algn="r">
-              <a:defRPr sz="1200"/>
-            </a:lvl1pPr>
-          </a:lstStyle>
-          <a:p>
-            <a:fld id="{CE5E9CC1-C706-0F49-92D6-E571CC5EEA8F}" type="slidenum">
-              <a:rPr lang="en-US"/>
-              <a:t>‹#›</a:t>
-            </a:fld>
-            <a:endParaRPr lang="en-US"/>
-          </a:p>
-        </p:txBody>
-      </p:sp>
     </p:spTree>
     <p:extLst>
       <p:ext uri="{BB962C8B-B14F-4D97-AF65-F5344CB8AC3E}">
-        <p14:creationId xmlns:p14="http://schemas.microsoft.com/office/powerpoint/2010/main" val="1024086991"/>
+        <p14:creationId xmlns:p14="http://schemas.microsoft.com/office/powerpoint/2010/main" val="2550328478"/>
       </p:ext>
     </p:extLst>
   </p:cSld>
@@ -460,7 +241,7 @@
 </file>
 
 <file path=ppt/notesSlides/notesSlide1.xml><?xml version="1.0" encoding="utf-8"?>
-<p:notes xmlns:p14="http://schemas.microsoft.com/office/powerpoint/2010/main" xmlns:a="http://schemas.openxmlformats.org/drawingml/2006/main" xmlns:r="http://schemas.openxmlformats.org/officeDocument/2006/relationships" xmlns:p="http://schemas.openxmlformats.org/presentationml/2006/main">
+<p:notes xmlns:a="http://schemas.openxmlformats.org/drawingml/2006/main" xmlns:r="http://schemas.openxmlformats.org/officeDocument/2006/relationships" xmlns:p="http://schemas.openxmlformats.org/presentationml/2006/main">
   <p:cSld>
     <p:spTree>
       <p:nvGrpSpPr>
@@ -507,7 +288,6 @@
               <a:rPr lang="en-US" dirty="0"/>
               <a:t>SupplyChain AI Copilot — Supply Chain Disruption Assistant &amp; Fleet Utilisation Optimizer. Team Error Fellows, Track AI, IBM Bob AI Hackathon 2026. The system runs a continuous Detect, Assess, Optimise, Act loop.</a:t>
             </a:r>
-            <a:endParaRPr lang="en-US" dirty="0"/>
           </a:p>
         </p:txBody>
       </p:sp>
@@ -548,7 +328,7 @@
 </file>
 
 <file path=ppt/notesSlides/notesSlide2.xml><?xml version="1.0" encoding="utf-8"?>
-<p:notes xmlns:p14="http://schemas.microsoft.com/office/powerpoint/2010/main" xmlns:a="http://schemas.openxmlformats.org/drawingml/2006/main" xmlns:r="http://schemas.openxmlformats.org/officeDocument/2006/relationships" xmlns:p="http://schemas.openxmlformats.org/presentationml/2006/main">
+<p:notes xmlns:a="http://schemas.openxmlformats.org/drawingml/2006/main" xmlns:r="http://schemas.openxmlformats.org/officeDocument/2006/relationships" xmlns:p="http://schemas.openxmlformats.org/presentationml/2006/main">
   <p:cSld>
     <p:spTree>
       <p:nvGrpSpPr>
@@ -595,7 +375,6 @@
               <a:rPr lang="en-US" dirty="0"/>
               <a:t>Pharmaceutical cold-chain teams face two simultaneous crises. First, disruption blindness: manual triage of a port strike or storm takes 2–4 hours. Second, cold-chain excursions are discovered only at delivery. Pain numbers: $500K+ per rejected vaccine shipment, $10B+ per major port event, 4–8 hours per manual GDP excursion report.</a:t>
             </a:r>
-            <a:endParaRPr lang="en-US" dirty="0"/>
           </a:p>
         </p:txBody>
       </p:sp>
@@ -636,7 +415,7 @@
 </file>
 
 <file path=ppt/notesSlides/notesSlide3.xml><?xml version="1.0" encoding="utf-8"?>
-<p:notes xmlns:p14="http://schemas.microsoft.com/office/powerpoint/2010/main" xmlns:a="http://schemas.openxmlformats.org/drawingml/2006/main" xmlns:r="http://schemas.openxmlformats.org/officeDocument/2006/relationships" xmlns:p="http://schemas.openxmlformats.org/presentationml/2006/main">
+<p:notes xmlns:a="http://schemas.openxmlformats.org/drawingml/2006/main" xmlns:r="http://schemas.openxmlformats.org/officeDocument/2006/relationships" xmlns:p="http://schemas.openxmlformats.org/presentationml/2006/main">
   <p:cSld>
     <p:spTree>
       <p:nvGrpSpPr>
@@ -683,7 +462,6 @@
               <a:rPr lang="en-US" dirty="0"/>
               <a:t>One system that detects exposed shipments geospatially, scores them with a 6-factor deterministic engine, optimises reroutes and idle reefer fleet matching, acts through a human-approved workflow with immutable audit trail, and monitors cold-chain IoT telemetry 24/7 with watsonx.ai excursion classification before delivery.</a:t>
             </a:r>
-            <a:endParaRPr lang="en-US" dirty="0"/>
           </a:p>
         </p:txBody>
       </p:sp>
@@ -724,7 +502,7 @@
 </file>
 
 <file path=ppt/notesSlides/notesSlide4.xml><?xml version="1.0" encoding="utf-8"?>
-<p:notes xmlns:p14="http://schemas.microsoft.com/office/powerpoint/2010/main" xmlns:a="http://schemas.openxmlformats.org/drawingml/2006/main" xmlns:r="http://schemas.openxmlformats.org/officeDocument/2006/relationships" xmlns:p="http://schemas.openxmlformats.org/presentationml/2006/main">
+<p:notes xmlns:a="http://schemas.openxmlformats.org/drawingml/2006/main" xmlns:r="http://schemas.openxmlformats.org/officeDocument/2006/relationships" xmlns:p="http://schemas.openxmlformats.org/presentationml/2006/main">
   <p:cSld>
     <p:spTree>
       <p:nvGrpSpPr>
@@ -771,7 +549,6 @@
               <a:rPr lang="en-US" dirty="0"/>
               <a:t>Three input streams. IoT sensor readings every 5 seconds go to the Cold Chain Engine, then watsonx.ai for GDP classification. Disruption events flow through Impact, Risk, Route Optimizer and Fleet Matcher into the AI Action Center. Operator chat goes to the watsonx.ai Copilot with live system context. Key principle: AI explains, deterministic engines calculate the facts.</a:t>
             </a:r>
-            <a:endParaRPr lang="en-US" dirty="0"/>
           </a:p>
         </p:txBody>
       </p:sp>
@@ -844,6 +621,11 @@
 <file path=ppt/slideMasters/slideMaster1.xml><?xml version="1.0" encoding="utf-8"?>
 <p:sldMaster xmlns:a="http://schemas.openxmlformats.org/drawingml/2006/main" xmlns:r="http://schemas.openxmlformats.org/officeDocument/2006/relationships" xmlns:p="http://schemas.openxmlformats.org/presentationml/2006/main">
   <p:cSld>
+    <p:bg>
+      <p:bgRef idx="1001">
+        <a:schemeClr val="bg1"/>
+      </p:bgRef>
+    </p:bg>
     <p:spTree>
       <p:nvGrpSpPr>
         <p:cNvPr id="1" name=""/>
@@ -1126,6 +908,7 @@
         <a:solidFill>
           <a:srgbClr val="0B1426"/>
         </a:solidFill>
+        <a:effectLst/>
       </p:bgPr>
     </p:bg>
     <p:spTree>
@@ -1285,6 +1068,13 @@
             <a:prstDash val="solid"/>
           </a:ln>
         </p:spPr>
+        <p:txBody>
+          <a:bodyPr/>
+          <a:lstStyle/>
+          <a:p>
+            <a:endParaRPr lang="en-IN"/>
+          </a:p>
+        </p:txBody>
       </p:sp>
       <p:sp>
         <p:nvSpPr>
@@ -1351,6 +1141,13 @@
             <a:prstDash val="solid"/>
           </a:ln>
         </p:spPr>
+        <p:txBody>
+          <a:bodyPr/>
+          <a:lstStyle/>
+          <a:p>
+            <a:endParaRPr lang="en-IN"/>
+          </a:p>
+        </p:txBody>
       </p:sp>
       <p:sp>
         <p:nvSpPr>
@@ -1417,6 +1214,13 @@
             <a:prstDash val="solid"/>
           </a:ln>
         </p:spPr>
+        <p:txBody>
+          <a:bodyPr/>
+          <a:lstStyle/>
+          <a:p>
+            <a:endParaRPr lang="en-IN"/>
+          </a:p>
+        </p:txBody>
       </p:sp>
       <p:sp>
         <p:nvSpPr>
@@ -1442,240 +1246,17 @@
             <a:prstDash val="solid"/>
           </a:ln>
         </p:spPr>
+        <p:txBody>
+          <a:bodyPr/>
+          <a:lstStyle/>
+          <a:p>
+            <a:endParaRPr lang="en-IN"/>
+          </a:p>
+        </p:txBody>
       </p:sp>
       <p:pic>
         <p:nvPicPr>
           <p:cNvPr id="11" name="Image 0" descr="preencoded.png"/>
-          <p:cNvPicPr>
-            <a:picLocks noChangeAspect="1"/>
-          </p:cNvPicPr>
-          <p:nvPr/>
-        </p:nvPicPr>
-        <p:blipFill>
-          <a:blip r:embed="rId1"/>
-          <a:stretch>
-            <a:fillRect/>
-          </a:stretch>
-        </p:blipFill>
-        <p:spPr>
-          <a:xfrm>
-            <a:off x="6291072" y="1463040"/>
-            <a:ext cx="274320" cy="274320"/>
-          </a:xfrm>
-          <a:prstGeom prst="rect">
-            <a:avLst/>
-          </a:prstGeom>
-        </p:spPr>
-      </p:pic>
-      <p:sp>
-        <p:nvSpPr>
-          <p:cNvPr id="12" name="Text 9"/>
-          <p:cNvSpPr txBox="1"/>
-          <p:nvPr/>
-        </p:nvSpPr>
-        <p:spPr>
-          <a:xfrm>
-            <a:off x="5760720" y="1993392"/>
-            <a:ext cx="1325880" cy="274320"/>
-          </a:xfrm>
-          <a:prstGeom prst="rect">
-            <a:avLst/>
-          </a:prstGeom>
-          <a:noFill/>
-          <a:ln/>
-        </p:spPr>
-        <p:txBody>
-          <a:bodyPr wrap="square" lIns="0" tIns="0" rIns="0" bIns="0" rtlCol="0" anchor="t"/>
-          <a:lstStyle/>
-          <a:p>
-            <a:pPr marL="0" indent="0" algn="ctr">
-              <a:buNone/>
-            </a:pPr>
-            <a:r>
-              <a:rPr lang="en-US" sz="1400" b="1" dirty="0">
-                <a:solidFill>
-                  <a:srgbClr val="F1F5F9"/>
-                </a:solidFill>
-                <a:latin typeface="Calibri" pitchFamily="34" charset="0"/>
-                <a:ea typeface="Calibri" pitchFamily="34" charset="-122"/>
-                <a:cs typeface="Calibri" pitchFamily="34" charset="-120"/>
-              </a:rPr>
-              <a:t>Detect</a:t>
-            </a:r>
-            <a:endParaRPr lang="en-US" sz="1400" dirty="0"/>
-          </a:p>
-        </p:txBody>
-      </p:sp>
-      <p:sp>
-        <p:nvSpPr>
-          <p:cNvPr id="13" name="Shape 10"/>
-          <p:cNvSpPr/>
-          <p:nvPr/>
-        </p:nvSpPr>
-        <p:spPr>
-          <a:xfrm>
-            <a:off x="7269480" y="1097280"/>
-            <a:ext cx="1325880" cy="1325880"/>
-          </a:xfrm>
-          <a:prstGeom prst="roundRect">
-            <a:avLst>
-              <a:gd name="adj" fmla="val 5517"/>
-            </a:avLst>
-          </a:prstGeom>
-          <a:solidFill>
-            <a:srgbClr val="14213D"/>
-          </a:solidFill>
-          <a:ln w="12700">
-            <a:solidFill>
-              <a:srgbClr val="14213D"/>
-            </a:solidFill>
-            <a:prstDash val="solid"/>
-          </a:ln>
-        </p:spPr>
-      </p:sp>
-      <p:sp>
-        <p:nvSpPr>
-          <p:cNvPr id="14" name="Shape 11"/>
-          <p:cNvSpPr/>
-          <p:nvPr/>
-        </p:nvSpPr>
-        <p:spPr>
-          <a:xfrm>
-            <a:off x="7662672" y="1325880"/>
-            <a:ext cx="548640" cy="548640"/>
-          </a:xfrm>
-          <a:prstGeom prst="ellipse">
-            <a:avLst/>
-          </a:prstGeom>
-          <a:solidFill>
-            <a:srgbClr val="0E3A4A"/>
-          </a:solidFill>
-          <a:ln w="12700">
-            <a:solidFill>
-              <a:srgbClr val="0E3A4A"/>
-            </a:solidFill>
-            <a:prstDash val="solid"/>
-          </a:ln>
-        </p:spPr>
-      </p:sp>
-      <p:pic>
-        <p:nvPicPr>
-          <p:cNvPr id="15" name="Image 1" descr="preencoded.png"/>
-          <p:cNvPicPr>
-            <a:picLocks noChangeAspect="1"/>
-          </p:cNvPicPr>
-          <p:nvPr/>
-        </p:nvPicPr>
-        <p:blipFill>
-          <a:blip r:embed="rId2"/>
-          <a:stretch>
-            <a:fillRect/>
-          </a:stretch>
-        </p:blipFill>
-        <p:spPr>
-          <a:xfrm>
-            <a:off x="7799832" y="1463040"/>
-            <a:ext cx="274320" cy="274320"/>
-          </a:xfrm>
-          <a:prstGeom prst="rect">
-            <a:avLst/>
-          </a:prstGeom>
-        </p:spPr>
-      </p:pic>
-      <p:sp>
-        <p:nvSpPr>
-          <p:cNvPr id="16" name="Text 12"/>
-          <p:cNvSpPr txBox="1"/>
-          <p:nvPr/>
-        </p:nvSpPr>
-        <p:spPr>
-          <a:xfrm>
-            <a:off x="7269480" y="1993392"/>
-            <a:ext cx="1325880" cy="274320"/>
-          </a:xfrm>
-          <a:prstGeom prst="rect">
-            <a:avLst/>
-          </a:prstGeom>
-          <a:noFill/>
-          <a:ln/>
-        </p:spPr>
-        <p:txBody>
-          <a:bodyPr wrap="square" lIns="0" tIns="0" rIns="0" bIns="0" rtlCol="0" anchor="t"/>
-          <a:lstStyle/>
-          <a:p>
-            <a:pPr marL="0" indent="0" algn="ctr">
-              <a:buNone/>
-            </a:pPr>
-            <a:r>
-              <a:rPr lang="en-US" sz="1400" b="1" dirty="0">
-                <a:solidFill>
-                  <a:srgbClr val="F1F5F9"/>
-                </a:solidFill>
-                <a:latin typeface="Calibri" pitchFamily="34" charset="0"/>
-                <a:ea typeface="Calibri" pitchFamily="34" charset="-122"/>
-                <a:cs typeface="Calibri" pitchFamily="34" charset="-120"/>
-              </a:rPr>
-              <a:t>Assess</a:t>
-            </a:r>
-            <a:endParaRPr lang="en-US" sz="1400" dirty="0"/>
-          </a:p>
-        </p:txBody>
-      </p:sp>
-      <p:sp>
-        <p:nvSpPr>
-          <p:cNvPr id="17" name="Shape 13"/>
-          <p:cNvSpPr/>
-          <p:nvPr/>
-        </p:nvSpPr>
-        <p:spPr>
-          <a:xfrm>
-            <a:off x="5760720" y="2606040"/>
-            <a:ext cx="1325880" cy="1325880"/>
-          </a:xfrm>
-          <a:prstGeom prst="roundRect">
-            <a:avLst>
-              <a:gd name="adj" fmla="val 5517"/>
-            </a:avLst>
-          </a:prstGeom>
-          <a:solidFill>
-            <a:srgbClr val="14213D"/>
-          </a:solidFill>
-          <a:ln w="12700">
-            <a:solidFill>
-              <a:srgbClr val="14213D"/>
-            </a:solidFill>
-            <a:prstDash val="solid"/>
-          </a:ln>
-        </p:spPr>
-      </p:sp>
-      <p:sp>
-        <p:nvSpPr>
-          <p:cNvPr id="18" name="Shape 14"/>
-          <p:cNvSpPr/>
-          <p:nvPr/>
-        </p:nvSpPr>
-        <p:spPr>
-          <a:xfrm>
-            <a:off x="6153912" y="2834640"/>
-            <a:ext cx="548640" cy="548640"/>
-          </a:xfrm>
-          <a:prstGeom prst="ellipse">
-            <a:avLst/>
-          </a:prstGeom>
-          <a:solidFill>
-            <a:srgbClr val="0E3A4A"/>
-          </a:solidFill>
-          <a:ln w="12700">
-            <a:solidFill>
-              <a:srgbClr val="0E3A4A"/>
-            </a:solidFill>
-            <a:prstDash val="solid"/>
-          </a:ln>
-        </p:spPr>
-      </p:sp>
-      <p:pic>
-        <p:nvPicPr>
-          <p:cNvPr id="19" name="Image 2" descr="preencoded.png"/>
           <p:cNvPicPr>
             <a:picLocks noChangeAspect="1"/>
           </p:cNvPicPr>
@@ -1689,7 +1270,7 @@
         </p:blipFill>
         <p:spPr>
           <a:xfrm>
-            <a:off x="6291072" y="2971800"/>
+            <a:off x="6291072" y="1463040"/>
             <a:ext cx="274320" cy="274320"/>
           </a:xfrm>
           <a:prstGeom prst="rect">
@@ -1699,13 +1280,13 @@
       </p:pic>
       <p:sp>
         <p:nvSpPr>
-          <p:cNvPr id="20" name="Text 15"/>
+          <p:cNvPr id="12" name="Text 9"/>
           <p:cNvSpPr txBox="1"/>
           <p:nvPr/>
         </p:nvSpPr>
         <p:spPr>
           <a:xfrm>
-            <a:off x="5760720" y="3502152"/>
+            <a:off x="5760720" y="1993392"/>
             <a:ext cx="1325880" cy="274320"/>
           </a:xfrm>
           <a:prstGeom prst="rect">
@@ -1730,7 +1311,7 @@
                 <a:ea typeface="Calibri" pitchFamily="34" charset="-122"/>
                 <a:cs typeface="Calibri" pitchFamily="34" charset="-120"/>
               </a:rPr>
-              <a:t>Optimise</a:t>
+              <a:t>Detect</a:t>
             </a:r>
             <a:endParaRPr lang="en-US" sz="1400" dirty="0"/>
           </a:p>
@@ -1738,13 +1319,13 @@
       </p:sp>
       <p:sp>
         <p:nvSpPr>
-          <p:cNvPr id="21" name="Shape 16"/>
+          <p:cNvPr id="13" name="Shape 10"/>
           <p:cNvSpPr/>
           <p:nvPr/>
         </p:nvSpPr>
         <p:spPr>
           <a:xfrm>
-            <a:off x="7269480" y="2606040"/>
+            <a:off x="7269480" y="1097280"/>
             <a:ext cx="1325880" cy="1325880"/>
           </a:xfrm>
           <a:prstGeom prst="roundRect">
@@ -1762,16 +1343,23 @@
             <a:prstDash val="solid"/>
           </a:ln>
         </p:spPr>
-      </p:sp>
-      <p:sp>
-        <p:nvSpPr>
-          <p:cNvPr id="22" name="Shape 17"/>
+        <p:txBody>
+          <a:bodyPr/>
+          <a:lstStyle/>
+          <a:p>
+            <a:endParaRPr lang="en-IN"/>
+          </a:p>
+        </p:txBody>
+      </p:sp>
+      <p:sp>
+        <p:nvSpPr>
+          <p:cNvPr id="14" name="Shape 11"/>
           <p:cNvSpPr/>
           <p:nvPr/>
         </p:nvSpPr>
         <p:spPr>
           <a:xfrm>
-            <a:off x="7662672" y="2834640"/>
+            <a:off x="7662672" y="1325880"/>
             <a:ext cx="548640" cy="548640"/>
           </a:xfrm>
           <a:prstGeom prst="ellipse">
@@ -1787,6 +1375,271 @@
             <a:prstDash val="solid"/>
           </a:ln>
         </p:spPr>
+        <p:txBody>
+          <a:bodyPr/>
+          <a:lstStyle/>
+          <a:p>
+            <a:endParaRPr lang="en-IN"/>
+          </a:p>
+        </p:txBody>
+      </p:sp>
+      <p:pic>
+        <p:nvPicPr>
+          <p:cNvPr id="15" name="Image 1" descr="preencoded.png"/>
+          <p:cNvPicPr>
+            <a:picLocks noChangeAspect="1"/>
+          </p:cNvPicPr>
+          <p:nvPr/>
+        </p:nvPicPr>
+        <p:blipFill>
+          <a:blip r:embed="rId4"/>
+          <a:stretch>
+            <a:fillRect/>
+          </a:stretch>
+        </p:blipFill>
+        <p:spPr>
+          <a:xfrm>
+            <a:off x="7799832" y="1463040"/>
+            <a:ext cx="274320" cy="274320"/>
+          </a:xfrm>
+          <a:prstGeom prst="rect">
+            <a:avLst/>
+          </a:prstGeom>
+        </p:spPr>
+      </p:pic>
+      <p:sp>
+        <p:nvSpPr>
+          <p:cNvPr id="16" name="Text 12"/>
+          <p:cNvSpPr txBox="1"/>
+          <p:nvPr/>
+        </p:nvSpPr>
+        <p:spPr>
+          <a:xfrm>
+            <a:off x="7269480" y="1993392"/>
+            <a:ext cx="1325880" cy="274320"/>
+          </a:xfrm>
+          <a:prstGeom prst="rect">
+            <a:avLst/>
+          </a:prstGeom>
+          <a:noFill/>
+          <a:ln/>
+        </p:spPr>
+        <p:txBody>
+          <a:bodyPr wrap="square" lIns="0" tIns="0" rIns="0" bIns="0" rtlCol="0" anchor="t"/>
+          <a:lstStyle/>
+          <a:p>
+            <a:pPr marL="0" indent="0" algn="ctr">
+              <a:buNone/>
+            </a:pPr>
+            <a:r>
+              <a:rPr lang="en-US" sz="1400" b="1" dirty="0">
+                <a:solidFill>
+                  <a:srgbClr val="F1F5F9"/>
+                </a:solidFill>
+                <a:latin typeface="Calibri" pitchFamily="34" charset="0"/>
+                <a:ea typeface="Calibri" pitchFamily="34" charset="-122"/>
+                <a:cs typeface="Calibri" pitchFamily="34" charset="-120"/>
+              </a:rPr>
+              <a:t>Assess</a:t>
+            </a:r>
+            <a:endParaRPr lang="en-US" sz="1400" dirty="0"/>
+          </a:p>
+        </p:txBody>
+      </p:sp>
+      <p:sp>
+        <p:nvSpPr>
+          <p:cNvPr id="17" name="Shape 13"/>
+          <p:cNvSpPr/>
+          <p:nvPr/>
+        </p:nvSpPr>
+        <p:spPr>
+          <a:xfrm>
+            <a:off x="5760720" y="2606040"/>
+            <a:ext cx="1325880" cy="1325880"/>
+          </a:xfrm>
+          <a:prstGeom prst="roundRect">
+            <a:avLst>
+              <a:gd name="adj" fmla="val 5517"/>
+            </a:avLst>
+          </a:prstGeom>
+          <a:solidFill>
+            <a:srgbClr val="14213D"/>
+          </a:solidFill>
+          <a:ln w="12700">
+            <a:solidFill>
+              <a:srgbClr val="14213D"/>
+            </a:solidFill>
+            <a:prstDash val="solid"/>
+          </a:ln>
+        </p:spPr>
+        <p:txBody>
+          <a:bodyPr/>
+          <a:lstStyle/>
+          <a:p>
+            <a:endParaRPr lang="en-IN"/>
+          </a:p>
+        </p:txBody>
+      </p:sp>
+      <p:sp>
+        <p:nvSpPr>
+          <p:cNvPr id="18" name="Shape 14"/>
+          <p:cNvSpPr/>
+          <p:nvPr/>
+        </p:nvSpPr>
+        <p:spPr>
+          <a:xfrm>
+            <a:off x="6153912" y="2834640"/>
+            <a:ext cx="548640" cy="548640"/>
+          </a:xfrm>
+          <a:prstGeom prst="ellipse">
+            <a:avLst/>
+          </a:prstGeom>
+          <a:solidFill>
+            <a:srgbClr val="0E3A4A"/>
+          </a:solidFill>
+          <a:ln w="12700">
+            <a:solidFill>
+              <a:srgbClr val="0E3A4A"/>
+            </a:solidFill>
+            <a:prstDash val="solid"/>
+          </a:ln>
+        </p:spPr>
+        <p:txBody>
+          <a:bodyPr/>
+          <a:lstStyle/>
+          <a:p>
+            <a:endParaRPr lang="en-IN"/>
+          </a:p>
+        </p:txBody>
+      </p:sp>
+      <p:pic>
+        <p:nvPicPr>
+          <p:cNvPr id="19" name="Image 2" descr="preencoded.png"/>
+          <p:cNvPicPr>
+            <a:picLocks noChangeAspect="1"/>
+          </p:cNvPicPr>
+          <p:nvPr/>
+        </p:nvPicPr>
+        <p:blipFill>
+          <a:blip r:embed="rId5"/>
+          <a:stretch>
+            <a:fillRect/>
+          </a:stretch>
+        </p:blipFill>
+        <p:spPr>
+          <a:xfrm>
+            <a:off x="6291072" y="2971800"/>
+            <a:ext cx="274320" cy="274320"/>
+          </a:xfrm>
+          <a:prstGeom prst="rect">
+            <a:avLst/>
+          </a:prstGeom>
+        </p:spPr>
+      </p:pic>
+      <p:sp>
+        <p:nvSpPr>
+          <p:cNvPr id="20" name="Text 15"/>
+          <p:cNvSpPr txBox="1"/>
+          <p:nvPr/>
+        </p:nvSpPr>
+        <p:spPr>
+          <a:xfrm>
+            <a:off x="5760720" y="3502152"/>
+            <a:ext cx="1325880" cy="274320"/>
+          </a:xfrm>
+          <a:prstGeom prst="rect">
+            <a:avLst/>
+          </a:prstGeom>
+          <a:noFill/>
+          <a:ln/>
+        </p:spPr>
+        <p:txBody>
+          <a:bodyPr wrap="square" lIns="0" tIns="0" rIns="0" bIns="0" rtlCol="0" anchor="t"/>
+          <a:lstStyle/>
+          <a:p>
+            <a:pPr marL="0" indent="0" algn="ctr">
+              <a:buNone/>
+            </a:pPr>
+            <a:r>
+              <a:rPr lang="en-US" sz="1400" b="1" dirty="0">
+                <a:solidFill>
+                  <a:srgbClr val="F1F5F9"/>
+                </a:solidFill>
+                <a:latin typeface="Calibri" pitchFamily="34" charset="0"/>
+                <a:ea typeface="Calibri" pitchFamily="34" charset="-122"/>
+                <a:cs typeface="Calibri" pitchFamily="34" charset="-120"/>
+              </a:rPr>
+              <a:t>Optimise</a:t>
+            </a:r>
+            <a:endParaRPr lang="en-US" sz="1400" dirty="0"/>
+          </a:p>
+        </p:txBody>
+      </p:sp>
+      <p:sp>
+        <p:nvSpPr>
+          <p:cNvPr id="21" name="Shape 16"/>
+          <p:cNvSpPr/>
+          <p:nvPr/>
+        </p:nvSpPr>
+        <p:spPr>
+          <a:xfrm>
+            <a:off x="7269480" y="2606040"/>
+            <a:ext cx="1325880" cy="1325880"/>
+          </a:xfrm>
+          <a:prstGeom prst="roundRect">
+            <a:avLst>
+              <a:gd name="adj" fmla="val 5517"/>
+            </a:avLst>
+          </a:prstGeom>
+          <a:solidFill>
+            <a:srgbClr val="14213D"/>
+          </a:solidFill>
+          <a:ln w="12700">
+            <a:solidFill>
+              <a:srgbClr val="14213D"/>
+            </a:solidFill>
+            <a:prstDash val="solid"/>
+          </a:ln>
+        </p:spPr>
+        <p:txBody>
+          <a:bodyPr/>
+          <a:lstStyle/>
+          <a:p>
+            <a:endParaRPr lang="en-IN"/>
+          </a:p>
+        </p:txBody>
+      </p:sp>
+      <p:sp>
+        <p:nvSpPr>
+          <p:cNvPr id="22" name="Shape 17"/>
+          <p:cNvSpPr/>
+          <p:nvPr/>
+        </p:nvSpPr>
+        <p:spPr>
+          <a:xfrm>
+            <a:off x="7662672" y="2834640"/>
+            <a:ext cx="548640" cy="548640"/>
+          </a:xfrm>
+          <a:prstGeom prst="ellipse">
+            <a:avLst/>
+          </a:prstGeom>
+          <a:solidFill>
+            <a:srgbClr val="0E3A4A"/>
+          </a:solidFill>
+          <a:ln w="12700">
+            <a:solidFill>
+              <a:srgbClr val="0E3A4A"/>
+            </a:solidFill>
+            <a:prstDash val="solid"/>
+          </a:ln>
+        </p:spPr>
+        <p:txBody>
+          <a:bodyPr/>
+          <a:lstStyle/>
+          <a:p>
+            <a:endParaRPr lang="en-IN"/>
+          </a:p>
+        </p:txBody>
       </p:sp>
       <p:pic>
         <p:nvPicPr>
@@ -1797,7 +1650,7 @@
           <p:nvPr/>
         </p:nvPicPr>
         <p:blipFill>
-          <a:blip r:embed="rId4"/>
+          <a:blip r:embed="rId6"/>
           <a:stretch>
             <a:fillRect/>
           </a:stretch>
@@ -1867,6 +1720,7 @@
         <a:solidFill>
           <a:srgbClr val="0B1426"/>
         </a:solidFill>
+        <a:effectLst/>
       </p:bgPr>
     </p:bg>
     <p:spTree>
@@ -2026,6 +1880,13 @@
             <a:prstDash val="solid"/>
           </a:ln>
         </p:spPr>
+        <p:txBody>
+          <a:bodyPr/>
+          <a:lstStyle/>
+          <a:p>
+            <a:endParaRPr lang="en-IN"/>
+          </a:p>
+        </p:txBody>
       </p:sp>
       <p:sp>
         <p:nvSpPr>
@@ -2051,6 +1912,13 @@
             <a:prstDash val="solid"/>
           </a:ln>
         </p:spPr>
+        <p:txBody>
+          <a:bodyPr/>
+          <a:lstStyle/>
+          <a:p>
+            <a:endParaRPr lang="en-IN"/>
+          </a:p>
+        </p:txBody>
       </p:sp>
       <p:pic>
         <p:nvPicPr>
@@ -2061,7 +1929,7 @@
           <p:nvPr/>
         </p:nvPicPr>
         <p:blipFill>
-          <a:blip r:embed="rId1"/>
+          <a:blip r:embed="rId3"/>
           <a:stretch>
             <a:fillRect/>
           </a:stretch>
@@ -2180,6 +2048,13 @@
             <a:prstDash val="solid"/>
           </a:ln>
         </p:spPr>
+        <p:txBody>
+          <a:bodyPr/>
+          <a:lstStyle/>
+          <a:p>
+            <a:endParaRPr lang="en-IN"/>
+          </a:p>
+        </p:txBody>
       </p:sp>
       <p:sp>
         <p:nvSpPr>
@@ -2205,6 +2080,13 @@
             <a:prstDash val="solid"/>
           </a:ln>
         </p:spPr>
+        <p:txBody>
+          <a:bodyPr/>
+          <a:lstStyle/>
+          <a:p>
+            <a:endParaRPr lang="en-IN"/>
+          </a:p>
+        </p:txBody>
       </p:sp>
       <p:pic>
         <p:nvPicPr>
@@ -2215,7 +2097,7 @@
           <p:nvPr/>
         </p:nvPicPr>
         <p:blipFill>
-          <a:blip r:embed="rId2"/>
+          <a:blip r:embed="rId4"/>
           <a:stretch>
             <a:fillRect/>
           </a:stretch>
@@ -2558,6 +2440,7 @@
         <a:solidFill>
           <a:srgbClr val="0B1426"/>
         </a:solidFill>
+        <a:effectLst/>
       </p:bgPr>
     </p:bg>
     <p:spTree>
@@ -2638,7 +2521,7 @@
               <a:buNone/>
             </a:pPr>
             <a:r>
-              <a:rPr lang="en-US" sz="2800" b="1" dirty="0">
+              <a:rPr lang="en-US" sz="2200" b="1" dirty="0">
                 <a:solidFill>
                   <a:srgbClr val="F1F5F9"/>
                 </a:solidFill>
@@ -2648,7 +2531,7 @@
               </a:rPr>
               <a:t>Every shipment has two deadlines. We compute both.</a:t>
             </a:r>
-            <a:endParaRPr lang="en-US" sz="2800" dirty="0"/>
+            <a:endParaRPr lang="en-US" sz="2200" dirty="0"/>
           </a:p>
         </p:txBody>
       </p:sp>
@@ -2756,6 +2639,13 @@
             <a:prstDash val="solid"/>
           </a:ln>
         </p:spPr>
+        <p:txBody>
+          <a:bodyPr/>
+          <a:lstStyle/>
+          <a:p>
+            <a:endParaRPr lang="en-IN"/>
+          </a:p>
+        </p:txBody>
       </p:sp>
       <p:sp>
         <p:nvSpPr>
@@ -2781,6 +2671,13 @@
             <a:prstDash val="solid"/>
           </a:ln>
         </p:spPr>
+        <p:txBody>
+          <a:bodyPr/>
+          <a:lstStyle/>
+          <a:p>
+            <a:endParaRPr lang="en-IN"/>
+          </a:p>
+        </p:txBody>
       </p:sp>
       <p:pic>
         <p:nvPicPr>
@@ -2791,7 +2688,7 @@
           <p:nvPr/>
         </p:nvPicPr>
         <p:blipFill>
-          <a:blip r:embed="rId1"/>
+          <a:blip r:embed="rId3"/>
           <a:stretch>
             <a:fillRect/>
           </a:stretch>
@@ -2907,6 +2804,13 @@
             <a:tailEnd type="triangle"/>
           </a:ln>
         </p:spPr>
+        <p:txBody>
+          <a:bodyPr/>
+          <a:lstStyle/>
+          <a:p>
+            <a:endParaRPr lang="en-IN"/>
+          </a:p>
+        </p:txBody>
       </p:sp>
       <p:sp>
         <p:nvSpPr>
@@ -2934,6 +2838,13 @@
             <a:prstDash val="solid"/>
           </a:ln>
         </p:spPr>
+        <p:txBody>
+          <a:bodyPr/>
+          <a:lstStyle/>
+          <a:p>
+            <a:endParaRPr lang="en-IN"/>
+          </a:p>
+        </p:txBody>
       </p:sp>
       <p:sp>
         <p:nvSpPr>
@@ -2959,6 +2870,13 @@
             <a:prstDash val="solid"/>
           </a:ln>
         </p:spPr>
+        <p:txBody>
+          <a:bodyPr/>
+          <a:lstStyle/>
+          <a:p>
+            <a:endParaRPr lang="en-IN"/>
+          </a:p>
+        </p:txBody>
       </p:sp>
       <p:pic>
         <p:nvPicPr>
@@ -2969,7 +2887,7 @@
           <p:nvPr/>
         </p:nvPicPr>
         <p:blipFill>
-          <a:blip r:embed="rId2"/>
+          <a:blip r:embed="rId4"/>
           <a:stretch>
             <a:fillRect/>
           </a:stretch>
@@ -3085,6 +3003,13 @@
             <a:tailEnd type="triangle"/>
           </a:ln>
         </p:spPr>
+        <p:txBody>
+          <a:bodyPr/>
+          <a:lstStyle/>
+          <a:p>
+            <a:endParaRPr lang="en-IN"/>
+          </a:p>
+        </p:txBody>
       </p:sp>
       <p:sp>
         <p:nvSpPr>
@@ -3112,6 +3037,13 @@
             <a:prstDash val="solid"/>
           </a:ln>
         </p:spPr>
+        <p:txBody>
+          <a:bodyPr/>
+          <a:lstStyle/>
+          <a:p>
+            <a:endParaRPr lang="en-IN"/>
+          </a:p>
+        </p:txBody>
       </p:sp>
       <p:sp>
         <p:nvSpPr>
@@ -3137,6 +3069,13 @@
             <a:prstDash val="solid"/>
           </a:ln>
         </p:spPr>
+        <p:txBody>
+          <a:bodyPr/>
+          <a:lstStyle/>
+          <a:p>
+            <a:endParaRPr lang="en-IN"/>
+          </a:p>
+        </p:txBody>
       </p:sp>
       <p:pic>
         <p:nvPicPr>
@@ -3147,7 +3086,7 @@
           <p:nvPr/>
         </p:nvPicPr>
         <p:blipFill>
-          <a:blip r:embed="rId3"/>
+          <a:blip r:embed="rId5"/>
           <a:stretch>
             <a:fillRect/>
           </a:stretch>
@@ -3263,6 +3202,13 @@
             <a:tailEnd type="triangle"/>
           </a:ln>
         </p:spPr>
+        <p:txBody>
+          <a:bodyPr/>
+          <a:lstStyle/>
+          <a:p>
+            <a:endParaRPr lang="en-IN"/>
+          </a:p>
+        </p:txBody>
       </p:sp>
       <p:sp>
         <p:nvSpPr>
@@ -3290,6 +3236,13 @@
             <a:prstDash val="solid"/>
           </a:ln>
         </p:spPr>
+        <p:txBody>
+          <a:bodyPr/>
+          <a:lstStyle/>
+          <a:p>
+            <a:endParaRPr lang="en-IN"/>
+          </a:p>
+        </p:txBody>
       </p:sp>
       <p:sp>
         <p:nvSpPr>
@@ -3315,6 +3268,13 @@
             <a:prstDash val="solid"/>
           </a:ln>
         </p:spPr>
+        <p:txBody>
+          <a:bodyPr/>
+          <a:lstStyle/>
+          <a:p>
+            <a:endParaRPr lang="en-IN"/>
+          </a:p>
+        </p:txBody>
       </p:sp>
       <p:pic>
         <p:nvPicPr>
@@ -3325,7 +3285,7 @@
           <p:nvPr/>
         </p:nvPicPr>
         <p:blipFill>
-          <a:blip r:embed="rId4"/>
+          <a:blip r:embed="rId6"/>
           <a:stretch>
             <a:fillRect/>
           </a:stretch>
@@ -3441,6 +3401,13 @@
             <a:tailEnd type="triangle"/>
           </a:ln>
         </p:spPr>
+        <p:txBody>
+          <a:bodyPr/>
+          <a:lstStyle/>
+          <a:p>
+            <a:endParaRPr lang="en-IN"/>
+          </a:p>
+        </p:txBody>
       </p:sp>
       <p:sp>
         <p:nvSpPr>
@@ -3468,6 +3435,13 @@
             <a:prstDash val="solid"/>
           </a:ln>
         </p:spPr>
+        <p:txBody>
+          <a:bodyPr/>
+          <a:lstStyle/>
+          <a:p>
+            <a:endParaRPr lang="en-IN"/>
+          </a:p>
+        </p:txBody>
       </p:sp>
       <p:sp>
         <p:nvSpPr>
@@ -3493,6 +3467,13 @@
             <a:prstDash val="solid"/>
           </a:ln>
         </p:spPr>
+        <p:txBody>
+          <a:bodyPr/>
+          <a:lstStyle/>
+          <a:p>
+            <a:endParaRPr lang="en-IN"/>
+          </a:p>
+        </p:txBody>
       </p:sp>
       <p:pic>
         <p:nvPicPr>
@@ -3503,7 +3484,7 @@
           <p:nvPr/>
         </p:nvPicPr>
         <p:blipFill>
-          <a:blip r:embed="rId5"/>
+          <a:blip r:embed="rId7"/>
           <a:stretch>
             <a:fillRect/>
           </a:stretch>
@@ -3651,6 +3632,7 @@
         <a:solidFill>
           <a:srgbClr val="0B1426"/>
         </a:solidFill>
+        <a:effectLst/>
       </p:bgPr>
     </p:bg>
     <p:spTree>
@@ -3731,7 +3713,7 @@
               <a:buNone/>
             </a:pPr>
             <a:r>
-              <a:rPr lang="en-US" sz="2800" b="1" dirty="0">
+              <a:rPr lang="en-US" sz="2200" b="1" dirty="0">
                 <a:solidFill>
                   <a:srgbClr val="F1F5F9"/>
                 </a:solidFill>
@@ -3741,7 +3723,7 @@
               </a:rPr>
               <a:t>Pure engines, an agent that proposes, a human who commits</a:t>
             </a:r>
-            <a:endParaRPr lang="en-US" sz="2800" dirty="0"/>
+            <a:endParaRPr lang="en-US" sz="2200" dirty="0"/>
           </a:p>
         </p:txBody>
       </p:sp>
@@ -3856,7 +3838,7 @@
           </a:fontRef>
         </p:style>
         <p:txBody>
-          <a:bodyPr rtlCol="0" anchor="ctr" wrap="square" lIns="45720" rIns="45720" tIns="18288" bIns="18288"/>
+          <a:bodyPr wrap="square" lIns="45720" tIns="18288" rIns="45720" bIns="18288" rtlCol="0" anchor="ctr"/>
           <a:lstStyle/>
           <a:p>
             <a:pPr algn="ctr"/>
@@ -3923,7 +3905,7 @@
           </a:fontRef>
         </p:style>
         <p:txBody>
-          <a:bodyPr rtlCol="0" anchor="ctr" wrap="square" lIns="45720" rIns="45720" tIns="18288" bIns="18288"/>
+          <a:bodyPr wrap="square" lIns="45720" tIns="18288" rIns="45720" bIns="18288" rtlCol="0" anchor="ctr"/>
           <a:lstStyle/>
           <a:p>
             <a:pPr algn="ctr"/>
@@ -3988,7 +3970,7 @@
           </a:fontRef>
         </p:style>
         <p:txBody>
-          <a:bodyPr rtlCol="0" anchor="ctr" wrap="square" lIns="45720" rIns="45720" tIns="18288" bIns="18288"/>
+          <a:bodyPr wrap="square" lIns="45720" tIns="18288" rIns="45720" bIns="18288" rtlCol="0" anchor="ctr"/>
           <a:lstStyle/>
           <a:p>
             <a:pPr algn="ctr"/>
@@ -4160,7 +4142,7 @@
           </a:fontRef>
         </p:style>
         <p:txBody>
-          <a:bodyPr rtlCol="0" anchor="ctr" wrap="square" lIns="45720" rIns="45720" tIns="18288" bIns="18288"/>
+          <a:bodyPr wrap="square" lIns="45720" tIns="18288" rIns="45720" bIns="18288" rtlCol="0" anchor="ctr"/>
           <a:lstStyle/>
           <a:p>
             <a:pPr algn="ctr"/>
@@ -4295,7 +4277,7 @@
           </a:fontRef>
         </p:style>
         <p:txBody>
-          <a:bodyPr rtlCol="0" anchor="ctr" wrap="square" lIns="45720" rIns="45720" tIns="18288" bIns="18288"/>
+          <a:bodyPr wrap="square" lIns="45720" tIns="18288" rIns="45720" bIns="18288" rtlCol="0" anchor="ctr"/>
           <a:lstStyle/>
           <a:p>
             <a:pPr algn="ctr"/>
@@ -4360,7 +4342,7 @@
           </a:fontRef>
         </p:style>
         <p:txBody>
-          <a:bodyPr rtlCol="0" anchor="ctr" wrap="square" lIns="45720" rIns="45720" tIns="18288" bIns="18288"/>
+          <a:bodyPr wrap="square" lIns="45720" tIns="18288" rIns="45720" bIns="18288" rtlCol="0" anchor="ctr"/>
           <a:lstStyle/>
           <a:p>
             <a:pPr algn="ctr"/>
@@ -4425,7 +4407,7 @@
           </a:fontRef>
         </p:style>
         <p:txBody>
-          <a:bodyPr rtlCol="0" anchor="ctr" wrap="square" lIns="45720" rIns="45720" tIns="18288" bIns="18288"/>
+          <a:bodyPr wrap="square" lIns="45720" tIns="18288" rIns="45720" bIns="18288" rtlCol="0" anchor="ctr"/>
           <a:lstStyle/>
           <a:p>
             <a:pPr algn="ctr"/>
@@ -4490,7 +4472,7 @@
           </a:fontRef>
         </p:style>
         <p:txBody>
-          <a:bodyPr rtlCol="0" anchor="ctr" wrap="square" lIns="45720" rIns="45720" tIns="18288" bIns="18288"/>
+          <a:bodyPr wrap="square" lIns="45720" tIns="18288" rIns="45720" bIns="18288" rtlCol="0" anchor="ctr"/>
           <a:lstStyle/>
           <a:p>
             <a:pPr algn="ctr"/>
@@ -4555,7 +4537,7 @@
           </a:fontRef>
         </p:style>
         <p:txBody>
-          <a:bodyPr rtlCol="0" anchor="ctr" wrap="square" lIns="45720" rIns="45720" tIns="18288" bIns="18288"/>
+          <a:bodyPr wrap="square" lIns="45720" tIns="18288" rIns="45720" bIns="18288" rtlCol="0" anchor="ctr"/>
           <a:lstStyle/>
           <a:p>
             <a:pPr algn="ctr"/>
@@ -4655,7 +4637,7 @@
           </a:fontRef>
         </p:style>
         <p:txBody>
-          <a:bodyPr rtlCol="0" anchor="ctr" wrap="square" lIns="45720" rIns="45720" tIns="18288" bIns="18288"/>
+          <a:bodyPr wrap="square" lIns="45720" tIns="18288" rIns="45720" bIns="18288" rtlCol="0" anchor="ctr"/>
           <a:lstStyle/>
           <a:p>
             <a:pPr algn="ctr"/>
@@ -4720,7 +4702,7 @@
           </a:fontRef>
         </p:style>
         <p:txBody>
-          <a:bodyPr rtlCol="0" anchor="ctr" wrap="square" lIns="45720" rIns="45720" tIns="18288" bIns="18288"/>
+          <a:bodyPr wrap="square" lIns="45720" tIns="18288" rIns="45720" bIns="18288" rtlCol="0" anchor="ctr"/>
           <a:lstStyle/>
           <a:p>
             <a:pPr algn="ctr"/>
@@ -4787,7 +4769,7 @@
           </a:fontRef>
         </p:style>
         <p:txBody>
-          <a:bodyPr rtlCol="0" anchor="ctr" wrap="square" lIns="45720" rIns="45720" tIns="18288" bIns="18288"/>
+          <a:bodyPr wrap="square" lIns="45720" tIns="18288" rIns="45720" bIns="18288" rtlCol="0" anchor="ctr"/>
           <a:lstStyle/>
           <a:p>
             <a:pPr algn="ctr"/>
@@ -5070,7 +5052,7 @@
 </file>
 
 <file path=ppt/theme/theme1.xml><?xml version="1.0" encoding="utf-8"?>
-<a:theme xmlns:thm15="http://schemas.microsoft.com/office/thememl/2012/main" xmlns:a="http://schemas.openxmlformats.org/drawingml/2006/main" name="Office Theme">
+<a:theme xmlns:a="http://schemas.openxmlformats.org/drawingml/2006/main" name="Office Theme">
   <a:themeElements>
     <a:clrScheme name="Office">
       <a:dk1>
@@ -5362,4 +5344,319 @@
     </a:ext>
   </a:extLst>
 </a:theme>
+</file>
+
+<file path=ppt/theme/theme2.xml><?xml version="1.0" encoding="utf-8"?>
+<a:theme xmlns:a="http://schemas.openxmlformats.org/drawingml/2006/main" name="Office Theme">
+  <a:themeElements>
+    <a:clrScheme name="Office">
+      <a:dk1>
+        <a:sysClr val="windowText" lastClr="000000"/>
+      </a:dk1>
+      <a:lt1>
+        <a:sysClr val="window" lastClr="FFFFFF"/>
+      </a:lt1>
+      <a:dk2>
+        <a:srgbClr val="0E2841"/>
+      </a:dk2>
+      <a:lt2>
+        <a:srgbClr val="E8E8E8"/>
+      </a:lt2>
+      <a:accent1>
+        <a:srgbClr val="156082"/>
+      </a:accent1>
+      <a:accent2>
+        <a:srgbClr val="E97132"/>
+      </a:accent2>
+      <a:accent3>
+        <a:srgbClr val="196B24"/>
+      </a:accent3>
+      <a:accent4>
+        <a:srgbClr val="0F9ED5"/>
+      </a:accent4>
+      <a:accent5>
+        <a:srgbClr val="A02B93"/>
+      </a:accent5>
+      <a:accent6>
+        <a:srgbClr val="4EA72E"/>
+      </a:accent6>
+      <a:hlink>
+        <a:srgbClr val="467886"/>
+      </a:hlink>
+      <a:folHlink>
+        <a:srgbClr val="96607D"/>
+      </a:folHlink>
+    </a:clrScheme>
+    <a:fontScheme name="Office">
+      <a:majorFont>
+        <a:latin typeface="Aptos Display" panose="02110004020202020204"/>
+        <a:ea typeface=""/>
+        <a:cs typeface=""/>
+        <a:font script="Jpan" typeface="游ゴシック Light"/>
+        <a:font script="Hang" typeface="맑은 고딕"/>
+        <a:font script="Hans" typeface="等线 Light"/>
+        <a:font script="Hant" typeface="新細明體"/>
+        <a:font script="Arab" typeface="Times New Roman"/>
+        <a:font script="Hebr" typeface="Times New Roman"/>
+        <a:font script="Thai" typeface="Angsana New"/>
+        <a:font script="Ethi" typeface="Nyala"/>
+        <a:font script="Beng" typeface="Vrinda"/>
+        <a:font script="Gujr" typeface="Shruti"/>
+        <a:font script="Khmr" typeface="MoolBoran"/>
+        <a:font script="Knda" typeface="Tunga"/>
+        <a:font script="Guru" typeface="Raavi"/>
+        <a:font script="Cans" typeface="Euphemia"/>
+        <a:font script="Cher" typeface="Plantagenet Cherokee"/>
+        <a:font script="Yiii" typeface="Microsoft Yi Baiti"/>
+        <a:font script="Tibt" typeface="Microsoft Himalaya"/>
+        <a:font script="Thaa" typeface="MV Boli"/>
+        <a:font script="Deva" typeface="Mangal"/>
+        <a:font script="Telu" typeface="Gautami"/>
+        <a:font script="Taml" typeface="Latha"/>
+        <a:font script="Syrc" typeface="Estrangelo Edessa"/>
+        <a:font script="Orya" typeface="Kalinga"/>
+        <a:font script="Mlym" typeface="Kartika"/>
+        <a:font script="Laoo" typeface="DokChampa"/>
+        <a:font script="Sinh" typeface="Iskoola Pota"/>
+        <a:font script="Mong" typeface="Mongolian Baiti"/>
+        <a:font script="Viet" typeface="Times New Roman"/>
+        <a:font script="Uigh" typeface="Microsoft Uighur"/>
+        <a:font script="Geor" typeface="Sylfaen"/>
+        <a:font script="Armn" typeface="Arial"/>
+        <a:font script="Bugi" typeface="Leelawadee UI"/>
+        <a:font script="Bopo" typeface="Microsoft JhengHei"/>
+        <a:font script="Java" typeface="Javanese Text"/>
+        <a:font script="Lisu" typeface="Segoe UI"/>
+        <a:font script="Mymr" typeface="Myanmar Text"/>
+        <a:font script="Nkoo" typeface="Ebrima"/>
+        <a:font script="Olck" typeface="Nirmala UI"/>
+        <a:font script="Osma" typeface="Ebrima"/>
+        <a:font script="Phag" typeface="Phagspa"/>
+        <a:font script="Syrn" typeface="Estrangelo Edessa"/>
+        <a:font script="Syrj" typeface="Estrangelo Edessa"/>
+        <a:font script="Syre" typeface="Estrangelo Edessa"/>
+        <a:font script="Sora" typeface="Nirmala UI"/>
+        <a:font script="Tale" typeface="Microsoft Tai Le"/>
+        <a:font script="Talu" typeface="Microsoft New Tai Lue"/>
+        <a:font script="Tfng" typeface="Ebrima"/>
+      </a:majorFont>
+      <a:minorFont>
+        <a:latin typeface="Aptos" panose="02110004020202020204"/>
+        <a:ea typeface=""/>
+        <a:cs typeface=""/>
+        <a:font script="Jpan" typeface="游ゴシック"/>
+        <a:font script="Hang" typeface="맑은 고딕"/>
+        <a:font script="Hans" typeface="等线"/>
+        <a:font script="Hant" typeface="新細明體"/>
+        <a:font script="Arab" typeface="Arial"/>
+        <a:font script="Hebr" typeface="Arial"/>
+        <a:font script="Thai" typeface="Cordia New"/>
+        <a:font script="Ethi" typeface="Nyala"/>
+        <a:font script="Beng" typeface="Vrinda"/>
+        <a:font script="Gujr" typeface="Shruti"/>
+        <a:font script="Khmr" typeface="DaunPenh"/>
+        <a:font script="Knda" typeface="Tunga"/>
+        <a:font script="Guru" typeface="Raavi"/>
+        <a:font script="Cans" typeface="Euphemia"/>
+        <a:font script="Cher" typeface="Plantagenet Cherokee"/>
+        <a:font script="Yiii" typeface="Microsoft Yi Baiti"/>
+        <a:font script="Tibt" typeface="Microsoft Himalaya"/>
+        <a:font script="Thaa" typeface="MV Boli"/>
+        <a:font script="Deva" typeface="Mangal"/>
+        <a:font script="Telu" typeface="Gautami"/>
+        <a:font script="Taml" typeface="Latha"/>
+        <a:font script="Syrc" typeface="Estrangelo Edessa"/>
+        <a:font script="Orya" typeface="Kalinga"/>
+        <a:font script="Mlym" typeface="Kartika"/>
+        <a:font script="Laoo" typeface="DokChampa"/>
+        <a:font script="Sinh" typeface="Iskoola Pota"/>
+        <a:font script="Mong" typeface="Mongolian Baiti"/>
+        <a:font script="Viet" typeface="Arial"/>
+        <a:font script="Uigh" typeface="Microsoft Uighur"/>
+        <a:font script="Geor" typeface="Sylfaen"/>
+        <a:font script="Armn" typeface="Arial"/>
+        <a:font script="Bugi" typeface="Leelawadee UI"/>
+        <a:font script="Bopo" typeface="Microsoft JhengHei"/>
+        <a:font script="Java" typeface="Javanese Text"/>
+        <a:font script="Lisu" typeface="Segoe UI"/>
+        <a:font script="Mymr" typeface="Myanmar Text"/>
+        <a:font script="Nkoo" typeface="Ebrima"/>
+        <a:font script="Olck" typeface="Nirmala UI"/>
+        <a:font script="Osma" typeface="Ebrima"/>
+        <a:font script="Phag" typeface="Phagspa"/>
+        <a:font script="Syrn" typeface="Estrangelo Edessa"/>
+        <a:font script="Syrj" typeface="Estrangelo Edessa"/>
+        <a:font script="Syre" typeface="Estrangelo Edessa"/>
+        <a:font script="Sora" typeface="Nirmala UI"/>
+        <a:font script="Tale" typeface="Microsoft Tai Le"/>
+        <a:font script="Talu" typeface="Microsoft New Tai Lue"/>
+        <a:font script="Tfng" typeface="Ebrima"/>
+      </a:minorFont>
+    </a:fontScheme>
+    <a:fmtScheme name="Office">
+      <a:fillStyleLst>
+        <a:solidFill>
+          <a:schemeClr val="phClr"/>
+        </a:solidFill>
+        <a:gradFill rotWithShape="1">
+          <a:gsLst>
+            <a:gs pos="0">
+              <a:schemeClr val="phClr">
+                <a:lumMod val="110000"/>
+                <a:satMod val="105000"/>
+                <a:tint val="67000"/>
+              </a:schemeClr>
+            </a:gs>
+            <a:gs pos="50000">
+              <a:schemeClr val="phClr">
+                <a:lumMod val="105000"/>
+                <a:satMod val="103000"/>
+                <a:tint val="73000"/>
+              </a:schemeClr>
+            </a:gs>
+            <a:gs pos="100000">
+              <a:schemeClr val="phClr">
+                <a:lumMod val="105000"/>
+                <a:satMod val="109000"/>
+                <a:tint val="81000"/>
+              </a:schemeClr>
+            </a:gs>
+          </a:gsLst>
+          <a:lin ang="5400000" scaled="0"/>
+        </a:gradFill>
+        <a:gradFill rotWithShape="1">
+          <a:gsLst>
+            <a:gs pos="0">
+              <a:schemeClr val="phClr">
+                <a:satMod val="103000"/>
+                <a:lumMod val="102000"/>
+                <a:tint val="94000"/>
+              </a:schemeClr>
+            </a:gs>
+            <a:gs pos="50000">
+              <a:schemeClr val="phClr">
+                <a:satMod val="110000"/>
+                <a:lumMod val="100000"/>
+                <a:shade val="100000"/>
+              </a:schemeClr>
+            </a:gs>
+            <a:gs pos="100000">
+              <a:schemeClr val="phClr">
+                <a:lumMod val="99000"/>
+                <a:satMod val="120000"/>
+                <a:shade val="78000"/>
+              </a:schemeClr>
+            </a:gs>
+          </a:gsLst>
+          <a:lin ang="5400000" scaled="0"/>
+        </a:gradFill>
+      </a:fillStyleLst>
+      <a:lnStyleLst>
+        <a:ln w="12700" cap="flat" cmpd="sng" algn="ctr">
+          <a:solidFill>
+            <a:schemeClr val="phClr"/>
+          </a:solidFill>
+          <a:prstDash val="solid"/>
+          <a:miter lim="800000"/>
+        </a:ln>
+        <a:ln w="19050" cap="flat" cmpd="sng" algn="ctr">
+          <a:solidFill>
+            <a:schemeClr val="phClr"/>
+          </a:solidFill>
+          <a:prstDash val="solid"/>
+          <a:miter lim="800000"/>
+        </a:ln>
+        <a:ln w="25400" cap="flat" cmpd="sng" algn="ctr">
+          <a:solidFill>
+            <a:schemeClr val="phClr"/>
+          </a:solidFill>
+          <a:prstDash val="solid"/>
+          <a:miter lim="800000"/>
+        </a:ln>
+      </a:lnStyleLst>
+      <a:effectStyleLst>
+        <a:effectStyle>
+          <a:effectLst/>
+        </a:effectStyle>
+        <a:effectStyle>
+          <a:effectLst/>
+        </a:effectStyle>
+        <a:effectStyle>
+          <a:effectLst>
+            <a:outerShdw blurRad="57150" dist="19050" dir="5400000" algn="ctr" rotWithShape="0">
+              <a:srgbClr val="000000">
+                <a:alpha val="63000"/>
+              </a:srgbClr>
+            </a:outerShdw>
+          </a:effectLst>
+        </a:effectStyle>
+      </a:effectStyleLst>
+      <a:bgFillStyleLst>
+        <a:solidFill>
+          <a:schemeClr val="phClr"/>
+        </a:solidFill>
+        <a:solidFill>
+          <a:schemeClr val="phClr">
+            <a:tint val="95000"/>
+            <a:satMod val="170000"/>
+          </a:schemeClr>
+        </a:solidFill>
+        <a:gradFill rotWithShape="1">
+          <a:gsLst>
+            <a:gs pos="0">
+              <a:schemeClr val="phClr">
+                <a:tint val="93000"/>
+                <a:satMod val="150000"/>
+                <a:shade val="98000"/>
+                <a:lumMod val="102000"/>
+              </a:schemeClr>
+            </a:gs>
+            <a:gs pos="50000">
+              <a:schemeClr val="phClr">
+                <a:tint val="98000"/>
+                <a:satMod val="130000"/>
+                <a:shade val="90000"/>
+                <a:lumMod val="103000"/>
+              </a:schemeClr>
+            </a:gs>
+            <a:gs pos="100000">
+              <a:schemeClr val="phClr">
+                <a:shade val="63000"/>
+                <a:satMod val="120000"/>
+              </a:schemeClr>
+            </a:gs>
+          </a:gsLst>
+          <a:lin ang="5400000" scaled="0"/>
+        </a:gradFill>
+      </a:bgFillStyleLst>
+    </a:fmtScheme>
+  </a:themeElements>
+  <a:objectDefaults>
+    <a:lnDef>
+      <a:spPr/>
+      <a:bodyPr/>
+      <a:lstStyle/>
+      <a:style>
+        <a:lnRef idx="2">
+          <a:schemeClr val="accent1"/>
+        </a:lnRef>
+        <a:fillRef idx="0">
+          <a:schemeClr val="accent1"/>
+        </a:fillRef>
+        <a:effectRef idx="1">
+          <a:schemeClr val="accent1"/>
+        </a:effectRef>
+        <a:fontRef idx="minor">
+          <a:schemeClr val="tx1"/>
+        </a:fontRef>
+      </a:style>
+    </a:lnDef>
+  </a:objectDefaults>
+  <a:extraClrSchemeLst/>
+  <a:extLst>
+    <a:ext uri="{05A4C25C-085E-4340-85A3-A5531E510DB2}">
+      <thm15:themeFamily xmlns:thm15="http://schemas.microsoft.com/office/thememl/2012/main" name="Office Theme" id="{2E142A2C-CD16-42D6-873A-C26D2A0506FA}" vid="{1BDDFF52-6CD6-40A5-AB3C-68EB2F1E4D0A}"/>
+    </a:ext>
+  </a:extLst>
+</a:theme>
 </file>